--- a/figures/ppt/研究框架.pptx
+++ b/figures/ppt/研究框架.pptx
@@ -112,7 +112,7 @@
             <a:srgbClr val="A4A3A4"/>
           </p15:clr>
         </p15:guide>
-        <p15:guide id="2" pos="3876" userDrawn="1">
+        <p15:guide id="2" pos="3877" userDrawn="1">
           <p15:clr>
             <a:srgbClr val="A4A3A4"/>
           </p15:clr>
@@ -2938,8 +2938,8 @@
         </p:nvSpPr>
         <p:spPr>
           <a:xfrm>
-            <a:off x="1216660" y="132715"/>
-            <a:ext cx="1802130" cy="789940"/>
+            <a:off x="86360" y="184150"/>
+            <a:ext cx="1802130" cy="553085"/>
           </a:xfrm>
           <a:prstGeom prst="roundRect">
             <a:avLst/>
@@ -2984,7 +2984,7 @@
                   <a:schemeClr val="tx1"/>
                 </a:solidFill>
               </a:rPr>
-              <a:t>研究选题</a:t>
+              <a:t>绪论</a:t>
             </a:r>
             <a:endParaRPr lang="zh-CN" altLang="en-US" b="1">
               <a:solidFill>
@@ -2992,6 +2992,30 @@
               </a:solidFill>
             </a:endParaRPr>
           </a:p>
+          <a:p>
+            <a:pPr algn="ctr"/>
+            <a:r>
+              <a:rPr lang="zh-CN" altLang="en-US" b="1">
+                <a:solidFill>
+                  <a:schemeClr val="tx1"/>
+                </a:solidFill>
+              </a:rPr>
+              <a:t>（</a:t>
+            </a:r>
+            <a:r>
+              <a:rPr lang="zh-CN" altLang="en-US" b="1">
+                <a:solidFill>
+                  <a:schemeClr val="tx1"/>
+                </a:solidFill>
+              </a:rPr>
+              <a:t>第一章）</a:t>
+            </a:r>
+            <a:endParaRPr lang="zh-CN" altLang="en-US" b="1">
+              <a:solidFill>
+                <a:schemeClr val="tx1"/>
+              </a:solidFill>
+            </a:endParaRPr>
+          </a:p>
         </p:txBody>
       </p:sp>
       <p:sp>
@@ -3002,8 +3026,8 @@
         </p:nvSpPr>
         <p:spPr>
           <a:xfrm>
-            <a:off x="3150235" y="132715"/>
-            <a:ext cx="7641590" cy="789940"/>
+            <a:off x="2019935" y="184150"/>
+            <a:ext cx="7641590" cy="553085"/>
           </a:xfrm>
           <a:prstGeom prst="roundRect">
             <a:avLst/>
@@ -3043,42 +3067,13 @@
       </p:sp>
       <p:sp>
         <p:nvSpPr>
-          <p:cNvPr id="6" name="文本框 5"/>
-          <p:cNvSpPr txBox="1"/>
-          <p:nvPr/>
-        </p:nvSpPr>
-        <p:spPr>
-          <a:xfrm>
-            <a:off x="3246755" y="161925"/>
-            <a:ext cx="1382395" cy="306705"/>
-          </a:xfrm>
-          <a:prstGeom prst="rect">
-            <a:avLst/>
-          </a:prstGeom>
-          <a:noFill/>
-        </p:spPr>
-        <p:txBody>
-          <a:bodyPr wrap="square" rtlCol="0">
-            <a:spAutoFit/>
-          </a:bodyPr>
-          <a:p>
-            <a:r>
-              <a:rPr lang="zh-CN" altLang="en-US" sz="1400" b="1"/>
-              <a:t>绪论（第一章）</a:t>
-            </a:r>
-            <a:endParaRPr lang="zh-CN" altLang="en-US" sz="1400" b="1"/>
-          </a:p>
-        </p:txBody>
-      </p:sp>
-      <p:sp>
-        <p:nvSpPr>
           <p:cNvPr id="7" name="矩形 6"/>
           <p:cNvSpPr/>
           <p:nvPr/>
         </p:nvSpPr>
         <p:spPr>
           <a:xfrm>
-            <a:off x="3657600" y="485775"/>
+            <a:off x="2527300" y="300355"/>
             <a:ext cx="1261745" cy="339725"/>
           </a:xfrm>
           <a:prstGeom prst="rect">
@@ -3135,8 +3130,8 @@
         </p:nvSpPr>
         <p:spPr>
           <a:xfrm>
-            <a:off x="1216025" y="982980"/>
-            <a:ext cx="1802130" cy="4976495"/>
+            <a:off x="86360" y="807720"/>
+            <a:ext cx="1823720" cy="5363845"/>
           </a:xfrm>
           <a:prstGeom prst="roundRect">
             <a:avLst/>
@@ -3187,8 +3182,8 @@
         </p:nvSpPr>
         <p:spPr>
           <a:xfrm>
-            <a:off x="1216025" y="6023610"/>
-            <a:ext cx="1802130" cy="789940"/>
+            <a:off x="107950" y="6239510"/>
+            <a:ext cx="1802130" cy="572135"/>
           </a:xfrm>
           <a:prstGeom prst="roundRect">
             <a:avLst/>
@@ -3233,7 +3228,15 @@
                   <a:schemeClr val="tx1"/>
                 </a:solidFill>
               </a:rPr>
-              <a:t>研究结论</a:t>
+              <a:t>总结</a:t>
+            </a:r>
+            <a:r>
+              <a:rPr lang="zh-CN" altLang="en-US" b="1">
+                <a:solidFill>
+                  <a:schemeClr val="tx1"/>
+                </a:solidFill>
+              </a:rPr>
+              <a:t>展望</a:t>
             </a:r>
             <a:endParaRPr lang="zh-CN" altLang="en-US" b="1">
               <a:solidFill>
@@ -3241,6 +3244,30 @@
               </a:solidFill>
             </a:endParaRPr>
           </a:p>
+          <a:p>
+            <a:pPr algn="ctr"/>
+            <a:r>
+              <a:rPr lang="zh-CN" altLang="en-US" b="1">
+                <a:solidFill>
+                  <a:schemeClr val="tx1"/>
+                </a:solidFill>
+              </a:rPr>
+              <a:t>（</a:t>
+            </a:r>
+            <a:r>
+              <a:rPr lang="zh-CN" altLang="en-US" b="1">
+                <a:solidFill>
+                  <a:schemeClr val="tx1"/>
+                </a:solidFill>
+              </a:rPr>
+              <a:t>第六章）</a:t>
+            </a:r>
+            <a:endParaRPr lang="zh-CN" altLang="en-US" b="1">
+              <a:solidFill>
+                <a:schemeClr val="tx1"/>
+              </a:solidFill>
+            </a:endParaRPr>
+          </a:p>
         </p:txBody>
       </p:sp>
       <p:sp>
@@ -3251,8 +3278,8 @@
         </p:nvSpPr>
         <p:spPr>
           <a:xfrm>
-            <a:off x="3150235" y="6027420"/>
-            <a:ext cx="7641590" cy="760095"/>
+            <a:off x="2042160" y="6239510"/>
+            <a:ext cx="7641590" cy="527685"/>
           </a:xfrm>
           <a:prstGeom prst="roundRect">
             <a:avLst/>
@@ -3298,7 +3325,7 @@
         </p:nvSpPr>
         <p:spPr>
           <a:xfrm>
-            <a:off x="1858010" y="2458085"/>
+            <a:off x="739775" y="2397125"/>
             <a:ext cx="517525" cy="2030095"/>
           </a:xfrm>
           <a:prstGeom prst="rect">
@@ -3363,50 +3390,13 @@
       </p:sp>
       <p:sp>
         <p:nvSpPr>
-          <p:cNvPr id="15" name="文本框 14"/>
-          <p:cNvSpPr txBox="1"/>
-          <p:nvPr/>
-        </p:nvSpPr>
-        <p:spPr>
-          <a:xfrm>
-            <a:off x="3240405" y="6040755"/>
-            <a:ext cx="2701925" cy="306705"/>
-          </a:xfrm>
-          <a:prstGeom prst="rect">
-            <a:avLst/>
-          </a:prstGeom>
-          <a:noFill/>
-        </p:spPr>
-        <p:txBody>
-          <a:bodyPr wrap="square" rtlCol="0">
-            <a:spAutoFit/>
-          </a:bodyPr>
-          <a:p>
-            <a:r>
-              <a:rPr lang="zh-CN" altLang="en-US" sz="1400" b="1"/>
-              <a:t>总结与</a:t>
-            </a:r>
-            <a:r>
-              <a:rPr lang="zh-CN" altLang="en-US" sz="1400" b="1"/>
-              <a:t>展望（第六章</a:t>
-            </a:r>
-            <a:r>
-              <a:rPr lang="zh-CN" altLang="en-US" sz="1400"/>
-              <a:t>）</a:t>
-            </a:r>
-            <a:endParaRPr lang="zh-CN" altLang="en-US" sz="1400"/>
-          </a:p>
-        </p:txBody>
-      </p:sp>
-      <p:sp>
-        <p:nvSpPr>
           <p:cNvPr id="42" name="矩形 41"/>
           <p:cNvSpPr/>
           <p:nvPr/>
         </p:nvSpPr>
         <p:spPr>
           <a:xfrm>
-            <a:off x="3449320" y="6347460"/>
+            <a:off x="2275205" y="6360795"/>
             <a:ext cx="3318510" cy="351790"/>
           </a:xfrm>
           <a:prstGeom prst="rect">
@@ -3470,7 +3460,7 @@
         </p:nvSpPr>
         <p:spPr>
           <a:xfrm>
-            <a:off x="7219950" y="6347460"/>
+            <a:off x="6226810" y="6354445"/>
             <a:ext cx="3318510" cy="358140"/>
           </a:xfrm>
           <a:prstGeom prst="rect">
@@ -3534,10 +3524,10 @@
         </p:nvGrpSpPr>
         <p:grpSpPr>
           <a:xfrm>
-            <a:off x="3150235" y="974725"/>
-            <a:ext cx="7641590" cy="1800225"/>
-            <a:chOff x="4961" y="1777"/>
-            <a:chExt cx="12034" cy="2835"/>
+            <a:off x="2042160" y="756920"/>
+            <a:ext cx="7641590" cy="2230120"/>
+            <a:chOff x="4961" y="1100"/>
+            <a:chExt cx="12034" cy="3512"/>
           </a:xfrm>
         </p:grpSpPr>
         <p:sp>
@@ -3548,8 +3538,8 @@
           </p:nvSpPr>
           <p:spPr>
             <a:xfrm>
-              <a:off x="4961" y="1817"/>
-              <a:ext cx="12034" cy="1389"/>
+              <a:off x="4961" y="1159"/>
+              <a:ext cx="12034" cy="2047"/>
             </a:xfrm>
             <a:prstGeom prst="roundRect">
               <a:avLst>
@@ -3597,10 +3587,10 @@
           </p:nvGrpSpPr>
           <p:grpSpPr>
             <a:xfrm>
-              <a:off x="5085" y="1777"/>
-              <a:ext cx="1135" cy="386"/>
-              <a:chOff x="7349" y="5665"/>
-              <a:chExt cx="1135" cy="386"/>
+              <a:off x="5057" y="1100"/>
+              <a:ext cx="1116" cy="386"/>
+              <a:chOff x="7321" y="4988"/>
+              <a:chExt cx="1116" cy="386"/>
             </a:xfrm>
           </p:grpSpPr>
           <p:sp>
@@ -3611,7 +3601,7 @@
             </p:nvSpPr>
             <p:spPr>
               <a:xfrm>
-                <a:off x="7532" y="5665"/>
+                <a:off x="7485" y="4988"/>
                 <a:ext cx="952" cy="386"/>
               </a:xfrm>
               <a:prstGeom prst="rect">
@@ -3625,10 +3615,10 @@
               </a:bodyPr>
               <a:p>
                 <a:r>
-                  <a:rPr lang="zh-CN" altLang="en-US" sz="1000"/>
+                  <a:rPr lang="zh-CN" altLang="en-US" sz="1000" b="1"/>
                   <a:t>目标</a:t>
                 </a:r>
-                <a:endParaRPr lang="zh-CN" altLang="en-US" sz="1000"/>
+                <a:endParaRPr lang="zh-CN" altLang="en-US" sz="1000" b="1"/>
               </a:p>
             </p:txBody>
           </p:sp>
@@ -3640,7 +3630,7 @@
             </p:nvSpPr>
             <p:spPr>
               <a:xfrm rot="5400000">
-                <a:off x="7734" y="5368"/>
+                <a:off x="7706" y="4684"/>
                 <a:ext cx="250" cy="1020"/>
               </a:xfrm>
               <a:prstGeom prst="flowChartDelay">
@@ -3735,7 +3725,7 @@
                     <a:schemeClr val="tx1"/>
                   </a:solidFill>
                 </a:rPr>
-                <a:t>跨层无线</a:t>
+                <a:t>跨层无线资源调度</a:t>
               </a:r>
               <a:r>
                 <a:rPr lang="zh-CN" altLang="en-US" sz="1200">
@@ -3743,7 +3733,7 @@
                     <a:schemeClr val="tx1"/>
                   </a:solidFill>
                 </a:rPr>
-                <a:t>资源调度</a:t>
+                <a:t>效率</a:t>
               </a:r>
               <a:endParaRPr lang="zh-CN" altLang="en-US" sz="1200">
                 <a:solidFill>
@@ -3839,7 +3829,15 @@
                     <a:schemeClr val="tx1"/>
                   </a:solidFill>
                 </a:rPr>
-                <a:t>用户协作切换</a:t>
+                <a:t>接入</a:t>
+              </a:r>
+              <a:r>
+                <a:rPr lang="zh-CN" altLang="en-US" sz="1200">
+                  <a:solidFill>
+                    <a:schemeClr val="tx1"/>
+                  </a:solidFill>
+                </a:rPr>
+                <a:t>可靠性</a:t>
               </a:r>
               <a:br>
                 <a:rPr lang="zh-CN" altLang="en-US" sz="1200">
@@ -3935,6 +3933,14 @@
                   </a:solidFill>
                 </a:rPr>
                 <a:t>路由</a:t>
+              </a:r>
+              <a:r>
+                <a:rPr lang="zh-CN" altLang="en-US" sz="1200">
+                  <a:solidFill>
+                    <a:schemeClr val="tx1"/>
+                  </a:solidFill>
+                </a:rPr>
+                <a:t>可靠性</a:t>
               </a:r>
               <a:endParaRPr lang="zh-CN" altLang="en-US" sz="1200">
                 <a:solidFill>
@@ -4110,10 +4116,10 @@
                 <a:t>  </a:t>
               </a:r>
               <a:r>
-                <a:rPr lang="zh-CN" altLang="en-US" sz="1000"/>
+                <a:rPr lang="zh-CN" altLang="en-US" sz="1000" b="1"/>
                 <a:t>挑战</a:t>
               </a:r>
-              <a:endParaRPr lang="zh-CN" altLang="en-US" sz="1000"/>
+              <a:endParaRPr lang="zh-CN" altLang="en-US" sz="1000" b="1"/>
             </a:p>
           </p:txBody>
         </p:sp>
@@ -4595,7 +4601,7 @@
         </p:nvSpPr>
         <p:spPr>
           <a:xfrm>
-            <a:off x="3150235" y="2896235"/>
+            <a:off x="2042160" y="3108325"/>
             <a:ext cx="7641590" cy="3063240"/>
           </a:xfrm>
           <a:prstGeom prst="roundRect">
@@ -4644,7 +4650,7 @@
         </p:nvSpPr>
         <p:spPr>
           <a:xfrm rot="5400000">
-            <a:off x="3491230" y="2689860"/>
+            <a:off x="2383155" y="2901950"/>
             <a:ext cx="158750" cy="647700"/>
           </a:xfrm>
           <a:prstGeom prst="flowChartDelay">
@@ -4692,7 +4698,7 @@
         </p:nvSpPr>
         <p:spPr>
           <a:xfrm>
-            <a:off x="3240405" y="2878455"/>
+            <a:off x="2132330" y="3090545"/>
             <a:ext cx="694055" cy="245110"/>
           </a:xfrm>
           <a:prstGeom prst="rect">
@@ -4706,14 +4712,14 @@
           </a:bodyPr>
           <a:p>
             <a:r>
-              <a:rPr lang="zh-CN" altLang="en-US" sz="1000"/>
+              <a:rPr lang="zh-CN" altLang="en-US" sz="1000" b="1"/>
               <a:t>技术</a:t>
             </a:r>
             <a:r>
-              <a:rPr lang="zh-CN" altLang="en-US" sz="1000"/>
+              <a:rPr lang="zh-CN" altLang="en-US" sz="1000" b="1"/>
               <a:t>方案</a:t>
             </a:r>
-            <a:endParaRPr lang="zh-CN" altLang="en-US" sz="1000"/>
+            <a:endParaRPr lang="zh-CN" altLang="en-US" sz="1000" b="1"/>
           </a:p>
         </p:txBody>
       </p:sp>
@@ -4725,7 +4731,7 @@
         </p:nvSpPr>
         <p:spPr>
           <a:xfrm>
-            <a:off x="3272790" y="3138170"/>
+            <a:off x="2164715" y="3350260"/>
             <a:ext cx="2375535" cy="2769870"/>
           </a:xfrm>
           <a:prstGeom prst="roundRect">
@@ -4777,7 +4783,7 @@
         </p:nvSpPr>
         <p:spPr>
           <a:xfrm>
-            <a:off x="3299460" y="3165475"/>
+            <a:off x="2191385" y="3377565"/>
             <a:ext cx="2364740" cy="530860"/>
           </a:xfrm>
           <a:prstGeom prst="rect">
@@ -4807,7 +4813,7 @@
         </p:nvSpPr>
         <p:spPr>
           <a:xfrm>
-            <a:off x="5392420" y="466725"/>
+            <a:off x="4262120" y="281305"/>
             <a:ext cx="1261745" cy="339725"/>
           </a:xfrm>
           <a:prstGeom prst="rect">
@@ -4872,7 +4878,7 @@
         </p:nvSpPr>
         <p:spPr>
           <a:xfrm>
-            <a:off x="7127240" y="466725"/>
+            <a:off x="5996940" y="281305"/>
             <a:ext cx="1261745" cy="339725"/>
           </a:xfrm>
           <a:prstGeom prst="rect">
@@ -4937,7 +4943,7 @@
         </p:nvSpPr>
         <p:spPr>
           <a:xfrm>
-            <a:off x="8862060" y="484505"/>
+            <a:off x="7731760" y="299085"/>
             <a:ext cx="1261745" cy="339725"/>
           </a:xfrm>
           <a:prstGeom prst="rect">
@@ -5002,7 +5008,7 @@
         </p:nvCxnSpPr>
         <p:spPr>
           <a:xfrm>
-            <a:off x="7023735" y="1712595"/>
+            <a:off x="5915660" y="1924685"/>
             <a:ext cx="0" cy="537845"/>
           </a:xfrm>
           <a:prstGeom prst="straightConnector1">
@@ -5041,7 +5047,7 @@
         </p:nvCxnSpPr>
         <p:spPr>
           <a:xfrm>
-            <a:off x="9493250" y="1712595"/>
+            <a:off x="8385175" y="1924685"/>
             <a:ext cx="0" cy="537845"/>
           </a:xfrm>
           <a:prstGeom prst="straightConnector1">
@@ -5080,7 +5086,7 @@
         </p:nvCxnSpPr>
         <p:spPr>
           <a:xfrm>
-            <a:off x="4652645" y="2707005"/>
+            <a:off x="3544570" y="2919095"/>
             <a:ext cx="2540" cy="412750"/>
           </a:xfrm>
           <a:prstGeom prst="straightConnector1">
@@ -5119,7 +5125,7 @@
         </p:nvSpPr>
         <p:spPr>
           <a:xfrm>
-            <a:off x="5775325" y="3141980"/>
+            <a:off x="4667250" y="3354070"/>
             <a:ext cx="2375535" cy="2769870"/>
           </a:xfrm>
           <a:prstGeom prst="roundRect">
@@ -5171,7 +5177,7 @@
         </p:nvSpPr>
         <p:spPr>
           <a:xfrm>
-            <a:off x="8277860" y="3119755"/>
+            <a:off x="7169785" y="3331845"/>
             <a:ext cx="2375535" cy="2769870"/>
           </a:xfrm>
           <a:prstGeom prst="roundRect">
@@ -5223,7 +5229,7 @@
         </p:nvSpPr>
         <p:spPr>
           <a:xfrm>
-            <a:off x="5841365" y="3165475"/>
+            <a:off x="4733290" y="3377565"/>
             <a:ext cx="2364740" cy="530860"/>
           </a:xfrm>
           <a:prstGeom prst="rect">
@@ -5269,7 +5275,7 @@
         </p:nvSpPr>
         <p:spPr>
           <a:xfrm>
-            <a:off x="8288655" y="3165475"/>
+            <a:off x="7180580" y="3377565"/>
             <a:ext cx="2364740" cy="530860"/>
           </a:xfrm>
           <a:prstGeom prst="rect">
@@ -5285,7 +5291,7 @@
             <a:pPr algn="ctr"/>
             <a:r>
               <a:rPr lang="zh-CN" altLang="en-US" sz="1200" b="1"/>
-              <a:t>用户驱动的语义</a:t>
+              <a:t>任务驱动的语义</a:t>
             </a:r>
             <a:r>
               <a:rPr lang="en-US" altLang="zh-CN" sz="1200" b="1"/>
@@ -5311,7 +5317,7 @@
         </p:nvSpPr>
         <p:spPr>
           <a:xfrm>
-            <a:off x="5965190" y="3654425"/>
+            <a:off x="4857115" y="3866515"/>
             <a:ext cx="1969770" cy="427990"/>
           </a:xfrm>
           <a:prstGeom prst="roundRect">
@@ -5360,7 +5366,7 @@
         </p:nvSpPr>
         <p:spPr>
           <a:xfrm>
-            <a:off x="6022975" y="3656965"/>
+            <a:off x="4914900" y="3869055"/>
             <a:ext cx="1875155" cy="398780"/>
           </a:xfrm>
           <a:prstGeom prst="rect">
@@ -5418,7 +5424,7 @@
         </p:nvSpPr>
         <p:spPr>
           <a:xfrm>
-            <a:off x="5965190" y="4349115"/>
+            <a:off x="4857115" y="4561205"/>
             <a:ext cx="1969770" cy="1540510"/>
           </a:xfrm>
           <a:prstGeom prst="roundRect">
@@ -5474,7 +5480,7 @@
         </p:nvSpPr>
         <p:spPr>
           <a:xfrm>
-            <a:off x="6052185" y="4454525"/>
+            <a:off x="4944110" y="4666615"/>
             <a:ext cx="1796415" cy="427990"/>
           </a:xfrm>
           <a:prstGeom prst="roundRect">
@@ -5523,7 +5529,7 @@
         </p:nvCxnSpPr>
         <p:spPr>
           <a:xfrm>
-            <a:off x="6962775" y="4082415"/>
+            <a:off x="5854700" y="4294505"/>
             <a:ext cx="0" cy="248920"/>
           </a:xfrm>
           <a:prstGeom prst="straightConnector1">
@@ -5560,7 +5566,7 @@
         </p:nvSpPr>
         <p:spPr>
           <a:xfrm>
-            <a:off x="6596380" y="4053205"/>
+            <a:off x="5488305" y="4265295"/>
             <a:ext cx="862965" cy="245110"/>
           </a:xfrm>
           <a:prstGeom prst="rect">
@@ -5613,7 +5619,7 @@
         </p:nvSpPr>
         <p:spPr>
           <a:xfrm>
-            <a:off x="6101715" y="4482465"/>
+            <a:off x="4993640" y="4694555"/>
             <a:ext cx="1694815" cy="398780"/>
           </a:xfrm>
           <a:prstGeom prst="rect">
@@ -5667,7 +5673,7 @@
         </p:nvSpPr>
         <p:spPr>
           <a:xfrm>
-            <a:off x="6101715" y="5309870"/>
+            <a:off x="4993640" y="5521960"/>
             <a:ext cx="1796415" cy="427990"/>
           </a:xfrm>
           <a:prstGeom prst="roundRect">
@@ -5716,7 +5722,7 @@
         </p:nvSpPr>
         <p:spPr>
           <a:xfrm>
-            <a:off x="6701790" y="4881245"/>
+            <a:off x="5593715" y="5093335"/>
             <a:ext cx="252095" cy="417195"/>
           </a:xfrm>
           <a:custGeom>
@@ -5806,7 +5812,7 @@
         </p:nvSpPr>
         <p:spPr>
           <a:xfrm flipH="1" flipV="1">
-            <a:off x="6967855" y="4882515"/>
+            <a:off x="5859780" y="5094605"/>
             <a:ext cx="252095" cy="417195"/>
           </a:xfrm>
           <a:custGeom>
@@ -5896,7 +5902,7 @@
         </p:nvSpPr>
         <p:spPr>
           <a:xfrm>
-            <a:off x="6742430" y="4896485"/>
+            <a:off x="5634355" y="5108575"/>
             <a:ext cx="459105" cy="398780"/>
           </a:xfrm>
           <a:prstGeom prst="rect">
@@ -5948,7 +5954,7 @@
         </p:nvSpPr>
         <p:spPr>
           <a:xfrm>
-            <a:off x="6308725" y="4941570"/>
+            <a:off x="5200650" y="5153660"/>
             <a:ext cx="459105" cy="245110"/>
           </a:xfrm>
           <a:prstGeom prst="rect">
@@ -5985,7 +5991,7 @@
         </p:nvSpPr>
         <p:spPr>
           <a:xfrm>
-            <a:off x="7205345" y="4941570"/>
+            <a:off x="6097270" y="5153660"/>
             <a:ext cx="459105" cy="245110"/>
           </a:xfrm>
           <a:prstGeom prst="rect">
@@ -6022,7 +6028,7 @@
         </p:nvSpPr>
         <p:spPr>
           <a:xfrm>
-            <a:off x="6154420" y="5339080"/>
+            <a:off x="5046345" y="5551170"/>
             <a:ext cx="1694815" cy="398780"/>
           </a:xfrm>
           <a:prstGeom prst="rect">
@@ -6084,7 +6090,7 @@
         </p:nvSpPr>
         <p:spPr>
           <a:xfrm>
-            <a:off x="8486140" y="3654425"/>
+            <a:off x="7378065" y="3866515"/>
             <a:ext cx="1969770" cy="427990"/>
           </a:xfrm>
           <a:prstGeom prst="roundRect">
@@ -6133,7 +6139,7 @@
         </p:nvSpPr>
         <p:spPr>
           <a:xfrm>
-            <a:off x="8618855" y="3654425"/>
+            <a:off x="7510780" y="3866515"/>
             <a:ext cx="1694815" cy="398780"/>
           </a:xfrm>
           <a:prstGeom prst="rect">
@@ -6167,7 +6173,7 @@
         </p:nvSpPr>
         <p:spPr>
           <a:xfrm>
-            <a:off x="8486140" y="4458970"/>
+            <a:off x="7378065" y="4671060"/>
             <a:ext cx="1673860" cy="427990"/>
           </a:xfrm>
           <a:prstGeom prst="roundRect">
@@ -6216,7 +6222,7 @@
         </p:nvSpPr>
         <p:spPr>
           <a:xfrm>
-            <a:off x="8751570" y="5285740"/>
+            <a:off x="7643495" y="5497830"/>
             <a:ext cx="1673860" cy="427990"/>
           </a:xfrm>
           <a:prstGeom prst="roundRect">
@@ -6265,7 +6271,7 @@
         </p:nvCxnSpPr>
         <p:spPr>
           <a:xfrm>
-            <a:off x="8862060" y="4100195"/>
+            <a:off x="7753985" y="4312285"/>
             <a:ext cx="0" cy="360045"/>
           </a:xfrm>
           <a:prstGeom prst="straightConnector1">
@@ -6302,7 +6308,7 @@
         </p:nvSpPr>
         <p:spPr>
           <a:xfrm>
-            <a:off x="8917305" y="4098925"/>
+            <a:off x="7809230" y="4311015"/>
             <a:ext cx="807720" cy="398780"/>
           </a:xfrm>
           <a:prstGeom prst="rect">
@@ -6354,7 +6360,7 @@
         </p:nvCxnSpPr>
         <p:spPr>
           <a:xfrm>
-            <a:off x="10313670" y="4100195"/>
+            <a:off x="9205595" y="4312285"/>
             <a:ext cx="0" cy="1162685"/>
           </a:xfrm>
           <a:prstGeom prst="straightConnector1">
@@ -6391,7 +6397,7 @@
         </p:nvSpPr>
         <p:spPr>
           <a:xfrm>
-            <a:off x="9775825" y="4086860"/>
+            <a:off x="8667750" y="4298950"/>
             <a:ext cx="645795" cy="398780"/>
           </a:xfrm>
           <a:prstGeom prst="rect">
@@ -6445,7 +6451,7 @@
         </p:nvCxnSpPr>
         <p:spPr>
           <a:xfrm>
-            <a:off x="7021195" y="2710815"/>
+            <a:off x="5913120" y="2922905"/>
             <a:ext cx="2540" cy="412750"/>
           </a:xfrm>
           <a:prstGeom prst="straightConnector1">
@@ -6484,7 +6490,7 @@
         </p:nvCxnSpPr>
         <p:spPr>
           <a:xfrm>
-            <a:off x="9493250" y="2707005"/>
+            <a:off x="8385175" y="2919095"/>
             <a:ext cx="2540" cy="412750"/>
           </a:xfrm>
           <a:prstGeom prst="straightConnector1">
@@ -6523,7 +6529,7 @@
         </p:nvSpPr>
         <p:spPr>
           <a:xfrm>
-            <a:off x="8547735" y="4497705"/>
+            <a:off x="7439660" y="4709795"/>
             <a:ext cx="1575435" cy="398780"/>
           </a:xfrm>
           <a:prstGeom prst="rect">
@@ -6565,7 +6571,7 @@
         </p:nvSpPr>
         <p:spPr>
           <a:xfrm>
-            <a:off x="8846185" y="5314950"/>
+            <a:off x="7738110" y="5527040"/>
             <a:ext cx="1575435" cy="398780"/>
           </a:xfrm>
           <a:prstGeom prst="rect">
@@ -6611,7 +6617,7 @@
         </p:nvSpPr>
         <p:spPr>
           <a:xfrm flipH="1" flipV="1">
-            <a:off x="9308465" y="4868545"/>
+            <a:off x="8200390" y="5080635"/>
             <a:ext cx="252095" cy="417195"/>
           </a:xfrm>
           <a:custGeom>
@@ -6701,7 +6707,7 @@
         </p:nvSpPr>
         <p:spPr>
           <a:xfrm>
-            <a:off x="9056370" y="4891405"/>
+            <a:off x="7948295" y="5103495"/>
             <a:ext cx="252095" cy="417195"/>
           </a:xfrm>
           <a:custGeom>
@@ -6791,7 +6797,7 @@
         </p:nvSpPr>
         <p:spPr>
           <a:xfrm>
-            <a:off x="8348345" y="4891405"/>
+            <a:off x="7240270" y="5103495"/>
             <a:ext cx="807720" cy="398780"/>
           </a:xfrm>
           <a:prstGeom prst="rect">
@@ -6837,7 +6843,7 @@
         </p:nvSpPr>
         <p:spPr>
           <a:xfrm>
-            <a:off x="9450070" y="4906010"/>
+            <a:off x="8341995" y="5118100"/>
             <a:ext cx="807720" cy="398780"/>
           </a:xfrm>
           <a:prstGeom prst="rect">
@@ -6883,7 +6889,7 @@
         </p:nvSpPr>
         <p:spPr>
           <a:xfrm>
-            <a:off x="9101455" y="4891405"/>
+            <a:off x="7993380" y="5103495"/>
             <a:ext cx="459105" cy="398780"/>
           </a:xfrm>
           <a:prstGeom prst="rect">
@@ -6935,7 +6941,7 @@
         </p:nvSpPr>
         <p:spPr>
           <a:xfrm>
-            <a:off x="3458210" y="3627755"/>
+            <a:off x="2350135" y="3839845"/>
             <a:ext cx="1969770" cy="427990"/>
           </a:xfrm>
           <a:prstGeom prst="roundRect">
@@ -6984,7 +6990,7 @@
         </p:nvSpPr>
         <p:spPr>
           <a:xfrm>
-            <a:off x="3565525" y="3654425"/>
+            <a:off x="2457450" y="3866515"/>
             <a:ext cx="1694815" cy="398780"/>
           </a:xfrm>
           <a:prstGeom prst="rect">
@@ -7018,7 +7024,7 @@
         </p:nvSpPr>
         <p:spPr>
           <a:xfrm>
-            <a:off x="3458210" y="4298315"/>
+            <a:off x="2350135" y="4510405"/>
             <a:ext cx="1969770" cy="427990"/>
           </a:xfrm>
           <a:prstGeom prst="roundRect">
@@ -7067,7 +7073,7 @@
         </p:nvCxnSpPr>
         <p:spPr>
           <a:xfrm>
-            <a:off x="4412615" y="4053205"/>
+            <a:off x="3304540" y="4265295"/>
             <a:ext cx="0" cy="213995"/>
           </a:xfrm>
           <a:prstGeom prst="straightConnector1">
@@ -7104,7 +7110,7 @@
         </p:nvSpPr>
         <p:spPr>
           <a:xfrm>
-            <a:off x="4396740" y="4048125"/>
+            <a:off x="3288665" y="4260215"/>
             <a:ext cx="862965" cy="245110"/>
           </a:xfrm>
           <a:prstGeom prst="rect">
@@ -7149,7 +7155,7 @@
         </p:nvSpPr>
         <p:spPr>
           <a:xfrm>
-            <a:off x="3613150" y="4389755"/>
+            <a:off x="2505075" y="4601845"/>
             <a:ext cx="1694815" cy="245110"/>
           </a:xfrm>
           <a:prstGeom prst="rect">
@@ -7183,7 +7189,7 @@
         </p:nvSpPr>
         <p:spPr>
           <a:xfrm>
-            <a:off x="3345180" y="4906010"/>
+            <a:off x="2237105" y="5118100"/>
             <a:ext cx="2284095" cy="942975"/>
           </a:xfrm>
           <a:prstGeom prst="roundRect">
@@ -7239,7 +7245,7 @@
         </p:nvSpPr>
         <p:spPr>
           <a:xfrm>
-            <a:off x="4154170" y="5165725"/>
+            <a:off x="3046095" y="5377815"/>
             <a:ext cx="655955" cy="601345"/>
           </a:xfrm>
           <a:prstGeom prst="roundRect">
@@ -7288,7 +7294,7 @@
         </p:nvSpPr>
         <p:spPr>
           <a:xfrm>
-            <a:off x="4874260" y="5165725"/>
+            <a:off x="3766185" y="5377815"/>
             <a:ext cx="655955" cy="601345"/>
           </a:xfrm>
           <a:prstGeom prst="roundRect">
@@ -7337,7 +7343,7 @@
         </p:nvSpPr>
         <p:spPr>
           <a:xfrm>
-            <a:off x="3422650" y="5165725"/>
+            <a:off x="2314575" y="5377815"/>
             <a:ext cx="655955" cy="601345"/>
           </a:xfrm>
           <a:prstGeom prst="roundRect">
@@ -7386,7 +7392,7 @@
         </p:nvCxnSpPr>
         <p:spPr>
           <a:xfrm flipV="1">
-            <a:off x="4412615" y="4692015"/>
+            <a:off x="3304540" y="4904105"/>
             <a:ext cx="0" cy="213995"/>
           </a:xfrm>
           <a:prstGeom prst="straightConnector1">
@@ -7423,7 +7429,7 @@
         </p:nvSpPr>
         <p:spPr>
           <a:xfrm>
-            <a:off x="4404360" y="4696460"/>
+            <a:off x="3296285" y="4908550"/>
             <a:ext cx="515620" cy="245110"/>
           </a:xfrm>
           <a:prstGeom prst="rect">
@@ -7460,8 +7466,8 @@
         </p:nvSpPr>
         <p:spPr>
           <a:xfrm>
-            <a:off x="3533140" y="4930775"/>
-            <a:ext cx="495935" cy="245110"/>
+            <a:off x="2341245" y="5156835"/>
+            <a:ext cx="720090" cy="245110"/>
           </a:xfrm>
           <a:prstGeom prst="rect">
             <a:avLst/>
@@ -7479,7 +7485,7 @@
                   <a:schemeClr val="bg1"/>
                 </a:solidFill>
               </a:rPr>
-              <a:t>协作</a:t>
+              <a:t>用户协作</a:t>
             </a:r>
             <a:endParaRPr lang="zh-CN" altLang="en-US" sz="1000">
               <a:solidFill>
@@ -7497,8 +7503,8 @@
         </p:nvSpPr>
         <p:spPr>
           <a:xfrm>
-            <a:off x="4253865" y="4931410"/>
-            <a:ext cx="495935" cy="245110"/>
+            <a:off x="3038475" y="5153660"/>
+            <a:ext cx="743585" cy="245110"/>
           </a:xfrm>
           <a:prstGeom prst="rect">
             <a:avLst/>
@@ -7516,7 +7522,7 @@
                   <a:schemeClr val="bg1"/>
                 </a:solidFill>
               </a:rPr>
-              <a:t>优化</a:t>
+              <a:t>目标优化</a:t>
             </a:r>
             <a:endParaRPr lang="zh-CN" altLang="en-US" sz="1000">
               <a:solidFill>
@@ -7534,8 +7540,8 @@
         </p:nvSpPr>
         <p:spPr>
           <a:xfrm>
-            <a:off x="4954270" y="4941570"/>
-            <a:ext cx="495935" cy="245110"/>
+            <a:off x="3671570" y="5139690"/>
+            <a:ext cx="887095" cy="245110"/>
           </a:xfrm>
           <a:prstGeom prst="rect">
             <a:avLst/>
@@ -7553,7 +7559,7 @@
                   <a:schemeClr val="bg1"/>
                 </a:solidFill>
               </a:rPr>
-              <a:t>训练</a:t>
+              <a:t>大规模训练</a:t>
             </a:r>
             <a:endParaRPr lang="zh-CN" altLang="en-US" sz="1000">
               <a:solidFill>
@@ -7571,7 +7577,7 @@
         </p:nvSpPr>
         <p:spPr>
           <a:xfrm>
-            <a:off x="4843780" y="5186045"/>
+            <a:off x="3735705" y="5398135"/>
             <a:ext cx="719455" cy="553085"/>
           </a:xfrm>
           <a:prstGeom prst="rect">
@@ -7621,7 +7627,7 @@
         </p:nvSpPr>
         <p:spPr>
           <a:xfrm>
-            <a:off x="4116070" y="5252720"/>
+            <a:off x="3007995" y="5464810"/>
             <a:ext cx="719455" cy="398780"/>
           </a:xfrm>
           <a:prstGeom prst="rect">
@@ -7663,7 +7669,7 @@
         </p:nvSpPr>
         <p:spPr>
           <a:xfrm>
-            <a:off x="3359150" y="5186680"/>
+            <a:off x="2251075" y="5398770"/>
             <a:ext cx="719455" cy="553085"/>
           </a:xfrm>
           <a:prstGeom prst="rect">
@@ -7686,6 +7692,255 @@
               <a:t>广播</a:t>
             </a:r>
             <a:endParaRPr lang="zh-CN" altLang="en-US" sz="1000"/>
+          </a:p>
+        </p:txBody>
+      </p:sp>
+      <p:sp>
+        <p:nvSpPr>
+          <p:cNvPr id="39" name="圆角矩形 38"/>
+          <p:cNvSpPr/>
+          <p:nvPr/>
+        </p:nvSpPr>
+        <p:spPr>
+          <a:xfrm>
+            <a:off x="3197225" y="852805"/>
+            <a:ext cx="5298440" cy="331470"/>
+          </a:xfrm>
+          <a:prstGeom prst="roundRect">
+            <a:avLst/>
+          </a:prstGeom>
+          <a:solidFill>
+            <a:schemeClr val="accent4">
+              <a:lumMod val="20000"/>
+              <a:lumOff val="80000"/>
+              <a:alpha val="65000"/>
+            </a:schemeClr>
+          </a:solidFill>
+          <a:ln>
+            <a:solidFill>
+              <a:schemeClr val="bg1">
+                <a:lumMod val="50000"/>
+              </a:schemeClr>
+            </a:solidFill>
+            <a:prstDash val="dash"/>
+          </a:ln>
+        </p:spPr>
+        <p:style>
+          <a:lnRef idx="2">
+            <a:schemeClr val="accent1">
+              <a:lumMod val="75000"/>
+            </a:schemeClr>
+          </a:lnRef>
+          <a:fillRef idx="1">
+            <a:schemeClr val="accent1"/>
+          </a:fillRef>
+          <a:effectRef idx="0">
+            <a:srgbClr val="FFFFFF"/>
+          </a:effectRef>
+          <a:fontRef idx="minor">
+            <a:schemeClr val="lt1"/>
+          </a:fontRef>
+        </p:style>
+        <p:txBody>
+          <a:bodyPr rtlCol="0" anchor="ctr"/>
+          <a:p>
+            <a:pPr algn="ctr"/>
+            <a:endParaRPr lang="zh-CN" altLang="en-US"/>
+          </a:p>
+        </p:txBody>
+      </p:sp>
+      <p:sp>
+        <p:nvSpPr>
+          <p:cNvPr id="10" name="文本框 9"/>
+          <p:cNvSpPr txBox="1"/>
+          <p:nvPr/>
+        </p:nvSpPr>
+        <p:spPr>
+          <a:xfrm>
+            <a:off x="3198495" y="815975"/>
+            <a:ext cx="5574665" cy="368300"/>
+          </a:xfrm>
+          <a:prstGeom prst="rect">
+            <a:avLst/>
+          </a:prstGeom>
+          <a:noFill/>
+        </p:spPr>
+        <p:txBody>
+          <a:bodyPr wrap="square" rtlCol="0">
+            <a:spAutoFit/>
+          </a:bodyPr>
+          <a:p>
+            <a:r>
+              <a:rPr lang="zh-CN" altLang="en-US" b="1">
+                <a:solidFill>
+                  <a:srgbClr val="FF0000"/>
+                </a:solidFill>
+              </a:rPr>
+              <a:t>任务驱动</a:t>
+            </a:r>
+            <a:r>
+              <a:rPr lang="zh-CN" altLang="en-US" b="1">
+                <a:solidFill>
+                  <a:srgbClr val="FF0000"/>
+                </a:solidFill>
+              </a:rPr>
+              <a:t>的高效、高可靠</a:t>
+            </a:r>
+            <a:r>
+              <a:rPr lang="zh-CN" altLang="en-US" b="1"/>
+              <a:t>的</a:t>
+            </a:r>
+            <a:r>
+              <a:rPr lang="en-US" altLang="zh-CN" b="1"/>
+              <a:t>LEO</a:t>
+            </a:r>
+            <a:r>
+              <a:rPr lang="zh-CN" altLang="en-US" b="1"/>
+              <a:t>卫星网络端到端传输</a:t>
+            </a:r>
+            <a:endParaRPr lang="zh-CN" altLang="en-US" b="1"/>
+          </a:p>
+        </p:txBody>
+      </p:sp>
+      <p:sp>
+        <p:nvSpPr>
+          <p:cNvPr id="41" name="文本框 40"/>
+          <p:cNvSpPr txBox="1"/>
+          <p:nvPr/>
+        </p:nvSpPr>
+        <p:spPr>
+          <a:xfrm>
+            <a:off x="11563985" y="6451600"/>
+            <a:ext cx="4064000" cy="368300"/>
+          </a:xfrm>
+          <a:prstGeom prst="rect">
+            <a:avLst/>
+          </a:prstGeom>
+          <a:noFill/>
+        </p:spPr>
+        <p:txBody>
+          <a:bodyPr wrap="square" rtlCol="0">
+            <a:spAutoFit/>
+          </a:bodyPr>
+          <a:p>
+            <a:endParaRPr lang="zh-CN" altLang="en-US"/>
+          </a:p>
+        </p:txBody>
+      </p:sp>
+      <p:sp>
+        <p:nvSpPr>
+          <p:cNvPr id="47" name="右箭头 46"/>
+          <p:cNvSpPr/>
+          <p:nvPr/>
+        </p:nvSpPr>
+        <p:spPr>
+          <a:xfrm rot="5400000">
+            <a:off x="5821680" y="1208405"/>
+            <a:ext cx="192405" cy="144145"/>
+          </a:xfrm>
+          <a:prstGeom prst="rightArrow">
+            <a:avLst/>
+          </a:prstGeom>
+        </p:spPr>
+        <p:style>
+          <a:lnRef idx="2">
+            <a:schemeClr val="accent1">
+              <a:lumMod val="75000"/>
+            </a:schemeClr>
+          </a:lnRef>
+          <a:fillRef idx="1">
+            <a:schemeClr val="accent1"/>
+          </a:fillRef>
+          <a:effectRef idx="0">
+            <a:srgbClr val="FFFFFF"/>
+          </a:effectRef>
+          <a:fontRef idx="minor">
+            <a:schemeClr val="lt1"/>
+          </a:fontRef>
+        </p:style>
+        <p:txBody>
+          <a:bodyPr rtlCol="0" anchor="ctr"/>
+          <a:p>
+            <a:pPr algn="ctr"/>
+            <a:endParaRPr lang="zh-CN" altLang="en-US"/>
+          </a:p>
+        </p:txBody>
+      </p:sp>
+      <p:sp>
+        <p:nvSpPr>
+          <p:cNvPr id="58" name="右箭头 57"/>
+          <p:cNvSpPr/>
+          <p:nvPr/>
+        </p:nvSpPr>
+        <p:spPr>
+          <a:xfrm rot="5400000">
+            <a:off x="7785100" y="1208405"/>
+            <a:ext cx="192405" cy="144145"/>
+          </a:xfrm>
+          <a:prstGeom prst="rightArrow">
+            <a:avLst/>
+          </a:prstGeom>
+        </p:spPr>
+        <p:style>
+          <a:lnRef idx="2">
+            <a:schemeClr val="accent1">
+              <a:lumMod val="75000"/>
+            </a:schemeClr>
+          </a:lnRef>
+          <a:fillRef idx="1">
+            <a:schemeClr val="accent1"/>
+          </a:fillRef>
+          <a:effectRef idx="0">
+            <a:srgbClr val="FFFFFF"/>
+          </a:effectRef>
+          <a:fontRef idx="minor">
+            <a:schemeClr val="lt1"/>
+          </a:fontRef>
+        </p:style>
+        <p:txBody>
+          <a:bodyPr rtlCol="0" anchor="ctr"/>
+          <a:p>
+            <a:pPr algn="ctr"/>
+            <a:endParaRPr lang="zh-CN" altLang="en-US"/>
+          </a:p>
+        </p:txBody>
+      </p:sp>
+      <p:sp>
+        <p:nvSpPr>
+          <p:cNvPr id="59" name="右箭头 58"/>
+          <p:cNvSpPr/>
+          <p:nvPr/>
+        </p:nvSpPr>
+        <p:spPr>
+          <a:xfrm rot="5400000">
+            <a:off x="3613785" y="1208405"/>
+            <a:ext cx="192405" cy="144145"/>
+          </a:xfrm>
+          <a:prstGeom prst="rightArrow">
+            <a:avLst/>
+          </a:prstGeom>
+        </p:spPr>
+        <p:style>
+          <a:lnRef idx="2">
+            <a:schemeClr val="accent1">
+              <a:lumMod val="75000"/>
+            </a:schemeClr>
+          </a:lnRef>
+          <a:fillRef idx="1">
+            <a:schemeClr val="accent1"/>
+          </a:fillRef>
+          <a:effectRef idx="0">
+            <a:srgbClr val="FFFFFF"/>
+          </a:effectRef>
+          <a:fontRef idx="minor">
+            <a:schemeClr val="lt1"/>
+          </a:fontRef>
+        </p:style>
+        <p:txBody>
+          <a:bodyPr rtlCol="0" anchor="ctr"/>
+          <a:p>
+            <a:pPr algn="ctr"/>
+            <a:endParaRPr lang="zh-CN" altLang="en-US"/>
           </a:p>
         </p:txBody>
       </p:sp>

--- a/figures/ppt/研究框架.pptx
+++ b/figures/ppt/研究框架.pptx
@@ -107,12 +107,12 @@
   <p:extLst>
     <p:ext uri="{EFAFB233-063F-42B5-8137-9DF3F51BA10A}">
       <p15:sldGuideLst xmlns:p15="http://schemas.microsoft.com/office/powerpoint/2012/main">
-        <p15:guide id="1" orient="horz" pos="2161" userDrawn="1">
+        <p15:guide id="1" orient="horz" pos="2187" userDrawn="1">
           <p15:clr>
             <a:srgbClr val="A4A3A4"/>
           </p15:clr>
         </p15:guide>
-        <p15:guide id="2" pos="3877" userDrawn="1">
+        <p15:guide id="2" pos="3841" userDrawn="1">
           <p15:clr>
             <a:srgbClr val="A4A3A4"/>
           </p15:clr>
@@ -2938,7 +2938,7 @@
         </p:nvSpPr>
         <p:spPr>
           <a:xfrm>
-            <a:off x="86360" y="184150"/>
+            <a:off x="-21590" y="3175"/>
             <a:ext cx="1802130" cy="553085"/>
           </a:xfrm>
           <a:prstGeom prst="roundRect">
@@ -3026,7 +3026,7 @@
         </p:nvSpPr>
         <p:spPr>
           <a:xfrm>
-            <a:off x="2019935" y="184150"/>
+            <a:off x="1911985" y="3175"/>
             <a:ext cx="7641590" cy="553085"/>
           </a:xfrm>
           <a:prstGeom prst="roundRect">
@@ -3073,7 +3073,7 @@
         </p:nvSpPr>
         <p:spPr>
           <a:xfrm>
-            <a:off x="2527300" y="300355"/>
+            <a:off x="2419350" y="119380"/>
             <a:ext cx="1261745" cy="339725"/>
           </a:xfrm>
           <a:prstGeom prst="rect">
@@ -3130,8 +3130,8 @@
         </p:nvSpPr>
         <p:spPr>
           <a:xfrm>
-            <a:off x="86360" y="807720"/>
-            <a:ext cx="1823720" cy="5363845"/>
+            <a:off x="-21590" y="626745"/>
+            <a:ext cx="1823720" cy="6174740"/>
           </a:xfrm>
           <a:prstGeom prst="roundRect">
             <a:avLst/>
@@ -3182,7 +3182,7 @@
         </p:nvSpPr>
         <p:spPr>
           <a:xfrm>
-            <a:off x="107950" y="6239510"/>
+            <a:off x="-21590" y="6894195"/>
             <a:ext cx="1802130" cy="572135"/>
           </a:xfrm>
           <a:prstGeom prst="roundRect">
@@ -3278,7 +3278,7 @@
         </p:nvSpPr>
         <p:spPr>
           <a:xfrm>
-            <a:off x="2042160" y="6239510"/>
+            <a:off x="1934210" y="6938645"/>
             <a:ext cx="7641590" cy="527685"/>
           </a:xfrm>
           <a:prstGeom prst="roundRect">
@@ -3325,7 +3325,7 @@
         </p:nvSpPr>
         <p:spPr>
           <a:xfrm>
-            <a:off x="739775" y="2397125"/>
+            <a:off x="631825" y="2216150"/>
             <a:ext cx="517525" cy="2030095"/>
           </a:xfrm>
           <a:prstGeom prst="rect">
@@ -3396,7 +3396,7 @@
         </p:nvSpPr>
         <p:spPr>
           <a:xfrm>
-            <a:off x="2275205" y="6360795"/>
+            <a:off x="2167255" y="7059930"/>
             <a:ext cx="3318510" cy="351790"/>
           </a:xfrm>
           <a:prstGeom prst="rect">
@@ -3460,7 +3460,7 @@
         </p:nvSpPr>
         <p:spPr>
           <a:xfrm>
-            <a:off x="6226810" y="6354445"/>
+            <a:off x="6118860" y="7053580"/>
             <a:ext cx="3318510" cy="358140"/>
           </a:xfrm>
           <a:prstGeom prst="rect">
@@ -3516,589 +3516,78 @@
           </a:p>
         </p:txBody>
       </p:sp>
+      <p:sp>
+        <p:nvSpPr>
+          <p:cNvPr id="16" name="圆角矩形 15"/>
+          <p:cNvSpPr/>
+          <p:nvPr/>
+        </p:nvSpPr>
+        <p:spPr>
+          <a:xfrm>
+            <a:off x="1934210" y="613410"/>
+            <a:ext cx="7641590" cy="1299845"/>
+          </a:xfrm>
+          <a:prstGeom prst="roundRect">
+            <a:avLst>
+              <a:gd name="adj" fmla="val 7642"/>
+            </a:avLst>
+          </a:prstGeom>
+          <a:solidFill>
+            <a:schemeClr val="accent4">
+              <a:lumMod val="40000"/>
+              <a:lumOff val="60000"/>
+            </a:schemeClr>
+          </a:solidFill>
+        </p:spPr>
+        <p:style>
+          <a:lnRef idx="2">
+            <a:schemeClr val="lt1"/>
+          </a:lnRef>
+          <a:fillRef idx="1">
+            <a:schemeClr val="accent1"/>
+          </a:fillRef>
+          <a:effectRef idx="1">
+            <a:schemeClr val="accent1"/>
+          </a:effectRef>
+          <a:fontRef idx="minor">
+            <a:schemeClr val="lt1"/>
+          </a:fontRef>
+        </p:style>
+        <p:txBody>
+          <a:bodyPr rtlCol="0" anchor="ctr"/>
+          <a:p>
+            <a:pPr algn="ctr"/>
+            <a:endParaRPr lang="zh-CN" altLang="en-US">
+              <a:solidFill>
+                <a:schemeClr val="tx1"/>
+              </a:solidFill>
+            </a:endParaRPr>
+          </a:p>
+        </p:txBody>
+      </p:sp>
       <p:grpSp>
         <p:nvGrpSpPr>
-          <p:cNvPr id="54" name="组合 53"/>
+          <p:cNvPr id="32" name="组合 31"/>
           <p:cNvGrpSpPr/>
           <p:nvPr/>
         </p:nvGrpSpPr>
         <p:grpSpPr>
-          <a:xfrm>
-            <a:off x="2042160" y="756920"/>
-            <a:ext cx="7641590" cy="2230120"/>
-            <a:chOff x="4961" y="1100"/>
-            <a:chExt cx="12034" cy="3512"/>
+          <a:xfrm rot="0">
+            <a:off x="1995170" y="575945"/>
+            <a:ext cx="708660" cy="245110"/>
+            <a:chOff x="7321" y="4988"/>
+            <a:chExt cx="1116" cy="386"/>
           </a:xfrm>
         </p:grpSpPr>
         <p:sp>
           <p:nvSpPr>
-            <p:cNvPr id="16" name="圆角矩形 15"/>
-            <p:cNvSpPr/>
-            <p:nvPr/>
-          </p:nvSpPr>
-          <p:spPr>
-            <a:xfrm>
-              <a:off x="4961" y="1159"/>
-              <a:ext cx="12034" cy="2047"/>
-            </a:xfrm>
-            <a:prstGeom prst="roundRect">
-              <a:avLst>
-                <a:gd name="adj" fmla="val 7642"/>
-              </a:avLst>
-            </a:prstGeom>
-            <a:solidFill>
-              <a:schemeClr val="accent4">
-                <a:lumMod val="40000"/>
-                <a:lumOff val="60000"/>
-              </a:schemeClr>
-            </a:solidFill>
-          </p:spPr>
-          <p:style>
-            <a:lnRef idx="2">
-              <a:schemeClr val="lt1"/>
-            </a:lnRef>
-            <a:fillRef idx="1">
-              <a:schemeClr val="accent1"/>
-            </a:fillRef>
-            <a:effectRef idx="1">
-              <a:schemeClr val="accent1"/>
-            </a:effectRef>
-            <a:fontRef idx="minor">
-              <a:schemeClr val="lt1"/>
-            </a:fontRef>
-          </p:style>
-          <p:txBody>
-            <a:bodyPr rtlCol="0" anchor="ctr"/>
-            <a:p>
-              <a:pPr algn="ctr"/>
-              <a:endParaRPr lang="zh-CN" altLang="en-US">
-                <a:solidFill>
-                  <a:schemeClr val="tx1"/>
-                </a:solidFill>
-              </a:endParaRPr>
-            </a:p>
-          </p:txBody>
-        </p:sp>
-        <p:grpSp>
-          <p:nvGrpSpPr>
-            <p:cNvPr id="32" name="组合 31"/>
-            <p:cNvGrpSpPr/>
-            <p:nvPr/>
-          </p:nvGrpSpPr>
-          <p:grpSpPr>
-            <a:xfrm>
-              <a:off x="5057" y="1100"/>
-              <a:ext cx="1116" cy="386"/>
-              <a:chOff x="7321" y="4988"/>
-              <a:chExt cx="1116" cy="386"/>
-            </a:xfrm>
-          </p:grpSpPr>
-          <p:sp>
-            <p:nvSpPr>
-              <p:cNvPr id="19" name="文本框 18"/>
-              <p:cNvSpPr txBox="1"/>
-              <p:nvPr/>
-            </p:nvSpPr>
-            <p:spPr>
-              <a:xfrm>
-                <a:off x="7485" y="4988"/>
-                <a:ext cx="952" cy="386"/>
-              </a:xfrm>
-              <a:prstGeom prst="rect">
-                <a:avLst/>
-              </a:prstGeom>
-              <a:noFill/>
-            </p:spPr>
-            <p:txBody>
-              <a:bodyPr wrap="square" rtlCol="0">
-                <a:spAutoFit/>
-              </a:bodyPr>
-              <a:p>
-                <a:r>
-                  <a:rPr lang="zh-CN" altLang="en-US" sz="1000" b="1"/>
-                  <a:t>目标</a:t>
-                </a:r>
-                <a:endParaRPr lang="zh-CN" altLang="en-US" sz="1000" b="1"/>
-              </a:p>
-            </p:txBody>
-          </p:sp>
-          <p:sp>
-            <p:nvSpPr>
-              <p:cNvPr id="20" name="流程图: 延期 19"/>
-              <p:cNvSpPr/>
-              <p:nvPr/>
-            </p:nvSpPr>
-            <p:spPr>
-              <a:xfrm rot="5400000">
-                <a:off x="7706" y="4684"/>
-                <a:ext cx="250" cy="1020"/>
-              </a:xfrm>
-              <a:prstGeom prst="flowChartDelay">
-                <a:avLst/>
-              </a:prstGeom>
-              <a:noFill/>
-              <a:ln>
-                <a:solidFill>
-                  <a:schemeClr val="bg1">
-                    <a:lumMod val="50000"/>
-                  </a:schemeClr>
-                </a:solidFill>
-                <a:prstDash val="sysDash"/>
-              </a:ln>
-            </p:spPr>
-            <p:style>
-              <a:lnRef idx="2">
-                <a:schemeClr val="accent1">
-                  <a:lumMod val="75000"/>
-                </a:schemeClr>
-              </a:lnRef>
-              <a:fillRef idx="1">
-                <a:schemeClr val="accent1"/>
-              </a:fillRef>
-              <a:effectRef idx="0">
-                <a:srgbClr val="FFFFFF"/>
-              </a:effectRef>
-              <a:fontRef idx="minor">
-                <a:schemeClr val="lt1"/>
-              </a:fontRef>
-            </p:style>
-            <p:txBody>
-              <a:bodyPr rtlCol="0" anchor="ctr"/>
-              <a:p>
-                <a:pPr algn="ctr"/>
-                <a:endParaRPr lang="zh-CN" altLang="en-US"/>
-              </a:p>
-            </p:txBody>
-          </p:sp>
-        </p:grpSp>
-        <p:sp>
-          <p:nvSpPr>
-            <p:cNvPr id="22" name="矩形 21"/>
-            <p:cNvSpPr/>
-            <p:nvPr/>
-          </p:nvSpPr>
-          <p:spPr>
-            <a:xfrm>
-              <a:off x="9609" y="2220"/>
-              <a:ext cx="2752" cy="704"/>
-            </a:xfrm>
-            <a:prstGeom prst="rect">
-              <a:avLst/>
-            </a:prstGeom>
-            <a:solidFill>
-              <a:schemeClr val="accent4">
-                <a:lumMod val="20000"/>
-                <a:lumOff val="80000"/>
-              </a:schemeClr>
-            </a:solidFill>
-            <a:ln>
-              <a:solidFill>
-                <a:schemeClr val="bg1">
-                  <a:lumMod val="50000"/>
-                </a:schemeClr>
-              </a:solidFill>
-            </a:ln>
-          </p:spPr>
-          <p:style>
-            <a:lnRef idx="2">
-              <a:schemeClr val="accent1">
-                <a:lumMod val="75000"/>
-              </a:schemeClr>
-            </a:lnRef>
-            <a:fillRef idx="1">
-              <a:schemeClr val="accent1"/>
-            </a:fillRef>
-            <a:effectRef idx="0">
-              <a:srgbClr val="FFFFFF"/>
-            </a:effectRef>
-            <a:fontRef idx="minor">
-              <a:schemeClr val="lt1"/>
-            </a:fontRef>
-          </p:style>
-          <p:txBody>
-            <a:bodyPr rtlCol="0" anchor="ctr"/>
-            <a:p>
-              <a:pPr algn="ctr"/>
-              <a:r>
-                <a:rPr lang="zh-CN" altLang="en-US" sz="1200">
-                  <a:solidFill>
-                    <a:schemeClr val="tx1"/>
-                  </a:solidFill>
-                </a:rPr>
-                <a:t>跨层无线资源调度</a:t>
-              </a:r>
-              <a:r>
-                <a:rPr lang="zh-CN" altLang="en-US" sz="1200">
-                  <a:solidFill>
-                    <a:schemeClr val="tx1"/>
-                  </a:solidFill>
-                </a:rPr>
-                <a:t>效率</a:t>
-              </a:r>
-              <a:endParaRPr lang="zh-CN" altLang="en-US" sz="1200">
-                <a:solidFill>
-                  <a:schemeClr val="tx1"/>
-                </a:solidFill>
-              </a:endParaRPr>
-            </a:p>
-            <a:p>
-              <a:pPr algn="ctr"/>
-              <a:r>
-                <a:rPr lang="zh-CN" altLang="en-US" sz="1200" b="1">
-                  <a:solidFill>
-                    <a:schemeClr val="tx1"/>
-                  </a:solidFill>
-                </a:rPr>
-                <a:t>用户级</a:t>
-              </a:r>
-              <a:r>
-                <a:rPr lang="en-US" altLang="zh-CN" sz="1200" b="1">
-                  <a:solidFill>
-                    <a:schemeClr val="tx1"/>
-                  </a:solidFill>
-                </a:rPr>
-                <a:t>QoS</a:t>
-              </a:r>
-              <a:r>
-                <a:rPr lang="zh-CN" altLang="en-US" sz="1200" b="1">
-                  <a:solidFill>
-                    <a:schemeClr val="tx1"/>
-                  </a:solidFill>
-                </a:rPr>
-                <a:t>保障</a:t>
-              </a:r>
-              <a:endParaRPr lang="zh-CN" altLang="en-US" sz="1200" b="1">
-                <a:solidFill>
-                  <a:schemeClr val="tx1"/>
-                </a:solidFill>
-              </a:endParaRPr>
-            </a:p>
-          </p:txBody>
-        </p:sp>
-        <p:sp>
-          <p:nvSpPr>
-            <p:cNvPr id="24" name="矩形 23"/>
-            <p:cNvSpPr/>
-            <p:nvPr/>
-          </p:nvSpPr>
-          <p:spPr>
-            <a:xfrm>
-              <a:off x="5796" y="2220"/>
-              <a:ext cx="2752" cy="704"/>
-            </a:xfrm>
-            <a:prstGeom prst="rect">
-              <a:avLst/>
-            </a:prstGeom>
-            <a:solidFill>
-              <a:schemeClr val="accent4">
-                <a:lumMod val="20000"/>
-                <a:lumOff val="80000"/>
-              </a:schemeClr>
-            </a:solidFill>
-            <a:ln>
-              <a:solidFill>
-                <a:schemeClr val="bg1">
-                  <a:lumMod val="50000"/>
-                </a:schemeClr>
-              </a:solidFill>
-            </a:ln>
-          </p:spPr>
-          <p:style>
-            <a:lnRef idx="2">
-              <a:schemeClr val="accent1">
-                <a:lumMod val="75000"/>
-              </a:schemeClr>
-            </a:lnRef>
-            <a:fillRef idx="1">
-              <a:schemeClr val="accent1"/>
-            </a:fillRef>
-            <a:effectRef idx="0">
-              <a:srgbClr val="FFFFFF"/>
-            </a:effectRef>
-            <a:fontRef idx="minor">
-              <a:schemeClr val="lt1"/>
-            </a:fontRef>
-          </p:style>
-          <p:txBody>
-            <a:bodyPr rtlCol="0" anchor="ctr"/>
-            <a:p>
-              <a:pPr algn="ctr"/>
-              <a:r>
-                <a:rPr lang="zh-CN" altLang="en-US" sz="1200">
-                  <a:solidFill>
-                    <a:schemeClr val="tx1"/>
-                  </a:solidFill>
-                </a:rPr>
-                <a:t>接入</a:t>
-              </a:r>
-              <a:r>
-                <a:rPr lang="zh-CN" altLang="en-US" sz="1200">
-                  <a:solidFill>
-                    <a:schemeClr val="tx1"/>
-                  </a:solidFill>
-                </a:rPr>
-                <a:t>可靠性</a:t>
-              </a:r>
-              <a:br>
-                <a:rPr lang="zh-CN" altLang="en-US" sz="1200">
-                  <a:solidFill>
-                    <a:schemeClr val="tx1"/>
-                  </a:solidFill>
-                </a:rPr>
-              </a:br>
-              <a:r>
-                <a:rPr lang="zh-CN" altLang="en-US" sz="1200" b="1">
-                  <a:solidFill>
-                    <a:schemeClr val="tx1"/>
-                  </a:solidFill>
-                </a:rPr>
-                <a:t>公平连续接入</a:t>
-              </a:r>
-              <a:endParaRPr lang="zh-CN" altLang="en-US" sz="1200" b="1">
-                <a:solidFill>
-                  <a:schemeClr val="tx1"/>
-                </a:solidFill>
-              </a:endParaRPr>
-            </a:p>
-          </p:txBody>
-        </p:sp>
-        <p:sp>
-          <p:nvSpPr>
-            <p:cNvPr id="25" name="矩形 24"/>
-            <p:cNvSpPr/>
-            <p:nvPr/>
-          </p:nvSpPr>
-          <p:spPr>
-            <a:xfrm>
-              <a:off x="13573" y="2220"/>
-              <a:ext cx="2752" cy="704"/>
-            </a:xfrm>
-            <a:prstGeom prst="rect">
-              <a:avLst/>
-            </a:prstGeom>
-            <a:solidFill>
-              <a:schemeClr val="accent4">
-                <a:lumMod val="20000"/>
-                <a:lumOff val="80000"/>
-              </a:schemeClr>
-            </a:solidFill>
-            <a:ln>
-              <a:solidFill>
-                <a:schemeClr val="bg1">
-                  <a:lumMod val="50000"/>
-                </a:schemeClr>
-              </a:solidFill>
-            </a:ln>
-          </p:spPr>
-          <p:style>
-            <a:lnRef idx="2">
-              <a:schemeClr val="accent1">
-                <a:lumMod val="75000"/>
-              </a:schemeClr>
-            </a:lnRef>
-            <a:fillRef idx="1">
-              <a:schemeClr val="accent1"/>
-            </a:fillRef>
-            <a:effectRef idx="0">
-              <a:srgbClr val="FFFFFF"/>
-            </a:effectRef>
-            <a:fontRef idx="minor">
-              <a:schemeClr val="lt1"/>
-            </a:fontRef>
-          </p:style>
-          <p:txBody>
-            <a:bodyPr rtlCol="0" anchor="ctr"/>
-            <a:p>
-              <a:pPr algn="ctr"/>
-              <a:r>
-                <a:rPr lang="zh-CN" altLang="en-US" sz="1200">
-                  <a:solidFill>
-                    <a:schemeClr val="tx1"/>
-                  </a:solidFill>
-                </a:rPr>
-                <a:t>语义编码</a:t>
-              </a:r>
-              <a:r>
-                <a:rPr lang="en-US" altLang="zh-CN" sz="1200">
-                  <a:solidFill>
-                    <a:schemeClr val="tx1"/>
-                  </a:solidFill>
-                </a:rPr>
-                <a:t>/</a:t>
-              </a:r>
-              <a:r>
-                <a:rPr lang="zh-CN" altLang="en-US" sz="1200">
-                  <a:solidFill>
-                    <a:schemeClr val="tx1"/>
-                  </a:solidFill>
-                </a:rPr>
-                <a:t>路由</a:t>
-              </a:r>
-              <a:r>
-                <a:rPr lang="zh-CN" altLang="en-US" sz="1200">
-                  <a:solidFill>
-                    <a:schemeClr val="tx1"/>
-                  </a:solidFill>
-                </a:rPr>
-                <a:t>可靠性</a:t>
-              </a:r>
-              <a:endParaRPr lang="zh-CN" altLang="en-US" sz="1200">
-                <a:solidFill>
-                  <a:schemeClr val="tx1"/>
-                </a:solidFill>
-              </a:endParaRPr>
-            </a:p>
-            <a:p>
-              <a:pPr algn="ctr"/>
-              <a:r>
-                <a:rPr lang="zh-CN" altLang="en-US" sz="1200" b="1">
-                  <a:solidFill>
-                    <a:schemeClr val="tx1"/>
-                  </a:solidFill>
-                </a:rPr>
-                <a:t>低开销、高可靠传输</a:t>
-              </a:r>
-              <a:endParaRPr lang="zh-CN" altLang="en-US" sz="1200" b="1">
-                <a:solidFill>
-                  <a:schemeClr val="tx1"/>
-                </a:solidFill>
-              </a:endParaRPr>
-            </a:p>
-          </p:txBody>
-        </p:sp>
-        <p:sp>
-          <p:nvSpPr>
-            <p:cNvPr id="26" name="圆角矩形 25"/>
-            <p:cNvSpPr/>
-            <p:nvPr/>
-          </p:nvSpPr>
-          <p:spPr>
-            <a:xfrm>
-              <a:off x="5432" y="2117"/>
-              <a:ext cx="7140" cy="1019"/>
-            </a:xfrm>
-            <a:prstGeom prst="roundRect">
-              <a:avLst/>
-            </a:prstGeom>
-            <a:noFill/>
-            <a:ln w="12700">
-              <a:solidFill>
-                <a:schemeClr val="tx1"/>
-              </a:solidFill>
-              <a:prstDash val="dash"/>
-            </a:ln>
-          </p:spPr>
-          <p:style>
-            <a:lnRef idx="2">
-              <a:schemeClr val="accent1">
-                <a:lumMod val="75000"/>
-              </a:schemeClr>
-            </a:lnRef>
-            <a:fillRef idx="1">
-              <a:schemeClr val="accent1"/>
-            </a:fillRef>
-            <a:effectRef idx="0">
-              <a:srgbClr val="FFFFFF"/>
-            </a:effectRef>
-            <a:fontRef idx="minor">
-              <a:schemeClr val="lt1"/>
-            </a:fontRef>
-          </p:style>
-          <p:txBody>
-            <a:bodyPr rtlCol="0" anchor="ctr"/>
-            <a:p>
-              <a:pPr algn="ctr"/>
-              <a:endParaRPr lang="zh-CN" altLang="en-US"/>
-            </a:p>
-          </p:txBody>
-        </p:sp>
-        <p:sp>
-          <p:nvSpPr>
-            <p:cNvPr id="28" name="文本框 27"/>
+            <p:cNvPr id="19" name="文本框 18"/>
             <p:cNvSpPr txBox="1"/>
             <p:nvPr/>
           </p:nvSpPr>
           <p:spPr>
             <a:xfrm>
-              <a:off x="8548" y="2720"/>
-              <a:ext cx="1492" cy="483"/>
-            </a:xfrm>
-            <a:prstGeom prst="rect">
-              <a:avLst/>
-            </a:prstGeom>
-            <a:noFill/>
-          </p:spPr>
-          <p:txBody>
-            <a:bodyPr wrap="square" rtlCol="0">
-              <a:spAutoFit/>
-            </a:bodyPr>
-            <a:p>
-              <a:r>
-                <a:rPr lang="zh-CN" altLang="en-US" sz="1400"/>
-                <a:t>接入层</a:t>
-              </a:r>
-              <a:endParaRPr lang="zh-CN" altLang="en-US" sz="1400"/>
-            </a:p>
-          </p:txBody>
-        </p:sp>
-        <p:sp>
-          <p:nvSpPr>
-            <p:cNvPr id="29" name="圆角矩形 28"/>
-            <p:cNvSpPr/>
-            <p:nvPr/>
-          </p:nvSpPr>
-          <p:spPr>
-            <a:xfrm>
-              <a:off x="4961" y="3394"/>
-              <a:ext cx="12034" cy="1218"/>
-            </a:xfrm>
-            <a:prstGeom prst="roundRect">
-              <a:avLst>
-                <a:gd name="adj" fmla="val 7642"/>
-              </a:avLst>
-            </a:prstGeom>
-            <a:solidFill>
-              <a:schemeClr val="accent4">
-                <a:lumMod val="40000"/>
-                <a:lumOff val="60000"/>
-              </a:schemeClr>
-            </a:solidFill>
-          </p:spPr>
-          <p:style>
-            <a:lnRef idx="2">
-              <a:schemeClr val="lt1"/>
-            </a:lnRef>
-            <a:fillRef idx="1">
-              <a:schemeClr val="accent1"/>
-            </a:fillRef>
-            <a:effectRef idx="1">
-              <a:schemeClr val="accent1"/>
-            </a:effectRef>
-            <a:fontRef idx="minor">
-              <a:schemeClr val="lt1"/>
-            </a:fontRef>
-          </p:style>
-          <p:txBody>
-            <a:bodyPr rtlCol="0" anchor="ctr"/>
-            <a:p>
-              <a:pPr algn="ctr"/>
-              <a:endParaRPr lang="zh-CN" altLang="en-US">
-                <a:solidFill>
-                  <a:schemeClr val="tx1"/>
-                </a:solidFill>
-              </a:endParaRPr>
-            </a:p>
-          </p:txBody>
-        </p:sp>
-        <p:sp>
-          <p:nvSpPr>
-            <p:cNvPr id="30" name="文本框 29"/>
-            <p:cNvSpPr txBox="1"/>
-            <p:nvPr/>
-          </p:nvSpPr>
-          <p:spPr>
-            <a:xfrm>
-              <a:off x="5153" y="3367"/>
+              <a:off x="7485" y="4988"/>
               <a:ext cx="952" cy="386"/>
             </a:xfrm>
             <a:prstGeom prst="rect">
@@ -4112,12 +3601,8 @@
             </a:bodyPr>
             <a:p>
               <a:r>
-                <a:rPr lang="en-US" altLang="zh-CN" sz="1000"/>
-                <a:t>  </a:t>
-              </a:r>
-              <a:r>
                 <a:rPr lang="zh-CN" altLang="en-US" sz="1000" b="1"/>
-                <a:t>挑战</a:t>
+                <a:t>目标</a:t>
               </a:r>
               <a:endParaRPr lang="zh-CN" altLang="en-US" sz="1000" b="1"/>
             </a:p>
@@ -4125,13 +3610,13 @@
         </p:sp>
         <p:sp>
           <p:nvSpPr>
-            <p:cNvPr id="31" name="流程图: 延期 30"/>
+            <p:cNvPr id="20" name="流程图: 延期 19"/>
             <p:cNvSpPr/>
             <p:nvPr/>
           </p:nvSpPr>
           <p:spPr>
             <a:xfrm rot="5400000">
-              <a:off x="5498" y="3048"/>
+              <a:off x="7706" y="4684"/>
               <a:ext cx="250" cy="1020"/>
             </a:xfrm>
             <a:prstGeom prst="flowChartDelay">
@@ -4171,499 +3656,33 @@
             </a:p>
           </p:txBody>
         </p:sp>
-        <p:sp>
-          <p:nvSpPr>
-            <p:cNvPr id="33" name="矩形 32"/>
-            <p:cNvSpPr/>
-            <p:nvPr/>
-          </p:nvSpPr>
-          <p:spPr>
-            <a:xfrm>
-              <a:off x="5615" y="3801"/>
-              <a:ext cx="3403" cy="704"/>
-            </a:xfrm>
-            <a:prstGeom prst="rect">
-              <a:avLst/>
-            </a:prstGeom>
-            <a:solidFill>
-              <a:schemeClr val="accent4">
-                <a:lumMod val="20000"/>
-                <a:lumOff val="80000"/>
-              </a:schemeClr>
-            </a:solidFill>
-            <a:ln>
-              <a:solidFill>
-                <a:schemeClr val="bg1">
-                  <a:lumMod val="50000"/>
-                </a:schemeClr>
-              </a:solidFill>
-            </a:ln>
-          </p:spPr>
-          <p:style>
-            <a:lnRef idx="2">
-              <a:schemeClr val="accent1">
-                <a:lumMod val="75000"/>
-              </a:schemeClr>
-            </a:lnRef>
-            <a:fillRef idx="1">
-              <a:schemeClr val="accent1"/>
-            </a:fillRef>
-            <a:effectRef idx="0">
-              <a:srgbClr val="FFFFFF"/>
-            </a:effectRef>
-            <a:fontRef idx="minor">
-              <a:schemeClr val="lt1"/>
-            </a:fontRef>
-          </p:style>
-          <p:txBody>
-            <a:bodyPr rtlCol="0" anchor="ctr"/>
-            <a:p>
-              <a:pPr algn="ctr"/>
-              <a:r>
-                <a:rPr lang="zh-CN" altLang="en-US" sz="1200">
-                  <a:solidFill>
-                    <a:schemeClr val="tx1"/>
-                  </a:solidFill>
-                </a:rPr>
-                <a:t>去中心</a:t>
-              </a:r>
-              <a:r>
-                <a:rPr lang="zh-CN" altLang="en-US" sz="1200">
-                  <a:solidFill>
-                    <a:schemeClr val="tx1"/>
-                  </a:solidFill>
-                </a:rPr>
-                <a:t>管控下</a:t>
-              </a:r>
-              <a:endParaRPr lang="zh-CN" altLang="en-US" sz="1200">
-                <a:solidFill>
-                  <a:schemeClr val="tx1"/>
-                </a:solidFill>
-              </a:endParaRPr>
-            </a:p>
-            <a:p>
-              <a:pPr algn="ctr"/>
-              <a:r>
-                <a:rPr lang="zh-CN" altLang="en-US" sz="1200" b="1">
-                  <a:solidFill>
-                    <a:srgbClr val="C00000"/>
-                  </a:solidFill>
-                </a:rPr>
-                <a:t>系统公平性</a:t>
-              </a:r>
-              <a:r>
-                <a:rPr lang="zh-CN" altLang="en-US" sz="1200">
-                  <a:solidFill>
-                    <a:schemeClr val="tx1"/>
-                  </a:solidFill>
-                </a:rPr>
-                <a:t>失效</a:t>
-              </a:r>
-              <a:endParaRPr lang="zh-CN" altLang="en-US" sz="1200">
-                <a:solidFill>
-                  <a:schemeClr val="tx1"/>
-                </a:solidFill>
-              </a:endParaRPr>
-            </a:p>
-          </p:txBody>
-        </p:sp>
-        <p:sp>
-          <p:nvSpPr>
-            <p:cNvPr id="34" name="圆角矩形 33"/>
-            <p:cNvSpPr/>
-            <p:nvPr/>
-          </p:nvSpPr>
-          <p:spPr>
-            <a:xfrm>
-              <a:off x="12707" y="2105"/>
-              <a:ext cx="3920" cy="1019"/>
-            </a:xfrm>
-            <a:prstGeom prst="roundRect">
-              <a:avLst/>
-            </a:prstGeom>
-            <a:noFill/>
-            <a:ln w="12700">
-              <a:solidFill>
-                <a:schemeClr val="tx1"/>
-              </a:solidFill>
-              <a:prstDash val="dash"/>
-            </a:ln>
-          </p:spPr>
-          <p:style>
-            <a:lnRef idx="2">
-              <a:schemeClr val="accent1">
-                <a:lumMod val="75000"/>
-              </a:schemeClr>
-            </a:lnRef>
-            <a:fillRef idx="1">
-              <a:schemeClr val="accent1"/>
-            </a:fillRef>
-            <a:effectRef idx="0">
-              <a:srgbClr val="FFFFFF"/>
-            </a:effectRef>
-            <a:fontRef idx="minor">
-              <a:schemeClr val="lt1"/>
-            </a:fontRef>
-          </p:style>
-          <p:txBody>
-            <a:bodyPr rtlCol="0" anchor="ctr"/>
-            <a:p>
-              <a:pPr algn="ctr"/>
-              <a:endParaRPr lang="zh-CN" altLang="en-US"/>
-            </a:p>
-          </p:txBody>
-        </p:sp>
-        <p:sp>
-          <p:nvSpPr>
-            <p:cNvPr id="35" name="文本框 34"/>
-            <p:cNvSpPr txBox="1"/>
-            <p:nvPr/>
-          </p:nvSpPr>
-          <p:spPr>
-            <a:xfrm>
-              <a:off x="12589" y="2203"/>
-              <a:ext cx="1193" cy="822"/>
-            </a:xfrm>
-            <a:prstGeom prst="rect">
-              <a:avLst/>
-            </a:prstGeom>
-            <a:noFill/>
-          </p:spPr>
-          <p:txBody>
-            <a:bodyPr wrap="square" rtlCol="0">
-              <a:spAutoFit/>
-            </a:bodyPr>
-            <a:p>
-              <a:r>
-                <a:rPr lang="zh-CN" altLang="en-US" sz="1400"/>
-                <a:t>网络</a:t>
-              </a:r>
-              <a:r>
-                <a:rPr lang="en-US" altLang="zh-CN" sz="1400"/>
-                <a:t>/</a:t>
-              </a:r>
-              <a:endParaRPr lang="en-US" altLang="zh-CN" sz="1400"/>
-            </a:p>
-            <a:p>
-              <a:r>
-                <a:rPr lang="zh-CN" altLang="en-US" sz="1400"/>
-                <a:t>应用层</a:t>
-              </a:r>
-              <a:endParaRPr lang="zh-CN" altLang="en-US" sz="1400"/>
-            </a:p>
-          </p:txBody>
-        </p:sp>
-        <p:sp>
-          <p:nvSpPr>
-            <p:cNvPr id="36" name="矩形 35"/>
-            <p:cNvSpPr/>
-            <p:nvPr/>
-          </p:nvSpPr>
-          <p:spPr>
-            <a:xfrm>
-              <a:off x="9367" y="3801"/>
-              <a:ext cx="3403" cy="704"/>
-            </a:xfrm>
-            <a:prstGeom prst="rect">
-              <a:avLst/>
-            </a:prstGeom>
-            <a:solidFill>
-              <a:schemeClr val="accent4">
-                <a:lumMod val="20000"/>
-                <a:lumOff val="80000"/>
-              </a:schemeClr>
-            </a:solidFill>
-            <a:ln>
-              <a:solidFill>
-                <a:schemeClr val="bg1">
-                  <a:lumMod val="50000"/>
-                </a:schemeClr>
-              </a:solidFill>
-            </a:ln>
-          </p:spPr>
-          <p:style>
-            <a:lnRef idx="2">
-              <a:schemeClr val="accent1">
-                <a:lumMod val="75000"/>
-              </a:schemeClr>
-            </a:lnRef>
-            <a:fillRef idx="1">
-              <a:schemeClr val="accent1"/>
-            </a:fillRef>
-            <a:effectRef idx="0">
-              <a:srgbClr val="FFFFFF"/>
-            </a:effectRef>
-            <a:fontRef idx="minor">
-              <a:schemeClr val="lt1"/>
-            </a:fontRef>
-          </p:style>
-          <p:txBody>
-            <a:bodyPr rtlCol="0" anchor="ctr"/>
-            <a:p>
-              <a:pPr algn="ctr"/>
-              <a:r>
-                <a:rPr lang="zh-CN" altLang="en-US" sz="1200">
-                  <a:solidFill>
-                    <a:schemeClr val="tx1"/>
-                  </a:solidFill>
-                </a:rPr>
-                <a:t>非平稳与部分可观测系统下</a:t>
-              </a:r>
-              <a:r>
-                <a:rPr lang="zh-CN" altLang="en-US" sz="1200" b="1">
-                  <a:solidFill>
-                    <a:srgbClr val="C00000"/>
-                  </a:solidFill>
-                </a:rPr>
-                <a:t>用户级</a:t>
-              </a:r>
-              <a:r>
-                <a:rPr lang="en-US" altLang="zh-CN" sz="1200" b="1">
-                  <a:solidFill>
-                    <a:srgbClr val="C00000"/>
-                  </a:solidFill>
-                </a:rPr>
-                <a:t>QoS</a:t>
-              </a:r>
-              <a:r>
-                <a:rPr lang="zh-CN" altLang="en-US" sz="1200">
-                  <a:solidFill>
-                    <a:schemeClr val="tx1"/>
-                  </a:solidFill>
-                </a:rPr>
-                <a:t>难以</a:t>
-              </a:r>
-              <a:r>
-                <a:rPr lang="zh-CN" altLang="en-US" sz="1200">
-                  <a:solidFill>
-                    <a:schemeClr val="tx1"/>
-                  </a:solidFill>
-                </a:rPr>
-                <a:t>保障</a:t>
-              </a:r>
-              <a:endParaRPr lang="zh-CN" altLang="en-US" sz="1200">
-                <a:solidFill>
-                  <a:schemeClr val="tx1"/>
-                </a:solidFill>
-              </a:endParaRPr>
-            </a:p>
-          </p:txBody>
-        </p:sp>
-        <p:sp>
-          <p:nvSpPr>
-            <p:cNvPr id="37" name="矩形 36"/>
-            <p:cNvSpPr/>
-            <p:nvPr/>
-          </p:nvSpPr>
-          <p:spPr>
-            <a:xfrm>
-              <a:off x="13119" y="3801"/>
-              <a:ext cx="3477" cy="704"/>
-            </a:xfrm>
-            <a:prstGeom prst="rect">
-              <a:avLst/>
-            </a:prstGeom>
-            <a:solidFill>
-              <a:schemeClr val="accent4">
-                <a:lumMod val="20000"/>
-                <a:lumOff val="80000"/>
-              </a:schemeClr>
-            </a:solidFill>
-            <a:ln>
-              <a:solidFill>
-                <a:schemeClr val="bg1">
-                  <a:lumMod val="50000"/>
-                </a:schemeClr>
-              </a:solidFill>
-            </a:ln>
-          </p:spPr>
-          <p:style>
-            <a:lnRef idx="2">
-              <a:schemeClr val="accent1">
-                <a:lumMod val="75000"/>
-              </a:schemeClr>
-            </a:lnRef>
-            <a:fillRef idx="1">
-              <a:schemeClr val="accent1"/>
-            </a:fillRef>
-            <a:effectRef idx="0">
-              <a:srgbClr val="FFFFFF"/>
-            </a:effectRef>
-            <a:fontRef idx="minor">
-              <a:schemeClr val="lt1"/>
-            </a:fontRef>
-          </p:style>
-          <p:txBody>
-            <a:bodyPr rtlCol="0" anchor="ctr"/>
-            <a:p>
-              <a:pPr algn="ctr"/>
-              <a:r>
-                <a:rPr lang="zh-CN" altLang="en-US" sz="1200">
-                  <a:solidFill>
-                    <a:schemeClr val="tx1"/>
-                  </a:solidFill>
-                </a:rPr>
-                <a:t>无效重传与时延累积</a:t>
-              </a:r>
-              <a:r>
-                <a:rPr lang="zh-CN" altLang="en-US" sz="1200">
-                  <a:solidFill>
-                    <a:schemeClr val="tx1"/>
-                  </a:solidFill>
-                </a:rPr>
-                <a:t>下</a:t>
-              </a:r>
-              <a:endParaRPr lang="zh-CN" altLang="en-US" sz="1200">
-                <a:solidFill>
-                  <a:schemeClr val="tx1"/>
-                </a:solidFill>
-              </a:endParaRPr>
-            </a:p>
-            <a:p>
-              <a:pPr algn="ctr"/>
-              <a:r>
-                <a:rPr lang="zh-CN" altLang="en-US" sz="1200" b="1">
-                  <a:solidFill>
-                    <a:srgbClr val="C00000"/>
-                  </a:solidFill>
-                </a:rPr>
-                <a:t>信息完整度</a:t>
-              </a:r>
-              <a:r>
-                <a:rPr lang="zh-CN" altLang="en-US" sz="1200">
-                  <a:solidFill>
-                    <a:schemeClr val="tx1"/>
-                  </a:solidFill>
-                </a:rPr>
-                <a:t>难以</a:t>
-              </a:r>
-              <a:r>
-                <a:rPr lang="zh-CN" altLang="en-US" sz="1200">
-                  <a:solidFill>
-                    <a:schemeClr val="tx1"/>
-                  </a:solidFill>
-                </a:rPr>
-                <a:t>保障</a:t>
-              </a:r>
-              <a:endParaRPr lang="zh-CN" altLang="en-US" sz="1200">
-                <a:solidFill>
-                  <a:schemeClr val="tx1"/>
-                </a:solidFill>
-              </a:endParaRPr>
-            </a:p>
-          </p:txBody>
-        </p:sp>
-        <p:cxnSp>
-          <p:nvCxnSpPr>
-            <p:cNvPr id="44" name="直接箭头连接符 43"/>
-            <p:cNvCxnSpPr/>
-            <p:nvPr/>
-          </p:nvCxnSpPr>
-          <p:spPr>
-            <a:xfrm>
-              <a:off x="7327" y="2928"/>
-              <a:ext cx="0" cy="847"/>
-            </a:xfrm>
-            <a:prstGeom prst="straightConnector1">
-              <a:avLst/>
-            </a:prstGeom>
-            <a:ln w="19050">
-              <a:solidFill>
-                <a:schemeClr val="tx2">
-                  <a:lumMod val="60000"/>
-                  <a:lumOff val="40000"/>
-                </a:schemeClr>
-              </a:solidFill>
-              <a:tailEnd type="arrow"/>
-            </a:ln>
-          </p:spPr>
-          <p:style>
-            <a:lnRef idx="2">
-              <a:schemeClr val="accent1"/>
-            </a:lnRef>
-            <a:fillRef idx="0">
-              <a:srgbClr val="FFFFFF"/>
-            </a:fillRef>
-            <a:effectRef idx="0">
-              <a:srgbClr val="FFFFFF"/>
-            </a:effectRef>
-            <a:fontRef idx="minor">
-              <a:schemeClr val="tx1"/>
-            </a:fontRef>
-          </p:style>
-        </p:cxnSp>
       </p:grpSp>
       <p:sp>
         <p:nvSpPr>
-          <p:cNvPr id="45" name="圆角矩形 44"/>
+          <p:cNvPr id="22" name="矩形 21"/>
           <p:cNvSpPr/>
           <p:nvPr/>
         </p:nvSpPr>
         <p:spPr>
           <a:xfrm>
-            <a:off x="2042160" y="3108325"/>
-            <a:ext cx="7641590" cy="3063240"/>
-          </a:xfrm>
-          <a:prstGeom prst="roundRect">
-            <a:avLst>
-              <a:gd name="adj" fmla="val 7642"/>
-            </a:avLst>
+            <a:off x="4885690" y="1287145"/>
+            <a:ext cx="1747520" cy="447040"/>
+          </a:xfrm>
+          <a:prstGeom prst="rect">
+            <a:avLst/>
           </a:prstGeom>
           <a:solidFill>
             <a:schemeClr val="accent4">
-              <a:lumMod val="40000"/>
-              <a:lumOff val="60000"/>
+              <a:lumMod val="20000"/>
+              <a:lumOff val="80000"/>
             </a:schemeClr>
           </a:solidFill>
-        </p:spPr>
-        <p:style>
-          <a:lnRef idx="2">
-            <a:schemeClr val="lt1"/>
-          </a:lnRef>
-          <a:fillRef idx="1">
-            <a:schemeClr val="accent1"/>
-          </a:fillRef>
-          <a:effectRef idx="1">
-            <a:schemeClr val="accent1"/>
-          </a:effectRef>
-          <a:fontRef idx="minor">
-            <a:schemeClr val="lt1"/>
-          </a:fontRef>
-        </p:style>
-        <p:txBody>
-          <a:bodyPr rtlCol="0" anchor="ctr"/>
-          <a:p>
-            <a:pPr algn="ctr"/>
-            <a:endParaRPr lang="zh-CN" altLang="en-US">
-              <a:solidFill>
-                <a:schemeClr val="tx1"/>
-              </a:solidFill>
-            </a:endParaRPr>
-          </a:p>
-        </p:txBody>
-      </p:sp>
-      <p:sp>
-        <p:nvSpPr>
-          <p:cNvPr id="46" name="流程图: 延期 45"/>
-          <p:cNvSpPr/>
-          <p:nvPr/>
-        </p:nvSpPr>
-        <p:spPr>
-          <a:xfrm rot="5400000">
-            <a:off x="2383155" y="2901950"/>
-            <a:ext cx="158750" cy="647700"/>
-          </a:xfrm>
-          <a:prstGeom prst="flowChartDelay">
-            <a:avLst/>
-          </a:prstGeom>
-          <a:noFill/>
           <a:ln>
             <a:solidFill>
               <a:schemeClr val="bg1">
                 <a:lumMod val="50000"/>
               </a:schemeClr>
             </a:solidFill>
-            <a:prstDash val="sysDash"/>
           </a:ln>
         </p:spPr>
         <p:style>
@@ -4686,69 +3705,88 @@
           <a:bodyPr rtlCol="0" anchor="ctr"/>
           <a:p>
             <a:pPr algn="ctr"/>
-            <a:endParaRPr lang="zh-CN" altLang="en-US"/>
-          </a:p>
-        </p:txBody>
-      </p:sp>
-      <p:sp>
-        <p:nvSpPr>
-          <p:cNvPr id="48" name="文本框 47"/>
-          <p:cNvSpPr txBox="1"/>
-          <p:nvPr/>
-        </p:nvSpPr>
-        <p:spPr>
-          <a:xfrm>
-            <a:off x="2132330" y="3090545"/>
-            <a:ext cx="694055" cy="245110"/>
+            <a:r>
+              <a:rPr lang="zh-CN" altLang="en-US" sz="1200">
+                <a:solidFill>
+                  <a:schemeClr val="tx1"/>
+                </a:solidFill>
+              </a:rPr>
+              <a:t>跨层无线资源调度</a:t>
+            </a:r>
+            <a:r>
+              <a:rPr lang="zh-CN" altLang="en-US" sz="1200">
+                <a:solidFill>
+                  <a:schemeClr val="tx1"/>
+                </a:solidFill>
+              </a:rPr>
+              <a:t>效率</a:t>
+            </a:r>
+            <a:endParaRPr lang="zh-CN" altLang="en-US" sz="1200">
+              <a:solidFill>
+                <a:schemeClr val="tx1"/>
+              </a:solidFill>
+            </a:endParaRPr>
+          </a:p>
+          <a:p>
+            <a:pPr algn="ctr"/>
+            <a:r>
+              <a:rPr lang="zh-CN" altLang="en-US" sz="1200" b="1">
+                <a:solidFill>
+                  <a:schemeClr val="tx1"/>
+                </a:solidFill>
+              </a:rPr>
+              <a:t>用户级</a:t>
+            </a:r>
+            <a:r>
+              <a:rPr lang="en-US" altLang="zh-CN" sz="1200" b="1">
+                <a:solidFill>
+                  <a:schemeClr val="tx1"/>
+                </a:solidFill>
+              </a:rPr>
+              <a:t>QoS</a:t>
+            </a:r>
+            <a:r>
+              <a:rPr lang="zh-CN" altLang="en-US" sz="1200" b="1">
+                <a:solidFill>
+                  <a:schemeClr val="tx1"/>
+                </a:solidFill>
+              </a:rPr>
+              <a:t>保障</a:t>
+            </a:r>
+            <a:endParaRPr lang="zh-CN" altLang="en-US" sz="1200" b="1">
+              <a:solidFill>
+                <a:schemeClr val="tx1"/>
+              </a:solidFill>
+            </a:endParaRPr>
+          </a:p>
+        </p:txBody>
+      </p:sp>
+      <p:sp>
+        <p:nvSpPr>
+          <p:cNvPr id="24" name="矩形 23"/>
+          <p:cNvSpPr/>
+          <p:nvPr/>
+        </p:nvSpPr>
+        <p:spPr>
+          <a:xfrm>
+            <a:off x="2464435" y="1287145"/>
+            <a:ext cx="1747520" cy="447040"/>
           </a:xfrm>
           <a:prstGeom prst="rect">
             <a:avLst/>
           </a:prstGeom>
-          <a:noFill/>
-        </p:spPr>
-        <p:txBody>
-          <a:bodyPr wrap="square" rtlCol="0">
-            <a:spAutoFit/>
-          </a:bodyPr>
-          <a:p>
-            <a:r>
-              <a:rPr lang="zh-CN" altLang="en-US" sz="1000" b="1"/>
-              <a:t>技术</a:t>
-            </a:r>
-            <a:r>
-              <a:rPr lang="zh-CN" altLang="en-US" sz="1000" b="1"/>
-              <a:t>方案</a:t>
-            </a:r>
-            <a:endParaRPr lang="zh-CN" altLang="en-US" sz="1000" b="1"/>
-          </a:p>
-        </p:txBody>
-      </p:sp>
-      <p:sp>
-        <p:nvSpPr>
-          <p:cNvPr id="49" name="圆角矩形 48"/>
-          <p:cNvSpPr/>
-          <p:nvPr/>
-        </p:nvSpPr>
-        <p:spPr>
-          <a:xfrm>
-            <a:off x="2164715" y="3350260"/>
-            <a:ext cx="2375535" cy="2769870"/>
-          </a:xfrm>
-          <a:prstGeom prst="roundRect">
-            <a:avLst>
-              <a:gd name="adj" fmla="val 6084"/>
-            </a:avLst>
-          </a:prstGeom>
           <a:solidFill>
-            <a:srgbClr val="9DBB61">
-              <a:alpha val="77000"/>
-            </a:srgbClr>
+            <a:schemeClr val="accent4">
+              <a:lumMod val="20000"/>
+              <a:lumOff val="80000"/>
+            </a:schemeClr>
           </a:solidFill>
-          <a:ln w="12700">
+          <a:ln>
             <a:solidFill>
-              <a:schemeClr val="tx1"/>
+              <a:schemeClr val="bg1">
+                <a:lumMod val="50000"/>
+              </a:schemeClr>
             </a:solidFill>
-            <a:prstDash val="dash"/>
           </a:ln>
         </p:spPr>
         <p:style>
@@ -4771,60 +3809,72 @@
           <a:bodyPr rtlCol="0" anchor="ctr"/>
           <a:p>
             <a:pPr algn="ctr"/>
-            <a:endParaRPr lang="zh-CN" altLang="en-US"/>
-          </a:p>
-        </p:txBody>
-      </p:sp>
-      <p:sp>
-        <p:nvSpPr>
-          <p:cNvPr id="50" name="文本框 49"/>
-          <p:cNvSpPr txBox="1"/>
-          <p:nvPr/>
-        </p:nvSpPr>
-        <p:spPr>
-          <a:xfrm>
-            <a:off x="2191385" y="3377565"/>
-            <a:ext cx="2364740" cy="530860"/>
+            <a:r>
+              <a:rPr lang="zh-CN" altLang="en-US" sz="1200">
+                <a:solidFill>
+                  <a:schemeClr val="tx1"/>
+                </a:solidFill>
+              </a:rPr>
+              <a:t>接入</a:t>
+            </a:r>
+            <a:r>
+              <a:rPr lang="zh-CN" altLang="en-US" sz="1200">
+                <a:solidFill>
+                  <a:schemeClr val="tx1"/>
+                </a:solidFill>
+              </a:rPr>
+              <a:t>可靠性</a:t>
+            </a:r>
+            <a:br>
+              <a:rPr lang="zh-CN" altLang="en-US" sz="1200">
+                <a:solidFill>
+                  <a:schemeClr val="tx1"/>
+                </a:solidFill>
+              </a:rPr>
+            </a:br>
+            <a:r>
+              <a:rPr lang="zh-CN" altLang="en-US" sz="1200" b="1">
+                <a:solidFill>
+                  <a:schemeClr val="tx1"/>
+                </a:solidFill>
+              </a:rPr>
+              <a:t>公平连续接入</a:t>
+            </a:r>
+            <a:endParaRPr lang="zh-CN" altLang="en-US" sz="1200" b="1">
+              <a:solidFill>
+                <a:schemeClr val="tx1"/>
+              </a:solidFill>
+            </a:endParaRPr>
+          </a:p>
+        </p:txBody>
+      </p:sp>
+      <p:sp>
+        <p:nvSpPr>
+          <p:cNvPr id="25" name="矩形 24"/>
+          <p:cNvSpPr/>
+          <p:nvPr/>
+        </p:nvSpPr>
+        <p:spPr>
+          <a:xfrm>
+            <a:off x="7402830" y="1287145"/>
+            <a:ext cx="1747520" cy="447040"/>
           </a:xfrm>
           <a:prstGeom prst="rect">
             <a:avLst/>
           </a:prstGeom>
-          <a:noFill/>
-        </p:spPr>
-        <p:txBody>
-          <a:bodyPr wrap="square" rtlCol="0">
-            <a:noAutofit/>
-          </a:bodyPr>
-          <a:p>
-            <a:pPr algn="ctr"/>
-            <a:r>
-              <a:rPr lang="zh-CN" altLang="en-US" sz="1200" b="1"/>
-              <a:t>面向公平性保障的分布式用户协作切换机制（第三章）</a:t>
-            </a:r>
-            <a:endParaRPr lang="zh-CN" altLang="en-US" sz="1200" b="1"/>
-          </a:p>
-        </p:txBody>
-      </p:sp>
-      <p:sp>
-        <p:nvSpPr>
-          <p:cNvPr id="51" name="矩形 50"/>
-          <p:cNvSpPr/>
-          <p:nvPr/>
-        </p:nvSpPr>
-        <p:spPr>
-          <a:xfrm>
-            <a:off x="4262120" y="281305"/>
-            <a:ext cx="1261745" cy="339725"/>
-          </a:xfrm>
-          <a:prstGeom prst="rect">
-            <a:avLst/>
-          </a:prstGeom>
           <a:solidFill>
-            <a:schemeClr val="accent1">
+            <a:schemeClr val="accent4">
               <a:lumMod val="20000"/>
               <a:lumOff val="80000"/>
             </a:schemeClr>
           </a:solidFill>
+          <a:ln>
+            <a:solidFill>
+              <a:schemeClr val="bg1">
+                <a:lumMod val="50000"/>
+              </a:schemeClr>
+            </a:solidFill>
+          </a:ln>
         </p:spPr>
         <p:style>
           <a:lnRef idx="2">
@@ -4852,17 +3902,17 @@
                   <a:schemeClr val="tx1"/>
                 </a:solidFill>
               </a:rPr>
-              <a:t>研究</a:t>
-            </a:r>
-            <a:r>
-              <a:rPr lang="zh-CN" altLang="en-US" sz="1200">
+              <a:t>面向多任务的可泛化的、</a:t>
+            </a:r>
+            <a:r>
+              <a:rPr lang="zh-CN" altLang="en-US" sz="1200" b="1">
                 <a:solidFill>
                   <a:schemeClr val="tx1"/>
                 </a:solidFill>
               </a:rPr>
-              <a:t>现状</a:t>
-            </a:r>
-            <a:endParaRPr lang="zh-CN" altLang="en-US" sz="1200">
+              <a:t>高可靠传输</a:t>
+            </a:r>
+            <a:endParaRPr lang="zh-CN" altLang="en-US" sz="1200" b="1">
               <a:solidFill>
                 <a:schemeClr val="tx1"/>
               </a:solidFill>
@@ -4872,24 +3922,25 @@
       </p:sp>
       <p:sp>
         <p:nvSpPr>
-          <p:cNvPr id="52" name="矩形 51"/>
+          <p:cNvPr id="26" name="圆角矩形 25"/>
           <p:cNvSpPr/>
           <p:nvPr/>
         </p:nvSpPr>
         <p:spPr>
           <a:xfrm>
-            <a:off x="5996940" y="281305"/>
-            <a:ext cx="1261745" cy="339725"/>
-          </a:xfrm>
-          <a:prstGeom prst="rect">
-            <a:avLst/>
-          </a:prstGeom>
-          <a:solidFill>
-            <a:schemeClr val="accent1">
-              <a:lumMod val="20000"/>
-              <a:lumOff val="80000"/>
-            </a:schemeClr>
-          </a:solidFill>
+            <a:off x="2233295" y="1221740"/>
+            <a:ext cx="4533900" cy="647065"/>
+          </a:xfrm>
+          <a:prstGeom prst="roundRect">
+            <a:avLst/>
+          </a:prstGeom>
+          <a:noFill/>
+          <a:ln w="12700">
+            <a:solidFill>
+              <a:schemeClr val="tx1"/>
+            </a:solidFill>
+            <a:prstDash val="dash"/>
+          </a:ln>
         </p:spPr>
         <p:style>
           <a:lnRef idx="2">
@@ -4911,23 +3962,81 @@
           <a:bodyPr rtlCol="0" anchor="ctr"/>
           <a:p>
             <a:pPr algn="ctr"/>
-            <a:r>
-              <a:rPr lang="zh-CN" altLang="en-US" sz="1200">
-                <a:solidFill>
-                  <a:schemeClr val="tx1"/>
-                </a:solidFill>
-              </a:rPr>
-              <a:t>核心</a:t>
-            </a:r>
-            <a:r>
-              <a:rPr lang="zh-CN" altLang="en-US" sz="1200">
-                <a:solidFill>
-                  <a:schemeClr val="tx1"/>
-                </a:solidFill>
-              </a:rPr>
-              <a:t>挑战</a:t>
-            </a:r>
-            <a:endParaRPr lang="zh-CN" altLang="en-US" sz="1200">
+            <a:endParaRPr lang="zh-CN" altLang="en-US"/>
+          </a:p>
+        </p:txBody>
+      </p:sp>
+      <p:sp>
+        <p:nvSpPr>
+          <p:cNvPr id="28" name="文本框 27"/>
+          <p:cNvSpPr txBox="1"/>
+          <p:nvPr/>
+        </p:nvSpPr>
+        <p:spPr>
+          <a:xfrm>
+            <a:off x="4211955" y="1604645"/>
+            <a:ext cx="947420" cy="306705"/>
+          </a:xfrm>
+          <a:prstGeom prst="rect">
+            <a:avLst/>
+          </a:prstGeom>
+          <a:noFill/>
+        </p:spPr>
+        <p:txBody>
+          <a:bodyPr wrap="square" rtlCol="0">
+            <a:spAutoFit/>
+          </a:bodyPr>
+          <a:p>
+            <a:r>
+              <a:rPr lang="zh-CN" altLang="en-US" sz="1400"/>
+              <a:t>接入层</a:t>
+            </a:r>
+            <a:endParaRPr lang="zh-CN" altLang="en-US" sz="1400"/>
+          </a:p>
+        </p:txBody>
+      </p:sp>
+      <p:sp>
+        <p:nvSpPr>
+          <p:cNvPr id="29" name="圆角矩形 28"/>
+          <p:cNvSpPr/>
+          <p:nvPr/>
+        </p:nvSpPr>
+        <p:spPr>
+          <a:xfrm>
+            <a:off x="1934210" y="2032635"/>
+            <a:ext cx="7641590" cy="773430"/>
+          </a:xfrm>
+          <a:prstGeom prst="roundRect">
+            <a:avLst>
+              <a:gd name="adj" fmla="val 7642"/>
+            </a:avLst>
+          </a:prstGeom>
+          <a:solidFill>
+            <a:schemeClr val="accent4">
+              <a:lumMod val="40000"/>
+              <a:lumOff val="60000"/>
+            </a:schemeClr>
+          </a:solidFill>
+        </p:spPr>
+        <p:style>
+          <a:lnRef idx="2">
+            <a:schemeClr val="lt1"/>
+          </a:lnRef>
+          <a:fillRef idx="1">
+            <a:schemeClr val="accent1"/>
+          </a:fillRef>
+          <a:effectRef idx="1">
+            <a:schemeClr val="accent1"/>
+          </a:effectRef>
+          <a:fontRef idx="minor">
+            <a:schemeClr val="lt1"/>
+          </a:fontRef>
+        </p:style>
+        <p:txBody>
+          <a:bodyPr rtlCol="0" anchor="ctr"/>
+          <a:p>
+            <a:pPr algn="ctr"/>
+            <a:endParaRPr lang="zh-CN" altLang="en-US">
               <a:solidFill>
                 <a:schemeClr val="tx1"/>
               </a:solidFill>
@@ -4937,24 +4046,60 @@
       </p:sp>
       <p:sp>
         <p:nvSpPr>
-          <p:cNvPr id="53" name="矩形 52"/>
+          <p:cNvPr id="30" name="文本框 29"/>
+          <p:cNvSpPr txBox="1"/>
+          <p:nvPr/>
+        </p:nvSpPr>
+        <p:spPr>
+          <a:xfrm>
+            <a:off x="2056130" y="2015490"/>
+            <a:ext cx="604520" cy="245110"/>
+          </a:xfrm>
+          <a:prstGeom prst="rect">
+            <a:avLst/>
+          </a:prstGeom>
+          <a:noFill/>
+        </p:spPr>
+        <p:txBody>
+          <a:bodyPr wrap="square" rtlCol="0">
+            <a:spAutoFit/>
+          </a:bodyPr>
+          <a:p>
+            <a:r>
+              <a:rPr lang="en-US" altLang="zh-CN" sz="1000"/>
+              <a:t>  </a:t>
+            </a:r>
+            <a:r>
+              <a:rPr lang="zh-CN" altLang="en-US" sz="1000" b="1"/>
+              <a:t>挑战</a:t>
+            </a:r>
+            <a:endParaRPr lang="zh-CN" altLang="en-US" sz="1000" b="1"/>
+          </a:p>
+        </p:txBody>
+      </p:sp>
+      <p:sp>
+        <p:nvSpPr>
+          <p:cNvPr id="31" name="流程图: 延期 30"/>
           <p:cNvSpPr/>
           <p:nvPr/>
         </p:nvSpPr>
         <p:spPr>
-          <a:xfrm>
-            <a:off x="7731760" y="299085"/>
-            <a:ext cx="1261745" cy="339725"/>
-          </a:xfrm>
-          <a:prstGeom prst="rect">
-            <a:avLst/>
-          </a:prstGeom>
-          <a:solidFill>
-            <a:schemeClr val="accent1">
-              <a:lumMod val="20000"/>
-              <a:lumOff val="80000"/>
-            </a:schemeClr>
-          </a:solidFill>
+          <a:xfrm rot="5400000">
+            <a:off x="2275205" y="1812925"/>
+            <a:ext cx="158750" cy="647700"/>
+          </a:xfrm>
+          <a:prstGeom prst="flowChartDelay">
+            <a:avLst/>
+          </a:prstGeom>
+          <a:noFill/>
+          <a:ln>
+            <a:solidFill>
+              <a:schemeClr val="bg1">
+                <a:lumMod val="50000"/>
+              </a:schemeClr>
+            </a:solidFill>
+            <a:prstDash val="sysDash"/>
+          </a:ln>
         </p:spPr>
         <p:style>
           <a:lnRef idx="2">
@@ -4976,6 +4121,716 @@
           <a:bodyPr rtlCol="0" anchor="ctr"/>
           <a:p>
             <a:pPr algn="ctr"/>
+            <a:endParaRPr lang="zh-CN" altLang="en-US"/>
+          </a:p>
+        </p:txBody>
+      </p:sp>
+      <p:sp>
+        <p:nvSpPr>
+          <p:cNvPr id="33" name="矩形 32"/>
+          <p:cNvSpPr/>
+          <p:nvPr/>
+        </p:nvSpPr>
+        <p:spPr>
+          <a:xfrm>
+            <a:off x="2349500" y="2291080"/>
+            <a:ext cx="2160905" cy="447040"/>
+          </a:xfrm>
+          <a:prstGeom prst="rect">
+            <a:avLst/>
+          </a:prstGeom>
+          <a:solidFill>
+            <a:schemeClr val="accent4">
+              <a:lumMod val="20000"/>
+              <a:lumOff val="80000"/>
+            </a:schemeClr>
+          </a:solidFill>
+          <a:ln>
+            <a:solidFill>
+              <a:schemeClr val="bg1">
+                <a:lumMod val="50000"/>
+              </a:schemeClr>
+            </a:solidFill>
+          </a:ln>
+        </p:spPr>
+        <p:style>
+          <a:lnRef idx="2">
+            <a:schemeClr val="accent1">
+              <a:lumMod val="75000"/>
+            </a:schemeClr>
+          </a:lnRef>
+          <a:fillRef idx="1">
+            <a:schemeClr val="accent1"/>
+          </a:fillRef>
+          <a:effectRef idx="0">
+            <a:srgbClr val="FFFFFF"/>
+          </a:effectRef>
+          <a:fontRef idx="minor">
+            <a:schemeClr val="lt1"/>
+          </a:fontRef>
+        </p:style>
+        <p:txBody>
+          <a:bodyPr rtlCol="0" anchor="ctr"/>
+          <a:p>
+            <a:pPr algn="ctr"/>
+            <a:r>
+              <a:rPr lang="zh-CN" altLang="en-US" sz="1200">
+                <a:solidFill>
+                  <a:schemeClr val="tx1"/>
+                </a:solidFill>
+              </a:rPr>
+              <a:t>全局信息缺失</a:t>
+            </a:r>
+            <a:r>
+              <a:rPr lang="zh-CN" altLang="en-US" sz="1200">
+                <a:solidFill>
+                  <a:schemeClr val="tx1"/>
+                </a:solidFill>
+              </a:rPr>
+              <a:t>下</a:t>
+            </a:r>
+            <a:endParaRPr lang="zh-CN" altLang="en-US" sz="1200">
+              <a:solidFill>
+                <a:schemeClr val="tx1"/>
+              </a:solidFill>
+            </a:endParaRPr>
+          </a:p>
+          <a:p>
+            <a:pPr algn="ctr"/>
+            <a:r>
+              <a:rPr lang="zh-CN" altLang="en-US" sz="1200" b="1">
+                <a:solidFill>
+                  <a:srgbClr val="C00000"/>
+                </a:solidFill>
+              </a:rPr>
+              <a:t>系统公平性</a:t>
+            </a:r>
+            <a:r>
+              <a:rPr lang="zh-CN" altLang="en-US" sz="1200">
+                <a:solidFill>
+                  <a:schemeClr val="tx1"/>
+                </a:solidFill>
+              </a:rPr>
+              <a:t>失效</a:t>
+            </a:r>
+            <a:endParaRPr lang="zh-CN" altLang="en-US" sz="1200">
+              <a:solidFill>
+                <a:schemeClr val="tx1"/>
+              </a:solidFill>
+            </a:endParaRPr>
+          </a:p>
+        </p:txBody>
+      </p:sp>
+      <p:sp>
+        <p:nvSpPr>
+          <p:cNvPr id="34" name="圆角矩形 33"/>
+          <p:cNvSpPr/>
+          <p:nvPr/>
+        </p:nvSpPr>
+        <p:spPr>
+          <a:xfrm>
+            <a:off x="6852920" y="1214120"/>
+            <a:ext cx="2489200" cy="647065"/>
+          </a:xfrm>
+          <a:prstGeom prst="roundRect">
+            <a:avLst/>
+          </a:prstGeom>
+          <a:noFill/>
+          <a:ln w="12700">
+            <a:solidFill>
+              <a:schemeClr val="tx1"/>
+            </a:solidFill>
+            <a:prstDash val="dash"/>
+          </a:ln>
+        </p:spPr>
+        <p:style>
+          <a:lnRef idx="2">
+            <a:schemeClr val="accent1">
+              <a:lumMod val="75000"/>
+            </a:schemeClr>
+          </a:lnRef>
+          <a:fillRef idx="1">
+            <a:schemeClr val="accent1"/>
+          </a:fillRef>
+          <a:effectRef idx="0">
+            <a:srgbClr val="FFFFFF"/>
+          </a:effectRef>
+          <a:fontRef idx="minor">
+            <a:schemeClr val="lt1"/>
+          </a:fontRef>
+        </p:style>
+        <p:txBody>
+          <a:bodyPr rtlCol="0" anchor="ctr"/>
+          <a:p>
+            <a:pPr algn="ctr"/>
+            <a:endParaRPr lang="zh-CN" altLang="en-US"/>
+          </a:p>
+        </p:txBody>
+      </p:sp>
+      <p:sp>
+        <p:nvSpPr>
+          <p:cNvPr id="35" name="文本框 34"/>
+          <p:cNvSpPr txBox="1"/>
+          <p:nvPr/>
+        </p:nvSpPr>
+        <p:spPr>
+          <a:xfrm>
+            <a:off x="6777990" y="1276350"/>
+            <a:ext cx="757555" cy="521970"/>
+          </a:xfrm>
+          <a:prstGeom prst="rect">
+            <a:avLst/>
+          </a:prstGeom>
+          <a:noFill/>
+        </p:spPr>
+        <p:txBody>
+          <a:bodyPr wrap="square" rtlCol="0">
+            <a:spAutoFit/>
+          </a:bodyPr>
+          <a:p>
+            <a:r>
+              <a:rPr lang="zh-CN" altLang="en-US" sz="1400"/>
+              <a:t>网络</a:t>
+            </a:r>
+            <a:r>
+              <a:rPr lang="en-US" altLang="zh-CN" sz="1400"/>
+              <a:t>/</a:t>
+            </a:r>
+            <a:endParaRPr lang="en-US" altLang="zh-CN" sz="1400"/>
+          </a:p>
+          <a:p>
+            <a:r>
+              <a:rPr lang="zh-CN" altLang="en-US" sz="1400"/>
+              <a:t>应用层</a:t>
+            </a:r>
+            <a:endParaRPr lang="zh-CN" altLang="en-US" sz="1400"/>
+          </a:p>
+        </p:txBody>
+      </p:sp>
+      <p:sp>
+        <p:nvSpPr>
+          <p:cNvPr id="36" name="矩形 35"/>
+          <p:cNvSpPr/>
+          <p:nvPr/>
+        </p:nvSpPr>
+        <p:spPr>
+          <a:xfrm>
+            <a:off x="4732020" y="2291080"/>
+            <a:ext cx="2258060" cy="447040"/>
+          </a:xfrm>
+          <a:prstGeom prst="rect">
+            <a:avLst/>
+          </a:prstGeom>
+          <a:solidFill>
+            <a:schemeClr val="accent4">
+              <a:lumMod val="20000"/>
+              <a:lumOff val="80000"/>
+            </a:schemeClr>
+          </a:solidFill>
+          <a:ln>
+            <a:solidFill>
+              <a:schemeClr val="bg1">
+                <a:lumMod val="50000"/>
+              </a:schemeClr>
+            </a:solidFill>
+          </a:ln>
+        </p:spPr>
+        <p:style>
+          <a:lnRef idx="2">
+            <a:schemeClr val="accent1">
+              <a:lumMod val="75000"/>
+            </a:schemeClr>
+          </a:lnRef>
+          <a:fillRef idx="1">
+            <a:schemeClr val="accent1"/>
+          </a:fillRef>
+          <a:effectRef idx="0">
+            <a:srgbClr val="FFFFFF"/>
+          </a:effectRef>
+          <a:fontRef idx="minor">
+            <a:schemeClr val="lt1"/>
+          </a:fontRef>
+        </p:style>
+        <p:txBody>
+          <a:bodyPr rtlCol="0" anchor="ctr"/>
+          <a:p>
+            <a:pPr algn="ctr"/>
+            <a:r>
+              <a:rPr lang="zh-CN" altLang="en-US" sz="1200" b="1">
+                <a:solidFill>
+                  <a:srgbClr val="C00000"/>
+                </a:solidFill>
+              </a:rPr>
+              <a:t>传输</a:t>
+            </a:r>
+            <a:r>
+              <a:rPr lang="en-US" altLang="zh-CN" sz="1200" b="1">
+                <a:solidFill>
+                  <a:srgbClr val="C00000"/>
+                </a:solidFill>
+              </a:rPr>
+              <a:t>/</a:t>
+            </a:r>
+            <a:r>
+              <a:rPr lang="zh-CN" altLang="en-US" sz="1200" b="1">
+                <a:solidFill>
+                  <a:srgbClr val="C00000"/>
+                </a:solidFill>
+              </a:rPr>
+              <a:t>业务随机</a:t>
+            </a:r>
+            <a:r>
+              <a:rPr lang="zh-CN" altLang="en-US" sz="1200">
+                <a:solidFill>
+                  <a:schemeClr val="tx1"/>
+                </a:solidFill>
+              </a:rPr>
+              <a:t>反应式调度</a:t>
+            </a:r>
+            <a:endParaRPr lang="zh-CN" altLang="en-US" sz="1200">
+              <a:solidFill>
+                <a:schemeClr val="tx1"/>
+              </a:solidFill>
+            </a:endParaRPr>
+          </a:p>
+          <a:p>
+            <a:pPr algn="ctr"/>
+            <a:r>
+              <a:rPr lang="en-US" altLang="zh-CN" sz="1200" b="1">
+                <a:solidFill>
+                  <a:srgbClr val="C00000"/>
+                </a:solidFill>
+              </a:rPr>
+              <a:t>QoS</a:t>
+            </a:r>
+            <a:r>
+              <a:rPr lang="zh-CN" altLang="en-US" sz="1200">
+                <a:solidFill>
+                  <a:schemeClr val="tx1"/>
+                </a:solidFill>
+              </a:rPr>
+              <a:t>无法实现长期</a:t>
+            </a:r>
+            <a:r>
+              <a:rPr lang="zh-CN" altLang="en-US" sz="1200">
+                <a:solidFill>
+                  <a:schemeClr val="tx1"/>
+                </a:solidFill>
+              </a:rPr>
+              <a:t>保证</a:t>
+            </a:r>
+            <a:endParaRPr lang="zh-CN" altLang="en-US" sz="1200">
+              <a:solidFill>
+                <a:schemeClr val="tx1"/>
+              </a:solidFill>
+            </a:endParaRPr>
+          </a:p>
+        </p:txBody>
+      </p:sp>
+      <p:sp>
+        <p:nvSpPr>
+          <p:cNvPr id="37" name="矩形 36"/>
+          <p:cNvSpPr/>
+          <p:nvPr/>
+        </p:nvSpPr>
+        <p:spPr>
+          <a:xfrm>
+            <a:off x="7114540" y="2291080"/>
+            <a:ext cx="2207895" cy="447040"/>
+          </a:xfrm>
+          <a:prstGeom prst="rect">
+            <a:avLst/>
+          </a:prstGeom>
+          <a:solidFill>
+            <a:schemeClr val="accent4">
+              <a:lumMod val="20000"/>
+              <a:lumOff val="80000"/>
+            </a:schemeClr>
+          </a:solidFill>
+          <a:ln>
+            <a:solidFill>
+              <a:schemeClr val="bg1">
+                <a:lumMod val="50000"/>
+              </a:schemeClr>
+            </a:solidFill>
+          </a:ln>
+        </p:spPr>
+        <p:style>
+          <a:lnRef idx="2">
+            <a:schemeClr val="accent1">
+              <a:lumMod val="75000"/>
+            </a:schemeClr>
+          </a:lnRef>
+          <a:fillRef idx="1">
+            <a:schemeClr val="accent1"/>
+          </a:fillRef>
+          <a:effectRef idx="0">
+            <a:srgbClr val="FFFFFF"/>
+          </a:effectRef>
+          <a:fontRef idx="minor">
+            <a:schemeClr val="lt1"/>
+          </a:fontRef>
+        </p:style>
+        <p:txBody>
+          <a:bodyPr rtlCol="0" anchor="ctr"/>
+          <a:p>
+            <a:pPr algn="ctr"/>
+            <a:r>
+              <a:rPr lang="zh-CN" altLang="en-US" sz="1200">
+                <a:solidFill>
+                  <a:schemeClr val="tx1"/>
+                </a:solidFill>
+              </a:rPr>
+              <a:t>非对称语义观测</a:t>
+            </a:r>
+            <a:r>
+              <a:rPr lang="zh-CN" altLang="en-US" sz="1200">
+                <a:solidFill>
+                  <a:schemeClr val="tx1"/>
+                </a:solidFill>
+              </a:rPr>
+              <a:t>下</a:t>
+            </a:r>
+            <a:endParaRPr lang="zh-CN" altLang="en-US" sz="1200">
+              <a:solidFill>
+                <a:schemeClr val="tx1"/>
+              </a:solidFill>
+            </a:endParaRPr>
+          </a:p>
+          <a:p>
+            <a:pPr algn="ctr"/>
+            <a:r>
+              <a:rPr lang="zh-CN" altLang="en-US" sz="1200" b="1">
+                <a:solidFill>
+                  <a:srgbClr val="C00000"/>
+                </a:solidFill>
+              </a:rPr>
+              <a:t>端到端</a:t>
+            </a:r>
+            <a:r>
+              <a:rPr lang="zh-CN" altLang="en-US" sz="1200" b="1">
+                <a:solidFill>
+                  <a:srgbClr val="C00000"/>
+                </a:solidFill>
+              </a:rPr>
+              <a:t>信息完整性</a:t>
+            </a:r>
+            <a:r>
+              <a:rPr lang="zh-CN" altLang="en-US" sz="1200">
+                <a:solidFill>
+                  <a:schemeClr val="tx1"/>
+                </a:solidFill>
+              </a:rPr>
+              <a:t>无法</a:t>
+            </a:r>
+            <a:r>
+              <a:rPr lang="zh-CN" altLang="en-US" sz="1200">
+                <a:solidFill>
+                  <a:schemeClr val="tx1"/>
+                </a:solidFill>
+              </a:rPr>
+              <a:t>保证</a:t>
+            </a:r>
+            <a:endParaRPr lang="zh-CN" altLang="en-US" sz="1200">
+              <a:solidFill>
+                <a:schemeClr val="tx1"/>
+              </a:solidFill>
+            </a:endParaRPr>
+          </a:p>
+        </p:txBody>
+      </p:sp>
+      <p:cxnSp>
+        <p:nvCxnSpPr>
+          <p:cNvPr id="44" name="直接箭头连接符 43"/>
+          <p:cNvCxnSpPr/>
+          <p:nvPr/>
+        </p:nvCxnSpPr>
+        <p:spPr>
+          <a:xfrm>
+            <a:off x="3436620" y="1736725"/>
+            <a:ext cx="0" cy="537845"/>
+          </a:xfrm>
+          <a:prstGeom prst="straightConnector1">
+            <a:avLst/>
+          </a:prstGeom>
+          <a:ln w="19050">
+            <a:solidFill>
+              <a:schemeClr val="tx2">
+                <a:lumMod val="60000"/>
+                <a:lumOff val="40000"/>
+              </a:schemeClr>
+            </a:solidFill>
+            <a:tailEnd type="arrow"/>
+          </a:ln>
+        </p:spPr>
+        <p:style>
+          <a:lnRef idx="2">
+            <a:schemeClr val="accent1"/>
+          </a:lnRef>
+          <a:fillRef idx="0">
+            <a:srgbClr val="FFFFFF"/>
+          </a:fillRef>
+          <a:effectRef idx="0">
+            <a:srgbClr val="FFFFFF"/>
+          </a:effectRef>
+          <a:fontRef idx="minor">
+            <a:schemeClr val="tx1"/>
+          </a:fontRef>
+        </p:style>
+      </p:cxnSp>
+      <p:sp>
+        <p:nvSpPr>
+          <p:cNvPr id="45" name="圆角矩形 44"/>
+          <p:cNvSpPr/>
+          <p:nvPr/>
+        </p:nvSpPr>
+        <p:spPr>
+          <a:xfrm>
+            <a:off x="1934210" y="3807460"/>
+            <a:ext cx="7641590" cy="3063240"/>
+          </a:xfrm>
+          <a:prstGeom prst="roundRect">
+            <a:avLst>
+              <a:gd name="adj" fmla="val 7642"/>
+            </a:avLst>
+          </a:prstGeom>
+          <a:solidFill>
+            <a:schemeClr val="accent4">
+              <a:lumMod val="40000"/>
+              <a:lumOff val="60000"/>
+            </a:schemeClr>
+          </a:solidFill>
+        </p:spPr>
+        <p:style>
+          <a:lnRef idx="2">
+            <a:schemeClr val="lt1"/>
+          </a:lnRef>
+          <a:fillRef idx="1">
+            <a:schemeClr val="accent1"/>
+          </a:fillRef>
+          <a:effectRef idx="1">
+            <a:schemeClr val="accent1"/>
+          </a:effectRef>
+          <a:fontRef idx="minor">
+            <a:schemeClr val="lt1"/>
+          </a:fontRef>
+        </p:style>
+        <p:txBody>
+          <a:bodyPr rtlCol="0" anchor="ctr"/>
+          <a:p>
+            <a:pPr algn="ctr"/>
+            <a:endParaRPr lang="zh-CN" altLang="en-US">
+              <a:solidFill>
+                <a:schemeClr val="tx1"/>
+              </a:solidFill>
+            </a:endParaRPr>
+          </a:p>
+        </p:txBody>
+      </p:sp>
+      <p:sp>
+        <p:nvSpPr>
+          <p:cNvPr id="46" name="流程图: 延期 45"/>
+          <p:cNvSpPr/>
+          <p:nvPr/>
+        </p:nvSpPr>
+        <p:spPr>
+          <a:xfrm rot="5400000">
+            <a:off x="2275205" y="3601085"/>
+            <a:ext cx="158750" cy="647700"/>
+          </a:xfrm>
+          <a:prstGeom prst="flowChartDelay">
+            <a:avLst/>
+          </a:prstGeom>
+          <a:noFill/>
+          <a:ln>
+            <a:solidFill>
+              <a:schemeClr val="bg1">
+                <a:lumMod val="50000"/>
+              </a:schemeClr>
+            </a:solidFill>
+            <a:prstDash val="sysDash"/>
+          </a:ln>
+        </p:spPr>
+        <p:style>
+          <a:lnRef idx="2">
+            <a:schemeClr val="accent1">
+              <a:lumMod val="75000"/>
+            </a:schemeClr>
+          </a:lnRef>
+          <a:fillRef idx="1">
+            <a:schemeClr val="accent1"/>
+          </a:fillRef>
+          <a:effectRef idx="0">
+            <a:srgbClr val="FFFFFF"/>
+          </a:effectRef>
+          <a:fontRef idx="minor">
+            <a:schemeClr val="lt1"/>
+          </a:fontRef>
+        </p:style>
+        <p:txBody>
+          <a:bodyPr rtlCol="0" anchor="ctr"/>
+          <a:p>
+            <a:pPr algn="ctr"/>
+            <a:endParaRPr lang="zh-CN" altLang="en-US"/>
+          </a:p>
+        </p:txBody>
+      </p:sp>
+      <p:sp>
+        <p:nvSpPr>
+          <p:cNvPr id="48" name="文本框 47"/>
+          <p:cNvSpPr txBox="1"/>
+          <p:nvPr/>
+        </p:nvSpPr>
+        <p:spPr>
+          <a:xfrm>
+            <a:off x="2024380" y="3789680"/>
+            <a:ext cx="694055" cy="245110"/>
+          </a:xfrm>
+          <a:prstGeom prst="rect">
+            <a:avLst/>
+          </a:prstGeom>
+          <a:noFill/>
+        </p:spPr>
+        <p:txBody>
+          <a:bodyPr wrap="square" rtlCol="0">
+            <a:spAutoFit/>
+          </a:bodyPr>
+          <a:p>
+            <a:r>
+              <a:rPr lang="zh-CN" altLang="en-US" sz="1000" b="1"/>
+              <a:t>技术</a:t>
+            </a:r>
+            <a:r>
+              <a:rPr lang="zh-CN" altLang="en-US" sz="1000" b="1"/>
+              <a:t>方案</a:t>
+            </a:r>
+            <a:endParaRPr lang="zh-CN" altLang="en-US" sz="1000" b="1"/>
+          </a:p>
+        </p:txBody>
+      </p:sp>
+      <p:sp>
+        <p:nvSpPr>
+          <p:cNvPr id="49" name="圆角矩形 48"/>
+          <p:cNvSpPr/>
+          <p:nvPr/>
+        </p:nvSpPr>
+        <p:spPr>
+          <a:xfrm>
+            <a:off x="2056765" y="4049395"/>
+            <a:ext cx="2375535" cy="2769870"/>
+          </a:xfrm>
+          <a:prstGeom prst="roundRect">
+            <a:avLst>
+              <a:gd name="adj" fmla="val 6084"/>
+            </a:avLst>
+          </a:prstGeom>
+          <a:solidFill>
+            <a:srgbClr val="9DBB61">
+              <a:alpha val="77000"/>
+            </a:srgbClr>
+          </a:solidFill>
+          <a:ln w="12700">
+            <a:solidFill>
+              <a:schemeClr val="tx1"/>
+            </a:solidFill>
+            <a:prstDash val="dash"/>
+          </a:ln>
+        </p:spPr>
+        <p:style>
+          <a:lnRef idx="2">
+            <a:schemeClr val="accent1">
+              <a:lumMod val="75000"/>
+            </a:schemeClr>
+          </a:lnRef>
+          <a:fillRef idx="1">
+            <a:schemeClr val="accent1"/>
+          </a:fillRef>
+          <a:effectRef idx="0">
+            <a:srgbClr val="FFFFFF"/>
+          </a:effectRef>
+          <a:fontRef idx="minor">
+            <a:schemeClr val="lt1"/>
+          </a:fontRef>
+        </p:style>
+        <p:txBody>
+          <a:bodyPr rtlCol="0" anchor="ctr"/>
+          <a:p>
+            <a:pPr algn="ctr"/>
+            <a:endParaRPr lang="zh-CN" altLang="en-US"/>
+          </a:p>
+        </p:txBody>
+      </p:sp>
+      <p:sp>
+        <p:nvSpPr>
+          <p:cNvPr id="50" name="文本框 49"/>
+          <p:cNvSpPr txBox="1"/>
+          <p:nvPr/>
+        </p:nvSpPr>
+        <p:spPr>
+          <a:xfrm>
+            <a:off x="2083435" y="4076700"/>
+            <a:ext cx="2364740" cy="530860"/>
+          </a:xfrm>
+          <a:prstGeom prst="rect">
+            <a:avLst/>
+          </a:prstGeom>
+          <a:noFill/>
+        </p:spPr>
+        <p:txBody>
+          <a:bodyPr wrap="square" rtlCol="0">
+            <a:noAutofit/>
+          </a:bodyPr>
+          <a:p>
+            <a:pPr algn="ctr"/>
+            <a:r>
+              <a:rPr lang="zh-CN" altLang="en-US" sz="1200" b="1"/>
+              <a:t>面向公平性保障的分布式用户协作切换机制（第三章）</a:t>
+            </a:r>
+            <a:endParaRPr lang="zh-CN" altLang="en-US" sz="1200" b="1"/>
+          </a:p>
+        </p:txBody>
+      </p:sp>
+      <p:sp>
+        <p:nvSpPr>
+          <p:cNvPr id="51" name="矩形 50"/>
+          <p:cNvSpPr/>
+          <p:nvPr/>
+        </p:nvSpPr>
+        <p:spPr>
+          <a:xfrm>
+            <a:off x="4154170" y="100330"/>
+            <a:ext cx="1261745" cy="339725"/>
+          </a:xfrm>
+          <a:prstGeom prst="rect">
+            <a:avLst/>
+          </a:prstGeom>
+          <a:solidFill>
+            <a:schemeClr val="accent1">
+              <a:lumMod val="20000"/>
+              <a:lumOff val="80000"/>
+            </a:schemeClr>
+          </a:solidFill>
+        </p:spPr>
+        <p:style>
+          <a:lnRef idx="2">
+            <a:schemeClr val="accent1">
+              <a:lumMod val="75000"/>
+            </a:schemeClr>
+          </a:lnRef>
+          <a:fillRef idx="1">
+            <a:schemeClr val="accent1"/>
+          </a:fillRef>
+          <a:effectRef idx="0">
+            <a:srgbClr val="FFFFFF"/>
+          </a:effectRef>
+          <a:fontRef idx="minor">
+            <a:schemeClr val="lt1"/>
+          </a:fontRef>
+        </p:style>
+        <p:txBody>
+          <a:bodyPr rtlCol="0" anchor="ctr"/>
+          <a:p>
+            <a:pPr algn="ctr"/>
             <a:r>
               <a:rPr lang="zh-CN" altLang="en-US" sz="1200">
                 <a:solidFill>
@@ -4990,7 +4845,7 @@
                   <a:schemeClr val="tx1"/>
                 </a:solidFill>
               </a:rPr>
-              <a:t>贡献</a:t>
+              <a:t>现状</a:t>
             </a:r>
             <a:endParaRPr lang="zh-CN" altLang="en-US" sz="1200">
               <a:solidFill>
@@ -5000,6 +4855,136 @@
           </a:p>
         </p:txBody>
       </p:sp>
+      <p:sp>
+        <p:nvSpPr>
+          <p:cNvPr id="52" name="矩形 51"/>
+          <p:cNvSpPr/>
+          <p:nvPr/>
+        </p:nvSpPr>
+        <p:spPr>
+          <a:xfrm>
+            <a:off x="5888990" y="100330"/>
+            <a:ext cx="1261745" cy="339725"/>
+          </a:xfrm>
+          <a:prstGeom prst="rect">
+            <a:avLst/>
+          </a:prstGeom>
+          <a:solidFill>
+            <a:schemeClr val="accent1">
+              <a:lumMod val="20000"/>
+              <a:lumOff val="80000"/>
+            </a:schemeClr>
+          </a:solidFill>
+        </p:spPr>
+        <p:style>
+          <a:lnRef idx="2">
+            <a:schemeClr val="accent1">
+              <a:lumMod val="75000"/>
+            </a:schemeClr>
+          </a:lnRef>
+          <a:fillRef idx="1">
+            <a:schemeClr val="accent1"/>
+          </a:fillRef>
+          <a:effectRef idx="0">
+            <a:srgbClr val="FFFFFF"/>
+          </a:effectRef>
+          <a:fontRef idx="minor">
+            <a:schemeClr val="lt1"/>
+          </a:fontRef>
+        </p:style>
+        <p:txBody>
+          <a:bodyPr rtlCol="0" anchor="ctr"/>
+          <a:p>
+            <a:pPr algn="ctr"/>
+            <a:r>
+              <a:rPr lang="zh-CN" altLang="en-US" sz="1200">
+                <a:solidFill>
+                  <a:schemeClr val="tx1"/>
+                </a:solidFill>
+              </a:rPr>
+              <a:t>核心</a:t>
+            </a:r>
+            <a:r>
+              <a:rPr lang="zh-CN" altLang="en-US" sz="1200">
+                <a:solidFill>
+                  <a:schemeClr val="tx1"/>
+                </a:solidFill>
+              </a:rPr>
+              <a:t>挑战</a:t>
+            </a:r>
+            <a:endParaRPr lang="zh-CN" altLang="en-US" sz="1200">
+              <a:solidFill>
+                <a:schemeClr val="tx1"/>
+              </a:solidFill>
+            </a:endParaRPr>
+          </a:p>
+        </p:txBody>
+      </p:sp>
+      <p:sp>
+        <p:nvSpPr>
+          <p:cNvPr id="53" name="矩形 52"/>
+          <p:cNvSpPr/>
+          <p:nvPr/>
+        </p:nvSpPr>
+        <p:spPr>
+          <a:xfrm>
+            <a:off x="7623810" y="118110"/>
+            <a:ext cx="1261745" cy="339725"/>
+          </a:xfrm>
+          <a:prstGeom prst="rect">
+            <a:avLst/>
+          </a:prstGeom>
+          <a:solidFill>
+            <a:schemeClr val="accent1">
+              <a:lumMod val="20000"/>
+              <a:lumOff val="80000"/>
+            </a:schemeClr>
+          </a:solidFill>
+        </p:spPr>
+        <p:style>
+          <a:lnRef idx="2">
+            <a:schemeClr val="accent1">
+              <a:lumMod val="75000"/>
+            </a:schemeClr>
+          </a:lnRef>
+          <a:fillRef idx="1">
+            <a:schemeClr val="accent1"/>
+          </a:fillRef>
+          <a:effectRef idx="0">
+            <a:srgbClr val="FFFFFF"/>
+          </a:effectRef>
+          <a:fontRef idx="minor">
+            <a:schemeClr val="lt1"/>
+          </a:fontRef>
+        </p:style>
+        <p:txBody>
+          <a:bodyPr rtlCol="0" anchor="ctr"/>
+          <a:p>
+            <a:pPr algn="ctr"/>
+            <a:r>
+              <a:rPr lang="zh-CN" altLang="en-US" sz="1200">
+                <a:solidFill>
+                  <a:schemeClr val="tx1"/>
+                </a:solidFill>
+              </a:rPr>
+              <a:t>研究</a:t>
+            </a:r>
+            <a:r>
+              <a:rPr lang="zh-CN" altLang="en-US" sz="1200">
+                <a:solidFill>
+                  <a:schemeClr val="tx1"/>
+                </a:solidFill>
+              </a:rPr>
+              <a:t>贡献</a:t>
+            </a:r>
+            <a:endParaRPr lang="zh-CN" altLang="en-US" sz="1200">
+              <a:solidFill>
+                <a:schemeClr val="tx1"/>
+              </a:solidFill>
+            </a:endParaRPr>
+          </a:p>
+        </p:txBody>
+      </p:sp>
       <p:cxnSp>
         <p:nvCxnSpPr>
           <p:cNvPr id="55" name="直接箭头连接符 54"/>
@@ -5008,7 +4993,7 @@
         </p:nvCxnSpPr>
         <p:spPr>
           <a:xfrm>
-            <a:off x="5915660" y="1924685"/>
+            <a:off x="5807710" y="1743710"/>
             <a:ext cx="0" cy="537845"/>
           </a:xfrm>
           <a:prstGeom prst="straightConnector1">
@@ -5047,7 +5032,7 @@
         </p:nvCxnSpPr>
         <p:spPr>
           <a:xfrm>
-            <a:off x="8385175" y="1924685"/>
+            <a:off x="8277225" y="1743710"/>
             <a:ext cx="0" cy="537845"/>
           </a:xfrm>
           <a:prstGeom prst="straightConnector1">
@@ -5086,7 +5071,7 @@
         </p:nvCxnSpPr>
         <p:spPr>
           <a:xfrm>
-            <a:off x="3544570" y="2919095"/>
+            <a:off x="3439160" y="3663950"/>
             <a:ext cx="2540" cy="412750"/>
           </a:xfrm>
           <a:prstGeom prst="straightConnector1">
@@ -5125,7 +5110,7 @@
         </p:nvSpPr>
         <p:spPr>
           <a:xfrm>
-            <a:off x="4667250" y="3354070"/>
+            <a:off x="4559300" y="4053205"/>
             <a:ext cx="2375535" cy="2769870"/>
           </a:xfrm>
           <a:prstGeom prst="roundRect">
@@ -5177,7 +5162,7 @@
         </p:nvSpPr>
         <p:spPr>
           <a:xfrm>
-            <a:off x="7169785" y="3331845"/>
+            <a:off x="7061835" y="4030980"/>
             <a:ext cx="2375535" cy="2769870"/>
           </a:xfrm>
           <a:prstGeom prst="roundRect">
@@ -5229,7 +5214,7 @@
         </p:nvSpPr>
         <p:spPr>
           <a:xfrm>
-            <a:off x="4733290" y="3377565"/>
+            <a:off x="4625340" y="4076700"/>
             <a:ext cx="2364740" cy="530860"/>
           </a:xfrm>
           <a:prstGeom prst="rect">
@@ -5245,7 +5230,15 @@
             <a:pPr algn="ctr"/>
             <a:r>
               <a:rPr lang="zh-CN" altLang="en-US" sz="1200" b="1"/>
-              <a:t>用户级</a:t>
+              <a:t>内生演化驱动的切片</a:t>
+            </a:r>
+            <a:r>
+              <a:rPr lang="en-US" altLang="zh-CN" sz="1200" b="1"/>
+              <a:t>-MAC</a:t>
+            </a:r>
+            <a:r>
+              <a:rPr lang="zh-CN" altLang="en-US" sz="1200" b="1"/>
+              <a:t>跨层协同与长期</a:t>
             </a:r>
             <a:r>
               <a:rPr lang="en-US" altLang="zh-CN" sz="1200" b="1"/>
@@ -5253,7 +5246,7 @@
             </a:r>
             <a:r>
               <a:rPr lang="zh-CN" altLang="en-US" sz="1200" b="1"/>
-              <a:t>保障的网络切片与无线资源优化</a:t>
+              <a:t>保障</a:t>
             </a:r>
             <a:r>
               <a:rPr lang="zh-CN" altLang="en-US" sz="1200" b="1"/>
@@ -5275,7 +5268,7 @@
         </p:nvSpPr>
         <p:spPr>
           <a:xfrm>
-            <a:off x="7180580" y="3377565"/>
+            <a:off x="7072630" y="4076700"/>
             <a:ext cx="2364740" cy="530860"/>
           </a:xfrm>
           <a:prstGeom prst="rect">
@@ -5291,7 +5284,7 @@
             <a:pPr algn="ctr"/>
             <a:r>
               <a:rPr lang="zh-CN" altLang="en-US" sz="1200" b="1"/>
-              <a:t>任务驱动的语义</a:t>
+              <a:t>面向非对称语义观测的语义</a:t>
             </a:r>
             <a:r>
               <a:rPr lang="en-US" altLang="zh-CN" sz="1200" b="1"/>
@@ -5299,7 +5292,11 @@
             </a:r>
             <a:r>
               <a:rPr lang="zh-CN" altLang="en-US" sz="1200" b="1"/>
-              <a:t>与路由协同优化机制（第</a:t>
+              <a:t>分层通信框架</a:t>
+            </a:r>
+            <a:r>
+              <a:rPr lang="zh-CN" altLang="en-US" sz="1200" b="1"/>
+              <a:t>（第</a:t>
             </a:r>
             <a:r>
               <a:rPr lang="zh-CN" altLang="en-US" sz="1200" b="1"/>
@@ -5317,7 +5314,7 @@
         </p:nvSpPr>
         <p:spPr>
           <a:xfrm>
-            <a:off x="4857115" y="3866515"/>
+            <a:off x="4749165" y="4565650"/>
             <a:ext cx="1969770" cy="427990"/>
           </a:xfrm>
           <a:prstGeom prst="roundRect">
@@ -5366,7 +5363,7 @@
         </p:nvSpPr>
         <p:spPr>
           <a:xfrm>
-            <a:off x="4914900" y="3869055"/>
+            <a:off x="4806950" y="4568190"/>
             <a:ext cx="1875155" cy="398780"/>
           </a:xfrm>
           <a:prstGeom prst="rect">
@@ -5424,7 +5421,7 @@
         </p:nvSpPr>
         <p:spPr>
           <a:xfrm>
-            <a:off x="4857115" y="4561205"/>
+            <a:off x="4749165" y="5260340"/>
             <a:ext cx="1969770" cy="1540510"/>
           </a:xfrm>
           <a:prstGeom prst="roundRect">
@@ -5480,7 +5477,7 @@
         </p:nvSpPr>
         <p:spPr>
           <a:xfrm>
-            <a:off x="4944110" y="4666615"/>
+            <a:off x="4836160" y="5365750"/>
             <a:ext cx="1796415" cy="427990"/>
           </a:xfrm>
           <a:prstGeom prst="roundRect">
@@ -5529,7 +5526,7 @@
         </p:nvCxnSpPr>
         <p:spPr>
           <a:xfrm>
-            <a:off x="5854700" y="4294505"/>
+            <a:off x="5746750" y="4993640"/>
             <a:ext cx="0" cy="248920"/>
           </a:xfrm>
           <a:prstGeom prst="straightConnector1">
@@ -5566,7 +5563,7 @@
         </p:nvSpPr>
         <p:spPr>
           <a:xfrm>
-            <a:off x="5488305" y="4265295"/>
+            <a:off x="5380355" y="4964430"/>
             <a:ext cx="862965" cy="245110"/>
           </a:xfrm>
           <a:prstGeom prst="rect">
@@ -5619,7 +5616,7 @@
         </p:nvSpPr>
         <p:spPr>
           <a:xfrm>
-            <a:off x="4993640" y="4694555"/>
+            <a:off x="4885690" y="5393690"/>
             <a:ext cx="1694815" cy="398780"/>
           </a:xfrm>
           <a:prstGeom prst="rect">
@@ -5635,31 +5632,31 @@
             <a:pPr algn="ctr"/>
             <a:r>
               <a:rPr lang="zh-CN" altLang="en-US" sz="1000"/>
-              <a:t>基于世界模型</a:t>
+              <a:t>面向</a:t>
+            </a:r>
+            <a:r>
+              <a:rPr lang="en-US" altLang="zh-CN" sz="1000">
+                <a:solidFill>
+                  <a:srgbClr val="FF0000"/>
+                </a:solidFill>
+              </a:rPr>
+              <a:t>QoS</a:t>
+            </a:r>
+            <a:r>
+              <a:rPr lang="zh-CN" altLang="en-US" sz="1000">
+                <a:solidFill>
+                  <a:srgbClr val="FF0000"/>
+                </a:solidFill>
+              </a:rPr>
+              <a:t>解析预测</a:t>
             </a:r>
             <a:r>
               <a:rPr lang="zh-CN" altLang="en-US" sz="1000"/>
-              <a:t>的</a:t>
-            </a:r>
-            <a:endParaRPr lang="zh-CN" altLang="en-US" sz="1000"/>
-          </a:p>
-          <a:p>
-            <a:pPr algn="ctr"/>
+              <a:t>的资源可行域决策</a:t>
+            </a:r>
             <a:r>
               <a:rPr lang="zh-CN" altLang="en-US" sz="1000"/>
-              <a:t>带宽</a:t>
-            </a:r>
-            <a:r>
-              <a:rPr lang="en-US" altLang="zh-CN" sz="1000"/>
-              <a:t>-</a:t>
-            </a:r>
-            <a:r>
-              <a:rPr lang="zh-CN" altLang="en-US" sz="1000"/>
-              <a:t>功率联合分配</a:t>
-            </a:r>
-            <a:r>
-              <a:rPr lang="zh-CN" altLang="en-US" sz="1000"/>
-              <a:t>算法</a:t>
+              <a:t>机制</a:t>
             </a:r>
             <a:endParaRPr lang="zh-CN" altLang="en-US" sz="1000"/>
           </a:p>
@@ -5673,7 +5670,7 @@
         </p:nvSpPr>
         <p:spPr>
           <a:xfrm>
-            <a:off x="4993640" y="5521960"/>
+            <a:off x="4885690" y="6221095"/>
             <a:ext cx="1796415" cy="427990"/>
           </a:xfrm>
           <a:prstGeom prst="roundRect">
@@ -5722,7 +5719,7 @@
         </p:nvSpPr>
         <p:spPr>
           <a:xfrm>
-            <a:off x="5593715" y="5093335"/>
+            <a:off x="5485765" y="5792470"/>
             <a:ext cx="252095" cy="417195"/>
           </a:xfrm>
           <a:custGeom>
@@ -5812,7 +5809,7 @@
         </p:nvSpPr>
         <p:spPr>
           <a:xfrm flipH="1" flipV="1">
-            <a:off x="5859780" y="5094605"/>
+            <a:off x="5751830" y="5793740"/>
             <a:ext cx="252095" cy="417195"/>
           </a:xfrm>
           <a:custGeom>
@@ -5902,7 +5899,7 @@
         </p:nvSpPr>
         <p:spPr>
           <a:xfrm>
-            <a:off x="5634355" y="5108575"/>
+            <a:off x="5526405" y="5807710"/>
             <a:ext cx="459105" cy="398780"/>
           </a:xfrm>
           <a:prstGeom prst="rect">
@@ -5954,7 +5951,7 @@
         </p:nvSpPr>
         <p:spPr>
           <a:xfrm>
-            <a:off x="5200650" y="5153660"/>
+            <a:off x="5092700" y="5852795"/>
             <a:ext cx="459105" cy="245110"/>
           </a:xfrm>
           <a:prstGeom prst="rect">
@@ -5991,7 +5988,7 @@
         </p:nvSpPr>
         <p:spPr>
           <a:xfrm>
-            <a:off x="6097270" y="5153660"/>
+            <a:off x="5989320" y="5852795"/>
             <a:ext cx="459105" cy="245110"/>
           </a:xfrm>
           <a:prstGeom prst="rect">
@@ -6028,7 +6025,7 @@
         </p:nvSpPr>
         <p:spPr>
           <a:xfrm>
-            <a:off x="5046345" y="5551170"/>
+            <a:off x="4938395" y="6250305"/>
             <a:ext cx="1694815" cy="398780"/>
           </a:xfrm>
           <a:prstGeom prst="rect">
@@ -6044,15 +6041,11 @@
             <a:pPr algn="ctr"/>
             <a:r>
               <a:rPr lang="zh-CN" altLang="en-US" sz="1000"/>
-              <a:t>面向业务</a:t>
+              <a:t>基于</a:t>
             </a:r>
             <a:r>
               <a:rPr lang="en-US" altLang="zh-CN" sz="1000"/>
-              <a:t>QoS</a:t>
-            </a:r>
-            <a:r>
-              <a:rPr lang="zh-CN" altLang="en-US" sz="1000"/>
-              <a:t>长期保证</a:t>
+              <a:t>Lyapunov</a:t>
             </a:r>
             <a:r>
               <a:rPr lang="zh-CN" altLang="en-US" sz="1000"/>
@@ -6063,20 +6056,16 @@
           <a:p>
             <a:pPr algn="ctr"/>
             <a:r>
+              <a:rPr lang="zh-CN" altLang="en-US" sz="1000">
+                <a:solidFill>
+                  <a:srgbClr val="FF0000"/>
+                </a:solidFill>
+              </a:rPr>
+              <a:t>实时长期优化</a:t>
+            </a:r>
+            <a:r>
               <a:rPr lang="zh-CN" altLang="en-US" sz="1000"/>
-              <a:t>无线资源</a:t>
-            </a:r>
-            <a:r>
-              <a:rPr lang="en-US" altLang="zh-CN" sz="1000"/>
-              <a:t>-</a:t>
-            </a:r>
-            <a:r>
-              <a:rPr lang="zh-CN" altLang="en-US" sz="1000"/>
-              <a:t>用户匹配</a:t>
-            </a:r>
-            <a:r>
-              <a:rPr lang="zh-CN" altLang="en-US" sz="1000"/>
-              <a:t>算法</a:t>
+              <a:t>方法</a:t>
             </a:r>
             <a:endParaRPr lang="zh-CN" altLang="en-US" sz="1000"/>
           </a:p>
@@ -6090,7 +6079,7 @@
         </p:nvSpPr>
         <p:spPr>
           <a:xfrm>
-            <a:off x="7378065" y="3866515"/>
+            <a:off x="7270115" y="4565650"/>
             <a:ext cx="1969770" cy="427990"/>
           </a:xfrm>
           <a:prstGeom prst="roundRect">
@@ -6139,7 +6128,7 @@
         </p:nvSpPr>
         <p:spPr>
           <a:xfrm>
-            <a:off x="7510780" y="3866515"/>
+            <a:off x="7402830" y="4565650"/>
             <a:ext cx="1694815" cy="398780"/>
           </a:xfrm>
           <a:prstGeom prst="rect">
@@ -6155,11 +6144,19 @@
             <a:pPr algn="ctr"/>
             <a:r>
               <a:rPr lang="zh-CN" altLang="en-US" sz="1000"/>
-              <a:t>反馈驱动的非对称任务感知</a:t>
+              <a:t>基于</a:t>
+            </a:r>
+            <a:r>
+              <a:rPr lang="en-US" altLang="zh-CN" sz="1000"/>
+              <a:t>HARQ</a:t>
             </a:r>
             <a:r>
               <a:rPr lang="zh-CN" altLang="en-US" sz="1000"/>
-              <a:t>多跳语义传输模型</a:t>
+              <a:t>的分层语义</a:t>
+            </a:r>
+            <a:r>
+              <a:rPr lang="zh-CN" altLang="en-US" sz="1000"/>
+              <a:t>可靠性传输模型</a:t>
             </a:r>
             <a:endParaRPr lang="zh-CN" altLang="en-US" sz="1000"/>
           </a:p>
@@ -6173,7 +6170,7 @@
         </p:nvSpPr>
         <p:spPr>
           <a:xfrm>
-            <a:off x="7378065" y="4671060"/>
+            <a:off x="7270115" y="5370195"/>
             <a:ext cx="1673860" cy="427990"/>
           </a:xfrm>
           <a:prstGeom prst="roundRect">
@@ -6222,7 +6219,7 @@
         </p:nvSpPr>
         <p:spPr>
           <a:xfrm>
-            <a:off x="7643495" y="5497830"/>
+            <a:off x="7535545" y="6196965"/>
             <a:ext cx="1673860" cy="427990"/>
           </a:xfrm>
           <a:prstGeom prst="roundRect">
@@ -6271,7 +6268,7 @@
         </p:nvCxnSpPr>
         <p:spPr>
           <a:xfrm>
-            <a:off x="7753985" y="4312285"/>
+            <a:off x="7646035" y="5011420"/>
             <a:ext cx="0" cy="360045"/>
           </a:xfrm>
           <a:prstGeom prst="straightConnector1">
@@ -6308,7 +6305,7 @@
         </p:nvSpPr>
         <p:spPr>
           <a:xfrm>
-            <a:off x="7809230" y="4311015"/>
+            <a:off x="7701280" y="5010150"/>
             <a:ext cx="807720" cy="398780"/>
           </a:xfrm>
           <a:prstGeom prst="rect">
@@ -6327,7 +6324,7 @@
                   <a:schemeClr val="bg1"/>
                 </a:solidFill>
               </a:rPr>
-              <a:t>端到端</a:t>
+              <a:t>信道</a:t>
             </a:r>
             <a:endParaRPr lang="zh-CN" altLang="en-US" sz="1000">
               <a:solidFill>
@@ -6342,7 +6339,7 @@
                   <a:schemeClr val="bg1"/>
                 </a:solidFill>
               </a:rPr>
-              <a:t>可靠性</a:t>
+              <a:t>鲁棒性</a:t>
             </a:r>
             <a:endParaRPr lang="zh-CN" altLang="en-US" sz="1000">
               <a:solidFill>
@@ -6360,7 +6357,7 @@
         </p:nvCxnSpPr>
         <p:spPr>
           <a:xfrm>
-            <a:off x="9205595" y="4312285"/>
+            <a:off x="9097645" y="5011420"/>
             <a:ext cx="0" cy="1162685"/>
           </a:xfrm>
           <a:prstGeom prst="straightConnector1">
@@ -6397,7 +6394,7 @@
         </p:nvSpPr>
         <p:spPr>
           <a:xfrm>
-            <a:off x="8667750" y="4298950"/>
+            <a:off x="8559800" y="4998085"/>
             <a:ext cx="645795" cy="398780"/>
           </a:xfrm>
           <a:prstGeom prst="rect">
@@ -6417,7 +6414,7 @@
                   <a:schemeClr val="bg1"/>
                 </a:solidFill>
               </a:rPr>
-              <a:t>星间</a:t>
+              <a:t>信息</a:t>
             </a:r>
             <a:endParaRPr lang="zh-CN" altLang="en-US" sz="1000">
               <a:solidFill>
@@ -6433,7 +6430,7 @@
                   <a:schemeClr val="bg1"/>
                 </a:solidFill>
               </a:rPr>
-              <a:t>可靠性</a:t>
+              <a:t>完备性</a:t>
             </a:r>
             <a:endParaRPr lang="zh-CN" altLang="en-US" sz="1000">
               <a:solidFill>
@@ -6451,7 +6448,7 @@
         </p:nvCxnSpPr>
         <p:spPr>
           <a:xfrm>
-            <a:off x="5913120" y="2922905"/>
+            <a:off x="5805170" y="3622040"/>
             <a:ext cx="2540" cy="412750"/>
           </a:xfrm>
           <a:prstGeom prst="straightConnector1">
@@ -6490,7 +6487,7 @@
         </p:nvCxnSpPr>
         <p:spPr>
           <a:xfrm>
-            <a:off x="8385175" y="2919095"/>
+            <a:off x="8279765" y="3591560"/>
             <a:ext cx="2540" cy="412750"/>
           </a:xfrm>
           <a:prstGeom prst="straightConnector1">
@@ -6529,7 +6526,7 @@
         </p:nvSpPr>
         <p:spPr>
           <a:xfrm>
-            <a:off x="7439660" y="4709795"/>
+            <a:off x="7331710" y="5408930"/>
             <a:ext cx="1575435" cy="398780"/>
           </a:xfrm>
           <a:prstGeom prst="rect">
@@ -6545,15 +6542,19 @@
             <a:pPr algn="ctr"/>
             <a:r>
               <a:rPr lang="zh-CN" altLang="en-US" sz="1000"/>
-              <a:t>任务感知的语义</a:t>
+              <a:t>信道鲁棒的语义</a:t>
             </a:r>
             <a:r>
               <a:rPr lang="en-US" altLang="zh-CN" sz="1000"/>
-              <a:t>HARQ</a:t>
+              <a:t>-</a:t>
             </a:r>
             <a:r>
               <a:rPr lang="zh-CN" altLang="en-US" sz="1000"/>
-              <a:t>与块级语义价值评估</a:t>
+              <a:t>信噪比一</a:t>
+            </a:r>
+            <a:r>
+              <a:rPr lang="zh-CN" altLang="en-US" sz="1000"/>
+              <a:t>联合编解码</a:t>
             </a:r>
             <a:r>
               <a:rPr lang="zh-CN" altLang="en-US" sz="1000"/>
@@ -6571,7 +6572,7 @@
         </p:nvSpPr>
         <p:spPr>
           <a:xfrm>
-            <a:off x="7738110" y="5527040"/>
+            <a:off x="7630160" y="6226175"/>
             <a:ext cx="1575435" cy="398780"/>
           </a:xfrm>
           <a:prstGeom prst="rect">
@@ -6587,23 +6588,11 @@
             <a:pPr algn="ctr"/>
             <a:r>
               <a:rPr lang="zh-CN" altLang="en-US" sz="1000"/>
-              <a:t>语义价值驱动</a:t>
+              <a:t>基于语义价值的自适应重传调度</a:t>
             </a:r>
             <a:r>
               <a:rPr lang="zh-CN" altLang="en-US" sz="1000"/>
-              <a:t>的</a:t>
-            </a:r>
-            <a:endParaRPr lang="zh-CN" altLang="en-US" sz="1000"/>
-          </a:p>
-          <a:p>
-            <a:pPr algn="ctr"/>
-            <a:r>
-              <a:rPr lang="zh-CN" altLang="en-US" sz="1000"/>
-              <a:t>优先级路由</a:t>
-            </a:r>
-            <a:r>
-              <a:rPr lang="zh-CN" altLang="en-US" sz="1000"/>
-              <a:t>算法</a:t>
+              <a:t>机制</a:t>
             </a:r>
             <a:endParaRPr lang="zh-CN" altLang="en-US" sz="1000"/>
           </a:p>
@@ -6617,7 +6606,7 @@
         </p:nvSpPr>
         <p:spPr>
           <a:xfrm flipH="1" flipV="1">
-            <a:off x="8200390" y="5080635"/>
+            <a:off x="8092440" y="5779770"/>
             <a:ext cx="252095" cy="417195"/>
           </a:xfrm>
           <a:custGeom>
@@ -6707,7 +6696,7 @@
         </p:nvSpPr>
         <p:spPr>
           <a:xfrm>
-            <a:off x="7948295" y="5103495"/>
+            <a:off x="7840345" y="5802630"/>
             <a:ext cx="252095" cy="417195"/>
           </a:xfrm>
           <a:custGeom>
@@ -6797,7 +6786,7 @@
         </p:nvSpPr>
         <p:spPr>
           <a:xfrm>
-            <a:off x="7240270" y="5103495"/>
+            <a:off x="7132320" y="5802630"/>
             <a:ext cx="807720" cy="398780"/>
           </a:xfrm>
           <a:prstGeom prst="rect">
@@ -6817,15 +6806,23 @@
                   <a:schemeClr val="bg1"/>
                 </a:solidFill>
               </a:rPr>
-              <a:t>信息价值</a:t>
-            </a:r>
+              <a:t>完整度</a:t>
+            </a:r>
+            <a:endParaRPr lang="zh-CN" altLang="en-US" sz="1000">
+              <a:solidFill>
+                <a:schemeClr val="bg1"/>
+              </a:solidFill>
+            </a:endParaRPr>
+          </a:p>
+          <a:p>
+            <a:pPr algn="ctr"/>
             <a:r>
               <a:rPr lang="zh-CN" altLang="en-US" sz="1000">
                 <a:solidFill>
                   <a:schemeClr val="bg1"/>
                 </a:solidFill>
               </a:rPr>
-              <a:t>量化</a:t>
+              <a:t>保证</a:t>
             </a:r>
             <a:endParaRPr lang="zh-CN" altLang="en-US" sz="1000">
               <a:solidFill>
@@ -6843,7 +6840,7 @@
         </p:nvSpPr>
         <p:spPr>
           <a:xfrm>
-            <a:off x="8341995" y="5118100"/>
+            <a:off x="8234045" y="5817235"/>
             <a:ext cx="807720" cy="398780"/>
           </a:xfrm>
           <a:prstGeom prst="rect">
@@ -6863,7 +6860,7 @@
                   <a:schemeClr val="bg1"/>
                 </a:solidFill>
               </a:rPr>
-              <a:t>星间可靠性</a:t>
+              <a:t>语义重要性</a:t>
             </a:r>
             <a:r>
               <a:rPr lang="zh-CN" altLang="en-US" sz="1000">
@@ -6871,7 +6868,7 @@
                   <a:schemeClr val="bg1"/>
                 </a:solidFill>
               </a:rPr>
-              <a:t>保障</a:t>
+              <a:t>排序</a:t>
             </a:r>
             <a:endParaRPr lang="zh-CN" altLang="en-US" sz="1000">
               <a:solidFill>
@@ -6889,7 +6886,7 @@
         </p:nvSpPr>
         <p:spPr>
           <a:xfrm>
-            <a:off x="7993380" y="5103495"/>
+            <a:off x="7885430" y="5802630"/>
             <a:ext cx="459105" cy="398780"/>
           </a:xfrm>
           <a:prstGeom prst="rect">
@@ -6908,7 +6905,7 @@
                   <a:schemeClr val="bg1"/>
                 </a:solidFill>
               </a:rPr>
-              <a:t>多跳</a:t>
+              <a:t>任务</a:t>
             </a:r>
             <a:endParaRPr lang="zh-CN" altLang="en-US" sz="1000">
               <a:solidFill>
@@ -6923,7 +6920,7 @@
                   <a:schemeClr val="bg1"/>
                 </a:solidFill>
               </a:rPr>
-              <a:t>扩展</a:t>
+              <a:t>驱动</a:t>
             </a:r>
             <a:endParaRPr lang="zh-CN" altLang="en-US" sz="1000">
               <a:solidFill>
@@ -6941,7 +6938,7 @@
         </p:nvSpPr>
         <p:spPr>
           <a:xfrm>
-            <a:off x="2350135" y="3839845"/>
+            <a:off x="2242185" y="4538980"/>
             <a:ext cx="1969770" cy="427990"/>
           </a:xfrm>
           <a:prstGeom prst="roundRect">
@@ -6990,7 +6987,7 @@
         </p:nvSpPr>
         <p:spPr>
           <a:xfrm>
-            <a:off x="2457450" y="3866515"/>
+            <a:off x="2349500" y="4565650"/>
             <a:ext cx="1694815" cy="398780"/>
           </a:xfrm>
           <a:prstGeom prst="rect">
@@ -7024,7 +7021,7 @@
         </p:nvSpPr>
         <p:spPr>
           <a:xfrm>
-            <a:off x="2350135" y="4510405"/>
+            <a:off x="2242185" y="5209540"/>
             <a:ext cx="1969770" cy="427990"/>
           </a:xfrm>
           <a:prstGeom prst="roundRect">
@@ -7073,7 +7070,7 @@
         </p:nvCxnSpPr>
         <p:spPr>
           <a:xfrm>
-            <a:off x="3304540" y="4265295"/>
+            <a:off x="3196590" y="4964430"/>
             <a:ext cx="0" cy="213995"/>
           </a:xfrm>
           <a:prstGeom prst="straightConnector1">
@@ -7110,7 +7107,7 @@
         </p:nvSpPr>
         <p:spPr>
           <a:xfrm>
-            <a:off x="3288665" y="4260215"/>
+            <a:off x="3180715" y="4959350"/>
             <a:ext cx="862965" cy="245110"/>
           </a:xfrm>
           <a:prstGeom prst="rect">
@@ -7155,7 +7152,7 @@
         </p:nvSpPr>
         <p:spPr>
           <a:xfrm>
-            <a:off x="2505075" y="4601845"/>
+            <a:off x="2397125" y="5300980"/>
             <a:ext cx="1694815" cy="245110"/>
           </a:xfrm>
           <a:prstGeom prst="rect">
@@ -7189,7 +7186,7 @@
         </p:nvSpPr>
         <p:spPr>
           <a:xfrm>
-            <a:off x="2237105" y="5118100"/>
+            <a:off x="2129155" y="5817235"/>
             <a:ext cx="2284095" cy="942975"/>
           </a:xfrm>
           <a:prstGeom prst="roundRect">
@@ -7245,7 +7242,7 @@
         </p:nvSpPr>
         <p:spPr>
           <a:xfrm>
-            <a:off x="3046095" y="5377815"/>
+            <a:off x="2938145" y="6076950"/>
             <a:ext cx="655955" cy="601345"/>
           </a:xfrm>
           <a:prstGeom prst="roundRect">
@@ -7294,7 +7291,7 @@
         </p:nvSpPr>
         <p:spPr>
           <a:xfrm>
-            <a:off x="3766185" y="5377815"/>
+            <a:off x="3658235" y="6076950"/>
             <a:ext cx="655955" cy="601345"/>
           </a:xfrm>
           <a:prstGeom prst="roundRect">
@@ -7343,7 +7340,7 @@
         </p:nvSpPr>
         <p:spPr>
           <a:xfrm>
-            <a:off x="2314575" y="5377815"/>
+            <a:off x="2206625" y="6076950"/>
             <a:ext cx="655955" cy="601345"/>
           </a:xfrm>
           <a:prstGeom prst="roundRect">
@@ -7392,7 +7389,7 @@
         </p:nvCxnSpPr>
         <p:spPr>
           <a:xfrm flipV="1">
-            <a:off x="3304540" y="4904105"/>
+            <a:off x="3196590" y="5603240"/>
             <a:ext cx="0" cy="213995"/>
           </a:xfrm>
           <a:prstGeom prst="straightConnector1">
@@ -7429,7 +7426,7 @@
         </p:nvSpPr>
         <p:spPr>
           <a:xfrm>
-            <a:off x="3296285" y="4908550"/>
+            <a:off x="3188335" y="5607685"/>
             <a:ext cx="515620" cy="245110"/>
           </a:xfrm>
           <a:prstGeom prst="rect">
@@ -7466,7 +7463,7 @@
         </p:nvSpPr>
         <p:spPr>
           <a:xfrm>
-            <a:off x="2341245" y="5156835"/>
+            <a:off x="2233295" y="5855970"/>
             <a:ext cx="720090" cy="245110"/>
           </a:xfrm>
           <a:prstGeom prst="rect">
@@ -7503,7 +7500,7 @@
         </p:nvSpPr>
         <p:spPr>
           <a:xfrm>
-            <a:off x="3038475" y="5153660"/>
+            <a:off x="2930525" y="5852795"/>
             <a:ext cx="743585" cy="245110"/>
           </a:xfrm>
           <a:prstGeom prst="rect">
@@ -7540,7 +7537,7 @@
         </p:nvSpPr>
         <p:spPr>
           <a:xfrm>
-            <a:off x="3671570" y="5139690"/>
+            <a:off x="3563620" y="5838825"/>
             <a:ext cx="887095" cy="245110"/>
           </a:xfrm>
           <a:prstGeom prst="rect">
@@ -7577,7 +7574,7 @@
         </p:nvSpPr>
         <p:spPr>
           <a:xfrm>
-            <a:off x="3735705" y="5398135"/>
+            <a:off x="3627755" y="6097270"/>
             <a:ext cx="719455" cy="553085"/>
           </a:xfrm>
           <a:prstGeom prst="rect">
@@ -7627,8 +7624,8 @@
         </p:nvSpPr>
         <p:spPr>
           <a:xfrm>
-            <a:off x="3007995" y="5464810"/>
-            <a:ext cx="719455" cy="398780"/>
+            <a:off x="2900045" y="6163945"/>
+            <a:ext cx="719455" cy="553085"/>
           </a:xfrm>
           <a:prstGeom prst="rect">
             <a:avLst/>
@@ -7643,19 +7640,23 @@
             <a:pPr algn="ctr"/>
             <a:r>
               <a:rPr lang="zh-CN" altLang="en-US" sz="1000"/>
-              <a:t>混合</a:t>
-            </a:r>
-            <a:endParaRPr lang="zh-CN" altLang="en-US" sz="1000"/>
-          </a:p>
-          <a:p>
-            <a:pPr algn="ctr"/>
+              <a:t>基于</a:t>
+            </a:r>
+            <a:r>
+              <a:rPr lang="zh-CN" altLang="en-US" sz="1000">
+                <a:solidFill>
+                  <a:srgbClr val="FF0000"/>
+                </a:solidFill>
+              </a:rPr>
+              <a:t>交替训练</a:t>
+            </a:r>
             <a:r>
               <a:rPr lang="zh-CN" altLang="en-US" sz="1000"/>
-              <a:t>网络</a:t>
+              <a:t>的多目标</a:t>
             </a:r>
             <a:r>
               <a:rPr lang="zh-CN" altLang="en-US" sz="1000"/>
-              <a:t>结构</a:t>
+              <a:t>优化</a:t>
             </a:r>
             <a:endParaRPr lang="zh-CN" altLang="en-US" sz="1000"/>
           </a:p>
@@ -7669,8 +7670,8 @@
         </p:nvSpPr>
         <p:spPr>
           <a:xfrm>
-            <a:off x="2251075" y="5398770"/>
-            <a:ext cx="719455" cy="553085"/>
+            <a:off x="2143125" y="6097905"/>
+            <a:ext cx="719455" cy="706755"/>
           </a:xfrm>
           <a:prstGeom prst="rect">
             <a:avLst/>
@@ -7685,13 +7686,21 @@
             <a:pPr algn="ctr"/>
             <a:r>
               <a:rPr lang="zh-CN" altLang="en-US" sz="1000"/>
-              <a:t>优势值修正与邻居</a:t>
-            </a:r>
-            <a:r>
-              <a:rPr lang="zh-CN" altLang="en-US" sz="1000"/>
-              <a:t>广播</a:t>
-            </a:r>
-            <a:endParaRPr lang="zh-CN" altLang="en-US" sz="1000"/>
+              <a:t>基于优势值估计的</a:t>
+            </a:r>
+            <a:r>
+              <a:rPr lang="zh-CN" altLang="en-US" sz="1000">
+                <a:solidFill>
+                  <a:srgbClr val="FF0000"/>
+                </a:solidFill>
+              </a:rPr>
+              <a:t>分布式一致性</a:t>
+            </a:r>
+            <a:endParaRPr lang="zh-CN" altLang="en-US" sz="1000">
+              <a:solidFill>
+                <a:srgbClr val="FF0000"/>
+              </a:solidFill>
+            </a:endParaRPr>
           </a:p>
         </p:txBody>
       </p:sp>
@@ -7703,7 +7712,7 @@
         </p:nvSpPr>
         <p:spPr>
           <a:xfrm>
-            <a:off x="3197225" y="852805"/>
+            <a:off x="3089275" y="671830"/>
             <a:ext cx="5298440" cy="331470"/>
           </a:xfrm>
           <a:prstGeom prst="roundRect">
@@ -7757,7 +7766,7 @@
         </p:nvSpPr>
         <p:spPr>
           <a:xfrm>
-            <a:off x="3198495" y="815975"/>
+            <a:off x="3090545" y="635000"/>
             <a:ext cx="5574665" cy="368300"/>
           </a:xfrm>
           <a:prstGeom prst="rect">
@@ -7776,7 +7785,7 @@
                   <a:srgbClr val="FF0000"/>
                 </a:solidFill>
               </a:rPr>
-              <a:t>任务驱动</a:t>
+              <a:t>局部自治</a:t>
             </a:r>
             <a:r>
               <a:rPr lang="zh-CN" altLang="en-US" b="1">
@@ -7804,38 +7813,13 @@
       </p:sp>
       <p:sp>
         <p:nvSpPr>
-          <p:cNvPr id="41" name="文本框 40"/>
-          <p:cNvSpPr txBox="1"/>
-          <p:nvPr/>
-        </p:nvSpPr>
-        <p:spPr>
-          <a:xfrm>
-            <a:off x="11563985" y="6451600"/>
-            <a:ext cx="4064000" cy="368300"/>
-          </a:xfrm>
-          <a:prstGeom prst="rect">
-            <a:avLst/>
-          </a:prstGeom>
-          <a:noFill/>
-        </p:spPr>
-        <p:txBody>
-          <a:bodyPr wrap="square" rtlCol="0">
-            <a:spAutoFit/>
-          </a:bodyPr>
-          <a:p>
-            <a:endParaRPr lang="zh-CN" altLang="en-US"/>
-          </a:p>
-        </p:txBody>
-      </p:sp>
-      <p:sp>
-        <p:nvSpPr>
           <p:cNvPr id="47" name="右箭头 46"/>
           <p:cNvSpPr/>
           <p:nvPr/>
         </p:nvSpPr>
         <p:spPr>
           <a:xfrm rot="5400000">
-            <a:off x="5821680" y="1208405"/>
+            <a:off x="5713730" y="1027430"/>
             <a:ext cx="192405" cy="144145"/>
           </a:xfrm>
           <a:prstGeom prst="rightArrow">
@@ -7874,7 +7858,7 @@
         </p:nvSpPr>
         <p:spPr>
           <a:xfrm rot="5400000">
-            <a:off x="7785100" y="1208405"/>
+            <a:off x="7677150" y="1027430"/>
             <a:ext cx="192405" cy="144145"/>
           </a:xfrm>
           <a:prstGeom prst="rightArrow">
@@ -7913,7 +7897,7 @@
         </p:nvSpPr>
         <p:spPr>
           <a:xfrm rot="5400000">
-            <a:off x="3613785" y="1208405"/>
+            <a:off x="3505835" y="1027430"/>
             <a:ext cx="192405" cy="144145"/>
           </a:xfrm>
           <a:prstGeom prst="rightArrow">
@@ -7941,6 +7925,452 @@
           <a:p>
             <a:pPr algn="ctr"/>
             <a:endParaRPr lang="zh-CN" altLang="en-US"/>
+          </a:p>
+        </p:txBody>
+      </p:sp>
+      <p:sp>
+        <p:nvSpPr>
+          <p:cNvPr id="68" name="圆角矩形 67"/>
+          <p:cNvSpPr/>
+          <p:nvPr/>
+        </p:nvSpPr>
+        <p:spPr>
+          <a:xfrm>
+            <a:off x="1911985" y="2927350"/>
+            <a:ext cx="7641590" cy="736600"/>
+          </a:xfrm>
+          <a:prstGeom prst="roundRect">
+            <a:avLst>
+              <a:gd name="adj" fmla="val 7642"/>
+            </a:avLst>
+          </a:prstGeom>
+          <a:solidFill>
+            <a:schemeClr val="accent4">
+              <a:lumMod val="40000"/>
+              <a:lumOff val="60000"/>
+            </a:schemeClr>
+          </a:solidFill>
+        </p:spPr>
+        <p:style>
+          <a:lnRef idx="2">
+            <a:schemeClr val="lt1"/>
+          </a:lnRef>
+          <a:fillRef idx="1">
+            <a:schemeClr val="accent1"/>
+          </a:fillRef>
+          <a:effectRef idx="1">
+            <a:schemeClr val="accent1"/>
+          </a:effectRef>
+          <a:fontRef idx="minor">
+            <a:schemeClr val="lt1"/>
+          </a:fontRef>
+        </p:style>
+        <p:txBody>
+          <a:bodyPr rtlCol="0" anchor="ctr"/>
+          <a:p>
+            <a:pPr algn="ctr"/>
+            <a:endParaRPr lang="zh-CN" altLang="en-US">
+              <a:solidFill>
+                <a:schemeClr val="tx1"/>
+              </a:solidFill>
+            </a:endParaRPr>
+          </a:p>
+        </p:txBody>
+      </p:sp>
+      <p:sp>
+        <p:nvSpPr>
+          <p:cNvPr id="76" name="文本框 75"/>
+          <p:cNvSpPr txBox="1"/>
+          <p:nvPr/>
+        </p:nvSpPr>
+        <p:spPr>
+          <a:xfrm>
+            <a:off x="2611755" y="3780155"/>
+            <a:ext cx="1008380" cy="245110"/>
+          </a:xfrm>
+          <a:prstGeom prst="rect">
+            <a:avLst/>
+          </a:prstGeom>
+          <a:noFill/>
+        </p:spPr>
+        <p:txBody>
+          <a:bodyPr wrap="square" rtlCol="0">
+            <a:spAutoFit/>
+          </a:bodyPr>
+          <a:p>
+            <a:r>
+              <a:rPr lang="en-US" altLang="zh-CN" sz="1000" b="1"/>
+              <a:t>--</a:t>
+            </a:r>
+            <a:r>
+              <a:rPr lang="zh-CN" altLang="en-US" sz="1000" b="1"/>
+              <a:t>分布式</a:t>
+            </a:r>
+            <a:r>
+              <a:rPr lang="zh-CN" altLang="en-US" sz="1000" b="1"/>
+              <a:t>决策</a:t>
+            </a:r>
+            <a:endParaRPr lang="zh-CN" altLang="en-US" sz="1000" b="1"/>
+          </a:p>
+        </p:txBody>
+      </p:sp>
+      <p:sp>
+        <p:nvSpPr>
+          <p:cNvPr id="77" name="流程图: 延期 76"/>
+          <p:cNvSpPr/>
+          <p:nvPr/>
+        </p:nvSpPr>
+        <p:spPr>
+          <a:xfrm rot="5400000">
+            <a:off x="2239645" y="2682875"/>
+            <a:ext cx="158750" cy="647700"/>
+          </a:xfrm>
+          <a:prstGeom prst="flowChartDelay">
+            <a:avLst/>
+          </a:prstGeom>
+          <a:noFill/>
+          <a:ln>
+            <a:solidFill>
+              <a:schemeClr val="bg1">
+                <a:lumMod val="50000"/>
+              </a:schemeClr>
+            </a:solidFill>
+            <a:prstDash val="sysDash"/>
+          </a:ln>
+        </p:spPr>
+        <p:style>
+          <a:lnRef idx="2">
+            <a:schemeClr val="accent1">
+              <a:lumMod val="75000"/>
+            </a:schemeClr>
+          </a:lnRef>
+          <a:fillRef idx="1">
+            <a:schemeClr val="accent1"/>
+          </a:fillRef>
+          <a:effectRef idx="0">
+            <a:srgbClr val="FFFFFF"/>
+          </a:effectRef>
+          <a:fontRef idx="minor">
+            <a:schemeClr val="lt1"/>
+          </a:fontRef>
+        </p:style>
+        <p:txBody>
+          <a:bodyPr rtlCol="0" anchor="ctr"/>
+          <a:p>
+            <a:pPr algn="ctr"/>
+            <a:endParaRPr lang="zh-CN" altLang="en-US"/>
+          </a:p>
+        </p:txBody>
+      </p:sp>
+      <p:sp>
+        <p:nvSpPr>
+          <p:cNvPr id="82" name="文本框 81"/>
+          <p:cNvSpPr txBox="1"/>
+          <p:nvPr/>
+        </p:nvSpPr>
+        <p:spPr>
+          <a:xfrm>
+            <a:off x="2607945" y="2875915"/>
+            <a:ext cx="1012190" cy="245110"/>
+          </a:xfrm>
+          <a:prstGeom prst="rect">
+            <a:avLst/>
+          </a:prstGeom>
+          <a:noFill/>
+        </p:spPr>
+        <p:txBody>
+          <a:bodyPr wrap="square" rtlCol="0">
+            <a:spAutoFit/>
+          </a:bodyPr>
+          <a:p>
+            <a:r>
+              <a:rPr lang="en-US" altLang="zh-CN" sz="1000" b="1"/>
+              <a:t>--</a:t>
+            </a:r>
+            <a:r>
+              <a:rPr lang="zh-CN" altLang="en-US" sz="1000" b="1"/>
+              <a:t>分布式</a:t>
+            </a:r>
+            <a:r>
+              <a:rPr lang="zh-CN" altLang="en-US" sz="1000" b="1"/>
+              <a:t>感知</a:t>
+            </a:r>
+            <a:endParaRPr lang="zh-CN" altLang="en-US" sz="1000" b="1"/>
+          </a:p>
+        </p:txBody>
+      </p:sp>
+      <p:sp>
+        <p:nvSpPr>
+          <p:cNvPr id="95" name="文本框 94"/>
+          <p:cNvSpPr txBox="1"/>
+          <p:nvPr/>
+        </p:nvSpPr>
+        <p:spPr>
+          <a:xfrm>
+            <a:off x="1983105" y="2875915"/>
+            <a:ext cx="1012190" cy="245110"/>
+          </a:xfrm>
+          <a:prstGeom prst="rect">
+            <a:avLst/>
+          </a:prstGeom>
+          <a:noFill/>
+        </p:spPr>
+        <p:txBody>
+          <a:bodyPr wrap="square" rtlCol="0">
+            <a:spAutoFit/>
+          </a:bodyPr>
+          <a:p>
+            <a:r>
+              <a:rPr lang="zh-CN" altLang="en-US" sz="1000" b="1"/>
+              <a:t>技术</a:t>
+            </a:r>
+            <a:r>
+              <a:rPr lang="zh-CN" altLang="en-US" sz="1000" b="1"/>
+              <a:t>方案</a:t>
+            </a:r>
+            <a:endParaRPr lang="zh-CN" altLang="en-US" sz="1000" b="1"/>
+          </a:p>
+        </p:txBody>
+      </p:sp>
+      <p:cxnSp>
+        <p:nvCxnSpPr>
+          <p:cNvPr id="98" name="直接箭头连接符 97"/>
+          <p:cNvCxnSpPr/>
+          <p:nvPr/>
+        </p:nvCxnSpPr>
+        <p:spPr>
+          <a:xfrm flipH="1">
+            <a:off x="8261985" y="2806065"/>
+            <a:ext cx="0" cy="85725"/>
+          </a:xfrm>
+          <a:prstGeom prst="straightConnector1">
+            <a:avLst/>
+          </a:prstGeom>
+          <a:ln w="19050">
+            <a:solidFill>
+              <a:schemeClr val="tx2">
+                <a:lumMod val="60000"/>
+                <a:lumOff val="40000"/>
+              </a:schemeClr>
+            </a:solidFill>
+            <a:tailEnd type="none"/>
+          </a:ln>
+        </p:spPr>
+        <p:style>
+          <a:lnRef idx="2">
+            <a:schemeClr val="accent1"/>
+          </a:lnRef>
+          <a:fillRef idx="0">
+            <a:srgbClr val="FFFFFF"/>
+          </a:fillRef>
+          <a:effectRef idx="0">
+            <a:srgbClr val="FFFFFF"/>
+          </a:effectRef>
+          <a:fontRef idx="minor">
+            <a:schemeClr val="tx1"/>
+          </a:fontRef>
+        </p:style>
+      </p:cxnSp>
+      <p:cxnSp>
+        <p:nvCxnSpPr>
+          <p:cNvPr id="108" name="直接箭头连接符 107"/>
+          <p:cNvCxnSpPr/>
+          <p:nvPr/>
+        </p:nvCxnSpPr>
+        <p:spPr>
+          <a:xfrm flipH="1">
+            <a:off x="5807710" y="2806065"/>
+            <a:ext cx="0" cy="85725"/>
+          </a:xfrm>
+          <a:prstGeom prst="straightConnector1">
+            <a:avLst/>
+          </a:prstGeom>
+          <a:ln w="19050">
+            <a:solidFill>
+              <a:schemeClr val="tx2">
+                <a:lumMod val="60000"/>
+                <a:lumOff val="40000"/>
+              </a:schemeClr>
+            </a:solidFill>
+            <a:tailEnd type="none"/>
+          </a:ln>
+        </p:spPr>
+        <p:style>
+          <a:lnRef idx="2">
+            <a:schemeClr val="accent1"/>
+          </a:lnRef>
+          <a:fillRef idx="0">
+            <a:srgbClr val="FFFFFF"/>
+          </a:fillRef>
+          <a:effectRef idx="0">
+            <a:srgbClr val="FFFFFF"/>
+          </a:effectRef>
+          <a:fontRef idx="minor">
+            <a:schemeClr val="tx1"/>
+          </a:fontRef>
+        </p:style>
+      </p:cxnSp>
+      <p:cxnSp>
+        <p:nvCxnSpPr>
+          <p:cNvPr id="109" name="直接箭头连接符 108"/>
+          <p:cNvCxnSpPr/>
+          <p:nvPr/>
+        </p:nvCxnSpPr>
+        <p:spPr>
+          <a:xfrm flipH="1">
+            <a:off x="3436620" y="2806065"/>
+            <a:ext cx="0" cy="85725"/>
+          </a:xfrm>
+          <a:prstGeom prst="straightConnector1">
+            <a:avLst/>
+          </a:prstGeom>
+          <a:ln w="19050">
+            <a:solidFill>
+              <a:schemeClr val="tx2">
+                <a:lumMod val="60000"/>
+                <a:lumOff val="40000"/>
+              </a:schemeClr>
+            </a:solidFill>
+            <a:tailEnd type="none"/>
+          </a:ln>
+        </p:spPr>
+        <p:style>
+          <a:lnRef idx="2">
+            <a:schemeClr val="accent1"/>
+          </a:lnRef>
+          <a:fillRef idx="0">
+            <a:srgbClr val="FFFFFF"/>
+          </a:fillRef>
+          <a:effectRef idx="0">
+            <a:srgbClr val="FFFFFF"/>
+          </a:effectRef>
+          <a:fontRef idx="minor">
+            <a:schemeClr val="tx1"/>
+          </a:fontRef>
+        </p:style>
+      </p:cxnSp>
+      <p:sp>
+        <p:nvSpPr>
+          <p:cNvPr id="110" name="圆角矩形 109"/>
+          <p:cNvSpPr/>
+          <p:nvPr/>
+        </p:nvSpPr>
+        <p:spPr>
+          <a:xfrm>
+            <a:off x="3515995" y="3291840"/>
+            <a:ext cx="4827905" cy="299720"/>
+          </a:xfrm>
+          <a:prstGeom prst="roundRect">
+            <a:avLst/>
+          </a:prstGeom>
+          <a:solidFill>
+            <a:schemeClr val="accent4">
+              <a:lumMod val="20000"/>
+              <a:lumOff val="80000"/>
+              <a:alpha val="77000"/>
+            </a:schemeClr>
+          </a:solidFill>
+          <a:ln>
+            <a:noFill/>
+          </a:ln>
+        </p:spPr>
+        <p:style>
+          <a:lnRef idx="2">
+            <a:schemeClr val="accent1">
+              <a:lumMod val="75000"/>
+            </a:schemeClr>
+          </a:lnRef>
+          <a:fillRef idx="1">
+            <a:schemeClr val="accent1"/>
+          </a:fillRef>
+          <a:effectRef idx="0">
+            <a:srgbClr val="FFFFFF"/>
+          </a:effectRef>
+          <a:fontRef idx="minor">
+            <a:schemeClr val="lt1"/>
+          </a:fontRef>
+        </p:style>
+        <p:txBody>
+          <a:bodyPr rtlCol="0" anchor="ctr"/>
+          <a:p>
+            <a:pPr algn="ctr"/>
+            <a:endParaRPr lang="zh-CN" altLang="en-US"/>
+          </a:p>
+        </p:txBody>
+      </p:sp>
+      <p:sp>
+        <p:nvSpPr>
+          <p:cNvPr id="111" name="文本框 110"/>
+          <p:cNvSpPr txBox="1"/>
+          <p:nvPr/>
+        </p:nvSpPr>
+        <p:spPr>
+          <a:xfrm>
+            <a:off x="3619500" y="2991485"/>
+            <a:ext cx="4567555" cy="300355"/>
+          </a:xfrm>
+          <a:prstGeom prst="rect">
+            <a:avLst/>
+          </a:prstGeom>
+          <a:noFill/>
+        </p:spPr>
+        <p:txBody>
+          <a:bodyPr wrap="square" rtlCol="0">
+            <a:noAutofit/>
+          </a:bodyPr>
+          <a:p>
+            <a:pPr algn="ctr"/>
+            <a:r>
+              <a:rPr lang="zh-CN" altLang="en-US" sz="1200" b="1"/>
+              <a:t>面向分布式控制的多跳信息交互与表征学习机制（第</a:t>
+            </a:r>
+            <a:r>
+              <a:rPr lang="zh-CN" altLang="en-US" sz="1200" b="1"/>
+              <a:t>二章）</a:t>
+            </a:r>
+            <a:endParaRPr lang="zh-CN" altLang="en-US" sz="1200" b="1"/>
+          </a:p>
+          <a:p>
+            <a:pPr algn="ctr"/>
+            <a:endParaRPr lang="zh-CN" altLang="en-US" sz="1200" b="1"/>
+          </a:p>
+        </p:txBody>
+      </p:sp>
+      <p:sp>
+        <p:nvSpPr>
+          <p:cNvPr id="112" name="文本框 111"/>
+          <p:cNvSpPr txBox="1"/>
+          <p:nvPr/>
+        </p:nvSpPr>
+        <p:spPr>
+          <a:xfrm>
+            <a:off x="3594100" y="3291840"/>
+            <a:ext cx="4592320" cy="245110"/>
+          </a:xfrm>
+          <a:prstGeom prst="rect">
+            <a:avLst/>
+          </a:prstGeom>
+          <a:noFill/>
+        </p:spPr>
+        <p:txBody>
+          <a:bodyPr wrap="square" rtlCol="0">
+            <a:spAutoFit/>
+          </a:bodyPr>
+          <a:p>
+            <a:pPr algn="ctr"/>
+            <a:r>
+              <a:rPr lang="zh-CN" altLang="en-US" sz="1000"/>
+              <a:t>基于时空相关性的不可靠节点修复机制</a:t>
+            </a:r>
+            <a:r>
+              <a:rPr lang="en-US" altLang="zh-CN" sz="1000"/>
+              <a:t>+</a:t>
+            </a:r>
+            <a:r>
+              <a:rPr lang="zh-CN" altLang="en-US" sz="1000"/>
+              <a:t>基于反应扩散的长程多跳表征传播机制</a:t>
+            </a:r>
+            <a:endParaRPr lang="zh-CN" altLang="en-US" sz="1000"/>
           </a:p>
         </p:txBody>
       </p:sp>

--- a/figures/ppt/研究框架.pptx
+++ b/figures/ppt/研究框架.pptx
@@ -107,12 +107,12 @@
   <p:extLst>
     <p:ext uri="{EFAFB233-063F-42B5-8137-9DF3F51BA10A}">
       <p15:sldGuideLst xmlns:p15="http://schemas.microsoft.com/office/powerpoint/2012/main">
-        <p15:guide id="1" orient="horz" pos="2187" userDrawn="1">
+        <p15:guide id="1" orient="horz" pos="2142" userDrawn="1">
           <p15:clr>
             <a:srgbClr val="A4A3A4"/>
           </p15:clr>
         </p15:guide>
-        <p15:guide id="2" pos="3841" userDrawn="1">
+        <p15:guide id="2" pos="3782" userDrawn="1">
           <p15:clr>
             <a:srgbClr val="A4A3A4"/>
           </p15:clr>
@@ -3326,7 +3326,7 @@
         <p:spPr>
           <a:xfrm>
             <a:off x="631825" y="2216150"/>
-            <a:ext cx="517525" cy="2030095"/>
+            <a:ext cx="517525" cy="2461260"/>
           </a:xfrm>
           <a:prstGeom prst="rect">
             <a:avLst/>
@@ -3339,52 +3339,31 @@
           </a:bodyPr>
           <a:p>
             <a:r>
-              <a:rPr lang="zh-CN" altLang="en-US" b="1"/>
+              <a:rPr lang="zh-CN" altLang="en-US" sz="2200" b="1"/>
               <a:t>问</a:t>
             </a:r>
-            <a:endParaRPr lang="zh-CN" altLang="en-US" b="1"/>
-          </a:p>
-          <a:p>
-            <a:r>
-              <a:rPr lang="zh-CN" altLang="en-US" b="1"/>
+            <a:endParaRPr lang="zh-CN" altLang="en-US" sz="2200" b="1"/>
+          </a:p>
+          <a:p>
+            <a:r>
+              <a:rPr lang="zh-CN" altLang="en-US" sz="2200" b="1"/>
               <a:t>题</a:t>
             </a:r>
-            <a:endParaRPr lang="zh-CN" altLang="en-US" b="1"/>
-          </a:p>
-          <a:p>
-            <a:r>
-              <a:rPr lang="zh-CN" altLang="en-US" b="1"/>
+            <a:endParaRPr lang="zh-CN" altLang="en-US" sz="2200" b="1"/>
+          </a:p>
+          <a:p>
+            <a:r>
+              <a:rPr lang="zh-CN" altLang="en-US" sz="2200" b="1"/>
               <a:t>与</a:t>
             </a:r>
-            <a:endParaRPr lang="zh-CN" altLang="en-US" b="1"/>
-          </a:p>
-          <a:p>
-            <a:r>
-              <a:rPr lang="zh-CN" altLang="en-US" b="1"/>
-              <a:t>解</a:t>
-            </a:r>
-            <a:endParaRPr lang="zh-CN" altLang="en-US" b="1"/>
-          </a:p>
-          <a:p>
-            <a:r>
-              <a:rPr lang="zh-CN" altLang="en-US" b="1"/>
-              <a:t>决</a:t>
-            </a:r>
-            <a:endParaRPr lang="zh-CN" altLang="en-US" b="1"/>
-          </a:p>
-          <a:p>
-            <a:r>
-              <a:rPr lang="zh-CN" altLang="en-US" b="1"/>
-              <a:t>方</a:t>
-            </a:r>
-            <a:endParaRPr lang="zh-CN" altLang="en-US" b="1"/>
-          </a:p>
-          <a:p>
-            <a:r>
-              <a:rPr lang="zh-CN" altLang="en-US" b="1"/>
-              <a:t>案</a:t>
-            </a:r>
-            <a:endParaRPr lang="zh-CN" altLang="en-US" b="1"/>
+            <a:endParaRPr lang="zh-CN" altLang="en-US" sz="2200" b="1"/>
+          </a:p>
+          <a:p>
+            <a:r>
+              <a:rPr lang="zh-CN" altLang="en-US" sz="2200" b="1"/>
+              <a:t>技术路线</a:t>
+            </a:r>
+            <a:endParaRPr lang="zh-CN" altLang="en-US" sz="2200" b="1"/>
           </a:p>
         </p:txBody>
       </p:sp>
@@ -3711,7 +3690,7 @@
                   <a:schemeClr val="tx1"/>
                 </a:solidFill>
               </a:rPr>
-              <a:t>跨层无线资源调度</a:t>
+              <a:t>无线资源</a:t>
             </a:r>
             <a:r>
               <a:rPr lang="zh-CN" altLang="en-US" sz="1200">
@@ -3719,7 +3698,7 @@
                   <a:schemeClr val="tx1"/>
                 </a:solidFill>
               </a:rPr>
-              <a:t>效率</a:t>
+              <a:t>使用效率</a:t>
             </a:r>
             <a:endParaRPr lang="zh-CN" altLang="en-US" sz="1200">
               <a:solidFill>
@@ -3751,7 +3730,7 @@
                   <a:schemeClr val="tx1"/>
                 </a:solidFill>
               </a:rPr>
-              <a:t>保障</a:t>
+              <a:t>满足率</a:t>
             </a:r>
             <a:endParaRPr lang="zh-CN" altLang="en-US" sz="1200" b="1">
               <a:solidFill>
@@ -3815,15 +3794,7 @@
                   <a:schemeClr val="tx1"/>
                 </a:solidFill>
               </a:rPr>
-              <a:t>接入</a:t>
-            </a:r>
-            <a:r>
-              <a:rPr lang="zh-CN" altLang="en-US" sz="1200">
-                <a:solidFill>
-                  <a:schemeClr val="tx1"/>
-                </a:solidFill>
-              </a:rPr>
-              <a:t>可靠性</a:t>
+              <a:t>接入连续性与可靠性</a:t>
             </a:r>
             <a:br>
               <a:rPr lang="zh-CN" altLang="en-US" sz="1200">
@@ -3838,7 +3809,15 @@
                   <a:schemeClr val="tx1"/>
                 </a:solidFill>
               </a:rPr>
-              <a:t>公平连续接入</a:t>
+              <a:t>长期公平</a:t>
+            </a:r>
+            <a:r>
+              <a:rPr lang="zh-CN" altLang="en-US" sz="1200" b="1">
+                <a:solidFill>
+                  <a:schemeClr val="tx1"/>
+                </a:solidFill>
+              </a:rPr>
+              <a:t>接入</a:t>
             </a:r>
             <a:endParaRPr lang="zh-CN" altLang="en-US" sz="1200" b="1">
               <a:solidFill>
@@ -3902,15 +3881,31 @@
                   <a:schemeClr val="tx1"/>
                 </a:solidFill>
               </a:rPr>
-              <a:t>面向多任务的可泛化的、</a:t>
-            </a:r>
+              <a:t>端到端传输可靠性</a:t>
+            </a:r>
+            <a:endParaRPr lang="zh-CN" altLang="en-US" sz="1200">
+              <a:solidFill>
+                <a:schemeClr val="tx1"/>
+              </a:solidFill>
+            </a:endParaRPr>
+          </a:p>
+          <a:p>
+            <a:pPr algn="ctr"/>
             <a:r>
               <a:rPr lang="zh-CN" altLang="en-US" sz="1200" b="1">
                 <a:solidFill>
                   <a:schemeClr val="tx1"/>
                 </a:solidFill>
               </a:rPr>
-              <a:t>高可靠传输</a:t>
+              <a:t>任务相关语义恢复</a:t>
+            </a:r>
+            <a:r>
+              <a:rPr lang="zh-CN" altLang="en-US" sz="1200" b="1">
+                <a:solidFill>
+                  <a:schemeClr val="tx1"/>
+                </a:solidFill>
+              </a:rPr>
+              <a:t>性能</a:t>
             </a:r>
             <a:endParaRPr lang="zh-CN" altLang="en-US" sz="1200" b="1">
               <a:solidFill>
@@ -4211,7 +4206,7 @@
                   <a:schemeClr val="tx1"/>
                 </a:solidFill>
               </a:rPr>
-              <a:t>失效</a:t>
+              <a:t>受损</a:t>
             </a:r>
             <a:endParaRPr lang="zh-CN" altLang="en-US" sz="1200">
               <a:solidFill>
@@ -4356,36 +4351,20 @@
           <a:p>
             <a:pPr algn="ctr"/>
             <a:r>
-              <a:rPr lang="zh-CN" altLang="en-US" sz="1200" b="1">
-                <a:solidFill>
-                  <a:srgbClr val="C00000"/>
-                </a:solidFill>
-              </a:rPr>
-              <a:t>传输</a:t>
-            </a:r>
-            <a:r>
-              <a:rPr lang="en-US" altLang="zh-CN" sz="1200" b="1">
-                <a:solidFill>
-                  <a:srgbClr val="C00000"/>
-                </a:solidFill>
-              </a:rPr>
-              <a:t>/</a:t>
-            </a:r>
-            <a:r>
-              <a:rPr lang="zh-CN" altLang="en-US" sz="1200" b="1">
-                <a:solidFill>
-                  <a:srgbClr val="C00000"/>
-                </a:solidFill>
-              </a:rPr>
-              <a:t>业务随机</a:t>
-            </a:r>
-            <a:r>
               <a:rPr lang="zh-CN" altLang="en-US" sz="1200">
                 <a:solidFill>
                   <a:schemeClr val="tx1"/>
                 </a:solidFill>
               </a:rPr>
-              <a:t>反应式调度</a:t>
+              <a:t>网络随机波动</a:t>
+            </a:r>
+            <a:r>
+              <a:rPr lang="zh-CN" altLang="en-US" sz="1200">
+                <a:solidFill>
+                  <a:schemeClr val="tx1"/>
+                </a:solidFill>
+              </a:rPr>
+              <a:t>使得</a:t>
             </a:r>
             <a:endParaRPr lang="zh-CN" altLang="en-US" sz="1200">
               <a:solidFill>
@@ -4409,7 +4388,7 @@
                   <a:schemeClr val="tx1"/>
                 </a:solidFill>
               </a:rPr>
-              <a:t>无法实现长期</a:t>
+              <a:t>无法长期</a:t>
             </a:r>
             <a:r>
               <a:rPr lang="zh-CN" altLang="en-US" sz="1200">
@@ -4475,13 +4454,29 @@
           <a:bodyPr rtlCol="0" anchor="ctr"/>
           <a:p>
             <a:pPr algn="ctr"/>
+            <a:endParaRPr lang="en-US" altLang="zh-CN" sz="1200">
+              <a:solidFill>
+                <a:schemeClr val="tx1"/>
+              </a:solidFill>
+            </a:endParaRPr>
+          </a:p>
+          <a:p>
+            <a:pPr algn="ctr"/>
+            <a:r>
+              <a:rPr lang="en-US" altLang="zh-CN" sz="1200">
+                <a:solidFill>
+                  <a:schemeClr val="tx1"/>
+                </a:solidFill>
+              </a:rPr>
+              <a:t>LEO</a:t>
+            </a:r>
             <a:r>
               <a:rPr lang="zh-CN" altLang="en-US" sz="1200">
                 <a:solidFill>
                   <a:schemeClr val="tx1"/>
                 </a:solidFill>
               </a:rPr>
-              <a:t>非对称语义观测</a:t>
+              <a:t>卫星计算资源受限</a:t>
             </a:r>
             <a:r>
               <a:rPr lang="zh-CN" altLang="en-US" sz="1200">
@@ -4500,20 +4495,20 @@
           <a:p>
             <a:pPr algn="ctr"/>
             <a:r>
+              <a:rPr lang="zh-CN" altLang="en-US" sz="1200">
+                <a:solidFill>
+                  <a:schemeClr val="tx1"/>
+                </a:solidFill>
+              </a:rPr>
+              <a:t>语义模型</a:t>
+            </a:r>
+            <a:r>
               <a:rPr lang="zh-CN" altLang="en-US" sz="1200" b="1">
                 <a:solidFill>
                   <a:srgbClr val="C00000"/>
                 </a:solidFill>
               </a:rPr>
-              <a:t>端到端</a:t>
-            </a:r>
-            <a:r>
-              <a:rPr lang="zh-CN" altLang="en-US" sz="1200" b="1">
-                <a:solidFill>
-                  <a:srgbClr val="C00000"/>
-                </a:solidFill>
-              </a:rPr>
-              <a:t>信息完整性</a:t>
+              <a:t>单次</a:t>
             </a:r>
             <a:r>
               <a:rPr lang="zh-CN" altLang="en-US" sz="1200">
@@ -4521,16 +4516,16 @@
                   <a:schemeClr val="tx1"/>
                 </a:solidFill>
               </a:rPr>
-              <a:t>无法</a:t>
-            </a:r>
-            <a:r>
-              <a:rPr lang="zh-CN" altLang="en-US" sz="1200">
-                <a:solidFill>
-                  <a:schemeClr val="tx1"/>
-                </a:solidFill>
-              </a:rPr>
-              <a:t>保证</a:t>
-            </a:r>
+              <a:t>传输能力不足</a:t>
+            </a:r>
+            <a:endParaRPr lang="zh-CN" altLang="en-US" sz="1200">
+              <a:solidFill>
+                <a:schemeClr val="tx1"/>
+              </a:solidFill>
+            </a:endParaRPr>
+          </a:p>
+          <a:p>
+            <a:pPr algn="ctr"/>
             <a:endParaRPr lang="zh-CN" altLang="en-US" sz="1200">
               <a:solidFill>
                 <a:schemeClr val="tx1"/>
@@ -4784,7 +4779,7 @@
             <a:pPr algn="ctr"/>
             <a:r>
               <a:rPr lang="zh-CN" altLang="en-US" sz="1200" b="1"/>
-              <a:t>面向公平性保障的分布式用户协作切换机制（第三章）</a:t>
+              <a:t>基于局部公平性估计的分布式协作接入切换机制（第三章）</a:t>
             </a:r>
             <a:endParaRPr lang="zh-CN" altLang="en-US" sz="1200" b="1"/>
           </a:p>
@@ -5230,7 +5225,7 @@
             <a:pPr algn="ctr"/>
             <a:r>
               <a:rPr lang="zh-CN" altLang="en-US" sz="1200" b="1"/>
-              <a:t>内生演化驱动的切片</a:t>
+              <a:t>生成式网络态势感知的切片</a:t>
             </a:r>
             <a:r>
               <a:rPr lang="en-US" altLang="zh-CN" sz="1200" b="1"/>
@@ -5238,19 +5233,11 @@
             </a:r>
             <a:r>
               <a:rPr lang="zh-CN" altLang="en-US" sz="1200" b="1"/>
-              <a:t>跨层协同与长期</a:t>
-            </a:r>
-            <a:r>
-              <a:rPr lang="en-US" altLang="zh-CN" sz="1200" b="1"/>
-              <a:t>QoS</a:t>
+              <a:t>分层协作优化</a:t>
             </a:r>
             <a:r>
               <a:rPr lang="zh-CN" altLang="en-US" sz="1200" b="1"/>
-              <a:t>保障</a:t>
-            </a:r>
-            <a:r>
-              <a:rPr lang="zh-CN" altLang="en-US" sz="1200" b="1"/>
-              <a:t>机制（第</a:t>
+              <a:t>框架（第</a:t>
             </a:r>
             <a:r>
               <a:rPr lang="zh-CN" altLang="en-US" sz="1200" b="1"/>
@@ -5284,19 +5271,11 @@
             <a:pPr algn="ctr"/>
             <a:r>
               <a:rPr lang="zh-CN" altLang="en-US" sz="1200" b="1"/>
-              <a:t>面向非对称语义观测的语义</a:t>
-            </a:r>
-            <a:r>
-              <a:rPr lang="en-US" altLang="zh-CN" sz="1200" b="1"/>
-              <a:t>HARQ</a:t>
+              <a:t>基于任务反馈</a:t>
             </a:r>
             <a:r>
               <a:rPr lang="zh-CN" altLang="en-US" sz="1200" b="1"/>
-              <a:t>分层通信框架</a:t>
-            </a:r>
-            <a:r>
-              <a:rPr lang="zh-CN" altLang="en-US" sz="1200" b="1"/>
-              <a:t>（第</a:t>
+              <a:t>与协同增量重传的轻量化语义传输机制（第</a:t>
             </a:r>
             <a:r>
               <a:rPr lang="zh-CN" altLang="en-US" sz="1200" b="1"/>
@@ -5399,15 +5378,15 @@
             <a:pPr algn="ctr"/>
             <a:r>
               <a:rPr lang="zh-CN" altLang="en-US" sz="1000"/>
-              <a:t>粗细粒度</a:t>
+              <a:t>切片预算与 </a:t>
+            </a:r>
+            <a:r>
+              <a:rPr lang="en-US" altLang="zh-CN" sz="1000"/>
+              <a:t>MAC </a:t>
             </a:r>
             <a:r>
               <a:rPr lang="zh-CN" altLang="en-US" sz="1000"/>
-              <a:t>跨层资源调度</a:t>
-            </a:r>
-            <a:r>
-              <a:rPr lang="zh-CN" altLang="en-US" sz="1000"/>
-              <a:t>模型</a:t>
+              <a:t>协同模型</a:t>
             </a:r>
             <a:endParaRPr lang="zh-CN" altLang="en-US" sz="1000"/>
           </a:p>
@@ -5563,8 +5542,8 @@
         </p:nvSpPr>
         <p:spPr>
           <a:xfrm>
-            <a:off x="5380355" y="4964430"/>
-            <a:ext cx="862965" cy="245110"/>
+            <a:off x="5289550" y="4964430"/>
+            <a:ext cx="1127760" cy="245110"/>
           </a:xfrm>
           <a:prstGeom prst="rect">
             <a:avLst/>
@@ -5582,15 +5561,7 @@
                   <a:schemeClr val="bg1"/>
                 </a:solidFill>
               </a:rPr>
-              <a:t>分层</a:t>
-            </a:r>
-            <a:r>
-              <a:rPr lang="en-US" altLang="zh-CN" sz="1000">
-                <a:solidFill>
-                  <a:schemeClr val="bg1"/>
-                </a:solidFill>
-              </a:rPr>
-              <a:t>  </a:t>
+              <a:t>双时间尺度</a:t>
             </a:r>
             <a:r>
               <a:rPr lang="zh-CN" altLang="en-US" sz="1000">
@@ -5598,7 +5569,7 @@
                   <a:schemeClr val="bg1"/>
                 </a:solidFill>
               </a:rPr>
-              <a:t>解耦</a:t>
+              <a:t>协同</a:t>
             </a:r>
             <a:endParaRPr lang="zh-CN" altLang="en-US" sz="1000">
               <a:solidFill>
@@ -5632,31 +5603,15 @@
             <a:pPr algn="ctr"/>
             <a:r>
               <a:rPr lang="zh-CN" altLang="en-US" sz="1000"/>
-              <a:t>面向</a:t>
-            </a:r>
-            <a:r>
-              <a:rPr lang="en-US" altLang="zh-CN" sz="1000">
-                <a:solidFill>
-                  <a:srgbClr val="FF0000"/>
-                </a:solidFill>
-              </a:rPr>
-              <a:t>QoS</a:t>
-            </a:r>
-            <a:r>
-              <a:rPr lang="zh-CN" altLang="en-US" sz="1000">
-                <a:solidFill>
-                  <a:srgbClr val="FF0000"/>
-                </a:solidFill>
-              </a:rPr>
-              <a:t>解析预测</a:t>
+              <a:t>面向 </a:t>
+            </a:r>
+            <a:r>
+              <a:rPr lang="en-US" altLang="zh-CN" sz="1000"/>
+              <a:t>QoS </a:t>
             </a:r>
             <a:r>
               <a:rPr lang="zh-CN" altLang="en-US" sz="1000"/>
-              <a:t>的资源可行域决策</a:t>
-            </a:r>
-            <a:r>
-              <a:rPr lang="zh-CN" altLang="en-US" sz="1000"/>
-              <a:t>机制</a:t>
+              <a:t>可行域预测的切片预算决策</a:t>
             </a:r>
             <a:endParaRPr lang="zh-CN" altLang="en-US" sz="1000"/>
           </a:p>
@@ -5899,8 +5854,8 @@
         </p:nvSpPr>
         <p:spPr>
           <a:xfrm>
-            <a:off x="5526405" y="5807710"/>
-            <a:ext cx="459105" cy="398780"/>
+            <a:off x="5533390" y="5842635"/>
+            <a:ext cx="459105" cy="245110"/>
           </a:xfrm>
           <a:prstGeom prst="rect">
             <a:avLst/>
@@ -5918,22 +5873,7 @@
                   <a:schemeClr val="bg1"/>
                 </a:solidFill>
               </a:rPr>
-              <a:t>共识</a:t>
-            </a:r>
-            <a:endParaRPr lang="zh-CN" altLang="en-US" sz="1000">
-              <a:solidFill>
-                <a:schemeClr val="bg1"/>
-              </a:solidFill>
-            </a:endParaRPr>
-          </a:p>
-          <a:p>
-            <a:r>
-              <a:rPr lang="zh-CN" altLang="en-US" sz="1000">
-                <a:solidFill>
-                  <a:schemeClr val="bg1"/>
-                </a:solidFill>
-              </a:rPr>
-              <a:t>一致</a:t>
+              <a:t>执行</a:t>
             </a:r>
             <a:endParaRPr lang="zh-CN" altLang="en-US" sz="1000">
               <a:solidFill>
@@ -5989,7 +5929,7 @@
         <p:spPr>
           <a:xfrm>
             <a:off x="5989320" y="5852795"/>
-            <a:ext cx="459105" cy="245110"/>
+            <a:ext cx="459105" cy="398780"/>
           </a:xfrm>
           <a:prstGeom prst="rect">
             <a:avLst/>
@@ -6009,6 +5949,14 @@
               </a:rPr>
               <a:t>反馈</a:t>
             </a:r>
+            <a:r>
+              <a:rPr lang="zh-CN" altLang="en-US" sz="1000">
+                <a:solidFill>
+                  <a:schemeClr val="bg1"/>
+                </a:solidFill>
+              </a:rPr>
+              <a:t>校正</a:t>
+            </a:r>
             <a:endParaRPr lang="zh-CN" altLang="en-US" sz="1000">
               <a:solidFill>
                 <a:schemeClr val="bg1"/>
@@ -6045,27 +5993,31 @@
             </a:r>
             <a:r>
               <a:rPr lang="en-US" altLang="zh-CN" sz="1000"/>
-              <a:t>Lyapunov</a:t>
+              <a:t>QoS</a:t>
             </a:r>
             <a:r>
               <a:rPr lang="zh-CN" altLang="en-US" sz="1000"/>
-              <a:t>的</a:t>
+              <a:t>可行</a:t>
+            </a:r>
+            <a:r>
+              <a:rPr lang="zh-CN" altLang="en-US" sz="1000"/>
+              <a:t>性的</a:t>
             </a:r>
             <a:endParaRPr lang="zh-CN" altLang="en-US" sz="1000"/>
           </a:p>
           <a:p>
             <a:pPr algn="ctr"/>
             <a:r>
-              <a:rPr lang="zh-CN" altLang="en-US" sz="1000">
-                <a:solidFill>
-                  <a:srgbClr val="FF0000"/>
-                </a:solidFill>
-              </a:rPr>
-              <a:t>实时长期优化</a:t>
+              <a:rPr lang="en-US" altLang="zh-CN" sz="1000"/>
+              <a:t>RBG-</a:t>
             </a:r>
             <a:r>
               <a:rPr lang="zh-CN" altLang="en-US" sz="1000"/>
-              <a:t>方法</a:t>
+              <a:t>功率联合</a:t>
+            </a:r>
+            <a:r>
+              <a:rPr lang="zh-CN" altLang="en-US" sz="1000"/>
+              <a:t>分配</a:t>
             </a:r>
             <a:endParaRPr lang="zh-CN" altLang="en-US" sz="1000"/>
           </a:p>
@@ -6526,8 +6478,8 @@
         </p:nvSpPr>
         <p:spPr>
           <a:xfrm>
-            <a:off x="7331710" y="5408930"/>
-            <a:ext cx="1575435" cy="398780"/>
+            <a:off x="7368540" y="5457190"/>
+            <a:ext cx="1575435" cy="245110"/>
           </a:xfrm>
           <a:prstGeom prst="rect">
             <a:avLst/>
@@ -6542,25 +6494,13 @@
             <a:pPr algn="ctr"/>
             <a:r>
               <a:rPr lang="zh-CN" altLang="en-US" sz="1000"/>
-              <a:t>信道鲁棒的语义</a:t>
+              <a:t>增量编码与轻量化 </a:t>
             </a:r>
             <a:r>
               <a:rPr lang="en-US" altLang="zh-CN" sz="1000"/>
-              <a:t>-</a:t>
-            </a:r>
-            <a:r>
-              <a:rPr lang="zh-CN" altLang="en-US" sz="1000"/>
-              <a:t>信噪比一</a:t>
-            </a:r>
-            <a:r>
-              <a:rPr lang="zh-CN" altLang="en-US" sz="1000"/>
-              <a:t>联合编解码</a:t>
-            </a:r>
-            <a:r>
-              <a:rPr lang="zh-CN" altLang="en-US" sz="1000"/>
-              <a:t>机制</a:t>
-            </a:r>
-            <a:endParaRPr lang="zh-CN" altLang="en-US" sz="1000"/>
+              <a:t>JSCC</a:t>
+            </a:r>
+            <a:endParaRPr lang="en-US" altLang="zh-CN" sz="1000"/>
           </a:p>
         </p:txBody>
       </p:sp>
@@ -6588,11 +6528,11 @@
             <a:pPr algn="ctr"/>
             <a:r>
               <a:rPr lang="zh-CN" altLang="en-US" sz="1000"/>
-              <a:t>基于语义价值的自适应重传调度</a:t>
+              <a:t>基于任务反馈的选择性</a:t>
             </a:r>
             <a:r>
               <a:rPr lang="zh-CN" altLang="en-US" sz="1000"/>
-              <a:t>机制</a:t>
+              <a:t>增量重传机制</a:t>
             </a:r>
             <a:endParaRPr lang="zh-CN" altLang="en-US" sz="1000"/>
           </a:p>
@@ -6806,7 +6746,15 @@
                   <a:schemeClr val="bg1"/>
                 </a:solidFill>
               </a:rPr>
-              <a:t>完整度</a:t>
+              <a:t>语义</a:t>
+            </a:r>
+            <a:r>
+              <a:rPr lang="zh-CN" altLang="en-US" sz="1000">
+                <a:solidFill>
+                  <a:schemeClr val="bg1"/>
+                </a:solidFill>
+              </a:rPr>
+              <a:t>缺失</a:t>
             </a:r>
             <a:endParaRPr lang="zh-CN" altLang="en-US" sz="1000">
               <a:solidFill>
@@ -6822,7 +6770,7 @@
                   <a:schemeClr val="bg1"/>
                 </a:solidFill>
               </a:rPr>
-              <a:t>保证</a:t>
+              <a:t>补充</a:t>
             </a:r>
             <a:endParaRPr lang="zh-CN" altLang="en-US" sz="1000">
               <a:solidFill>
@@ -6920,7 +6868,7 @@
                   <a:schemeClr val="bg1"/>
                 </a:solidFill>
               </a:rPr>
-              <a:t>驱动</a:t>
+              <a:t>反馈</a:t>
             </a:r>
             <a:endParaRPr lang="zh-CN" altLang="en-US" sz="1000">
               <a:solidFill>
@@ -7003,11 +6951,7 @@
             <a:pPr algn="ctr"/>
             <a:r>
               <a:rPr lang="zh-CN" altLang="en-US" sz="1000"/>
-              <a:t>低轨卫星动态多重覆盖下的用户分布式切换</a:t>
-            </a:r>
-            <a:r>
-              <a:rPr lang="zh-CN" altLang="en-US" sz="1000"/>
-              <a:t>模型</a:t>
+              <a:t>高动态多重覆盖下的分布式条件切换模型</a:t>
             </a:r>
             <a:endParaRPr lang="zh-CN" altLang="en-US" sz="1000"/>
           </a:p>
@@ -7108,7 +7052,7 @@
         <p:spPr>
           <a:xfrm>
             <a:off x="3180715" y="4959350"/>
-            <a:ext cx="862965" cy="245110"/>
+            <a:ext cx="1133475" cy="245110"/>
           </a:xfrm>
           <a:prstGeom prst="rect">
             <a:avLst/>
@@ -7126,15 +7070,7 @@
                   <a:schemeClr val="bg1"/>
                 </a:solidFill>
               </a:rPr>
-              <a:t>公平性</a:t>
-            </a:r>
-            <a:r>
-              <a:rPr lang="zh-CN" altLang="en-US" sz="1000">
-                <a:solidFill>
-                  <a:schemeClr val="bg1"/>
-                </a:solidFill>
-              </a:rPr>
-              <a:t>编码</a:t>
+              <a:t>局部公平性估计</a:t>
             </a:r>
             <a:endParaRPr lang="zh-CN" altLang="en-US" sz="1000">
               <a:solidFill>
@@ -7152,8 +7088,8 @@
         </p:nvSpPr>
         <p:spPr>
           <a:xfrm>
-            <a:off x="2397125" y="5300980"/>
-            <a:ext cx="1694815" cy="245110"/>
+            <a:off x="2397125" y="5238115"/>
+            <a:ext cx="1694815" cy="398780"/>
           </a:xfrm>
           <a:prstGeom prst="rect">
             <a:avLst/>
@@ -7168,11 +7104,19 @@
             <a:pPr algn="ctr"/>
             <a:r>
               <a:rPr lang="zh-CN" altLang="en-US" sz="1000"/>
-              <a:t>多目标马尔科夫决策</a:t>
-            </a:r>
+              <a:t>吞吐--公平联合学习</a:t>
+            </a:r>
+            <a:endParaRPr lang="zh-CN" altLang="en-US" sz="1000"/>
+          </a:p>
+          <a:p>
+            <a:pPr algn="ctr"/>
             <a:r>
               <a:rPr lang="zh-CN" altLang="en-US" sz="1000"/>
-              <a:t>过程</a:t>
+              <a:t>与</a:t>
+            </a:r>
+            <a:r>
+              <a:rPr lang="zh-CN" altLang="en-US" sz="1000"/>
+              <a:t>优化</a:t>
             </a:r>
             <a:endParaRPr lang="zh-CN" altLang="en-US" sz="1000"/>
           </a:p>
@@ -7640,23 +7584,19 @@
             <a:pPr algn="ctr"/>
             <a:r>
               <a:rPr lang="zh-CN" altLang="en-US" sz="1000"/>
-              <a:t>基于</a:t>
-            </a:r>
-            <a:r>
-              <a:rPr lang="zh-CN" altLang="en-US" sz="1000">
-                <a:solidFill>
-                  <a:srgbClr val="FF0000"/>
-                </a:solidFill>
-              </a:rPr>
-              <a:t>交替训练</a:t>
+              <a:t>吞吐</a:t>
+            </a:r>
+            <a:r>
+              <a:rPr lang="en-US" altLang="zh-CN" sz="1000"/>
+              <a:t>-</a:t>
             </a:r>
             <a:r>
               <a:rPr lang="zh-CN" altLang="en-US" sz="1000"/>
-              <a:t>的多目标</a:t>
+              <a:t>公平两阶段交替</a:t>
             </a:r>
             <a:r>
               <a:rPr lang="zh-CN" altLang="en-US" sz="1000"/>
-              <a:t>优化</a:t>
+              <a:t>训练</a:t>
             </a:r>
             <a:endParaRPr lang="zh-CN" altLang="en-US" sz="1000"/>
           </a:p>
@@ -7671,7 +7611,7 @@
         <p:spPr>
           <a:xfrm>
             <a:off x="2143125" y="6097905"/>
-            <a:ext cx="719455" cy="706755"/>
+            <a:ext cx="719455" cy="553085"/>
           </a:xfrm>
           <a:prstGeom prst="rect">
             <a:avLst/>
@@ -7686,21 +7626,33 @@
             <a:pPr algn="ctr"/>
             <a:r>
               <a:rPr lang="zh-CN" altLang="en-US" sz="1000"/>
-              <a:t>基于优势值估计的</a:t>
-            </a:r>
-            <a:r>
-              <a:rPr lang="zh-CN" altLang="en-US" sz="1000">
-                <a:solidFill>
-                  <a:srgbClr val="FF0000"/>
-                </a:solidFill>
-              </a:rPr>
-              <a:t>分布式一致性</a:t>
-            </a:r>
-            <a:endParaRPr lang="zh-CN" altLang="en-US" sz="1000">
-              <a:solidFill>
-                <a:srgbClr val="FF0000"/>
-              </a:solidFill>
-            </a:endParaRPr>
+              <a:t>低开销</a:t>
+            </a:r>
+            <a:endParaRPr lang="zh-CN" altLang="en-US" sz="1000"/>
+          </a:p>
+          <a:p>
+            <a:pPr algn="ctr"/>
+            <a:r>
+              <a:rPr lang="zh-CN" altLang="en-US" sz="1000"/>
+              <a:t>邻域</a:t>
+            </a:r>
+            <a:r>
+              <a:rPr lang="zh-CN" altLang="en-US" sz="1000"/>
+              <a:t>优势</a:t>
+            </a:r>
+            <a:endParaRPr lang="zh-CN" altLang="en-US" sz="1000"/>
+          </a:p>
+          <a:p>
+            <a:pPr algn="ctr"/>
+            <a:r>
+              <a:rPr lang="zh-CN" altLang="en-US" sz="1000"/>
+              <a:t>信息</a:t>
+            </a:r>
+            <a:r>
+              <a:rPr lang="zh-CN" altLang="en-US" sz="1000"/>
+              <a:t>交互</a:t>
+            </a:r>
+            <a:endParaRPr lang="zh-CN" altLang="en-US" sz="1000"/>
           </a:p>
         </p:txBody>
       </p:sp>
@@ -7712,8 +7664,8 @@
         </p:nvSpPr>
         <p:spPr>
           <a:xfrm>
-            <a:off x="3089275" y="671830"/>
-            <a:ext cx="5298440" cy="331470"/>
+            <a:off x="2862580" y="671830"/>
+            <a:ext cx="5926455" cy="331470"/>
           </a:xfrm>
           <a:prstGeom prst="roundRect">
             <a:avLst/>
@@ -7766,8 +7718,8 @@
         </p:nvSpPr>
         <p:spPr>
           <a:xfrm>
-            <a:off x="3090545" y="635000"/>
-            <a:ext cx="5574665" cy="368300"/>
+            <a:off x="2995295" y="627380"/>
+            <a:ext cx="5837555" cy="368300"/>
           </a:xfrm>
           <a:prstGeom prst="rect">
             <a:avLst/>
@@ -7782,32 +7734,48 @@
             <a:r>
               <a:rPr lang="zh-CN" altLang="en-US" b="1">
                 <a:solidFill>
-                  <a:srgbClr val="FF0000"/>
+                  <a:schemeClr val="tx1"/>
                 </a:solidFill>
               </a:rPr>
-              <a:t>局部自治</a:t>
+              <a:t>面向端到端</a:t>
+            </a:r>
+            <a:r>
+              <a:rPr lang="en-US" altLang="zh-CN" b="1">
+                <a:solidFill>
+                  <a:schemeClr val="tx1"/>
+                </a:solidFill>
+              </a:rPr>
+              <a:t>QoS</a:t>
             </a:r>
             <a:r>
               <a:rPr lang="zh-CN" altLang="en-US" b="1">
                 <a:solidFill>
-                  <a:srgbClr val="FF0000"/>
+                  <a:schemeClr val="tx1"/>
                 </a:solidFill>
               </a:rPr>
-              <a:t>的高效、高可靠</a:t>
-            </a:r>
-            <a:r>
-              <a:rPr lang="zh-CN" altLang="en-US" b="1"/>
-              <a:t>的</a:t>
-            </a:r>
-            <a:r>
-              <a:rPr lang="en-US" altLang="zh-CN" b="1"/>
-              <a:t>LEO</a:t>
-            </a:r>
-            <a:r>
-              <a:rPr lang="zh-CN" altLang="en-US" b="1"/>
-              <a:t>卫星网络端到端传输</a:t>
-            </a:r>
-            <a:endParaRPr lang="zh-CN" altLang="en-US" b="1"/>
+              <a:t>保障的</a:t>
+            </a:r>
+            <a:r>
+              <a:rPr lang="zh-CN" altLang="en-US" b="1">
+                <a:solidFill>
+                  <a:srgbClr val="C00000"/>
+                </a:solidFill>
+              </a:rPr>
+              <a:t>公平、高效、高可靠</a:t>
+            </a:r>
+            <a:r>
+              <a:rPr lang="zh-CN" altLang="en-US" b="1">
+                <a:solidFill>
+                  <a:schemeClr val="tx1"/>
+                </a:solidFill>
+              </a:rPr>
+              <a:t>分布式管控</a:t>
+            </a:r>
+            <a:endParaRPr lang="zh-CN" altLang="en-US" b="1">
+              <a:solidFill>
+                <a:schemeClr val="tx1"/>
+              </a:solidFill>
+            </a:endParaRPr>
           </a:p>
         </p:txBody>
       </p:sp>
@@ -8257,8 +8225,8 @@
         </p:nvSpPr>
         <p:spPr>
           <a:xfrm>
-            <a:off x="3515995" y="3291840"/>
-            <a:ext cx="4827905" cy="299720"/>
+            <a:off x="4885690" y="3203575"/>
+            <a:ext cx="4513580" cy="387985"/>
           </a:xfrm>
           <a:prstGeom prst="roundRect">
             <a:avLst/>
@@ -8306,7 +8274,7 @@
         </p:nvSpPr>
         <p:spPr>
           <a:xfrm>
-            <a:off x="3619500" y="2991485"/>
+            <a:off x="3619500" y="2927350"/>
             <a:ext cx="4567555" cy="300355"/>
           </a:xfrm>
           <a:prstGeom prst="rect">
@@ -8322,7 +8290,11 @@
             <a:pPr algn="ctr"/>
             <a:r>
               <a:rPr lang="zh-CN" altLang="en-US" sz="1200" b="1"/>
-              <a:t>面向分布式控制的多跳信息交互与表征学习机制（第</a:t>
+              <a:t>多源置信度调控的分布式网络状态感知</a:t>
+            </a:r>
+            <a:r>
+              <a:rPr lang="zh-CN" altLang="en-US" sz="1200" b="1"/>
+              <a:t>框架（第</a:t>
             </a:r>
             <a:r>
               <a:rPr lang="zh-CN" altLang="en-US" sz="1200" b="1"/>
@@ -8344,8 +8316,8 @@
         </p:nvSpPr>
         <p:spPr>
           <a:xfrm>
-            <a:off x="3594100" y="3291840"/>
-            <a:ext cx="4592320" cy="245110"/>
+            <a:off x="4806950" y="3224530"/>
+            <a:ext cx="4592320" cy="275590"/>
           </a:xfrm>
           <a:prstGeom prst="rect">
             <a:avLst/>
@@ -8359,18 +8331,174 @@
           <a:p>
             <a:pPr algn="ctr"/>
             <a:r>
-              <a:rPr lang="zh-CN" altLang="en-US" sz="1000"/>
-              <a:t>基于时空相关性的不可靠节点修复机制</a:t>
-            </a:r>
-            <a:r>
-              <a:rPr lang="en-US" altLang="zh-CN" sz="1000"/>
-              <a:t>+</a:t>
-            </a:r>
-            <a:r>
-              <a:rPr lang="zh-CN" altLang="en-US" sz="1000"/>
-              <a:t>基于反应扩散的长程多跳表征传播机制</a:t>
-            </a:r>
-            <a:endParaRPr lang="zh-CN" altLang="en-US" sz="1000"/>
+              <a:rPr lang="zh-CN" altLang="en-US" sz="1200"/>
+              <a:t>退化遥测状态校准与置信度评估 + 置信度约束的多跳状态传播</a:t>
+            </a:r>
+            <a:endParaRPr lang="zh-CN" altLang="en-US" sz="1200"/>
+          </a:p>
+        </p:txBody>
+      </p:sp>
+      <p:sp>
+        <p:nvSpPr>
+          <p:cNvPr id="6" name="矩形 5"/>
+          <p:cNvSpPr/>
+          <p:nvPr/>
+        </p:nvSpPr>
+        <p:spPr>
+          <a:xfrm>
+            <a:off x="2822575" y="3203575"/>
+            <a:ext cx="1491615" cy="447040"/>
+          </a:xfrm>
+          <a:prstGeom prst="rect">
+            <a:avLst/>
+          </a:prstGeom>
+          <a:solidFill>
+            <a:schemeClr val="accent4">
+              <a:lumMod val="20000"/>
+              <a:lumOff val="80000"/>
+            </a:schemeClr>
+          </a:solidFill>
+          <a:ln>
+            <a:solidFill>
+              <a:schemeClr val="bg1">
+                <a:lumMod val="50000"/>
+              </a:schemeClr>
+            </a:solidFill>
+          </a:ln>
+        </p:spPr>
+        <p:style>
+          <a:lnRef idx="2">
+            <a:schemeClr val="accent1">
+              <a:lumMod val="75000"/>
+            </a:schemeClr>
+          </a:lnRef>
+          <a:fillRef idx="1">
+            <a:schemeClr val="accent1"/>
+          </a:fillRef>
+          <a:effectRef idx="0">
+            <a:srgbClr val="FFFFFF"/>
+          </a:effectRef>
+          <a:fontRef idx="minor">
+            <a:schemeClr val="lt1"/>
+          </a:fontRef>
+        </p:style>
+        <p:txBody>
+          <a:bodyPr rtlCol="0" anchor="ctr"/>
+          <a:p>
+            <a:pPr algn="ctr"/>
+            <a:r>
+              <a:rPr lang="zh-CN" altLang="en-US" sz="1200">
+                <a:solidFill>
+                  <a:schemeClr val="tx1"/>
+                </a:solidFill>
+              </a:rPr>
+              <a:t>退化</a:t>
+            </a:r>
+            <a:r>
+              <a:rPr lang="zh-CN" altLang="en-US" sz="1200">
+                <a:solidFill>
+                  <a:schemeClr val="tx1"/>
+                </a:solidFill>
+              </a:rPr>
+              <a:t>遥测下</a:t>
+            </a:r>
+            <a:endParaRPr lang="zh-CN" altLang="en-US" sz="1200">
+              <a:solidFill>
+                <a:schemeClr val="tx1"/>
+              </a:solidFill>
+            </a:endParaRPr>
+          </a:p>
+          <a:p>
+            <a:pPr algn="ctr"/>
+            <a:r>
+              <a:rPr lang="zh-CN" altLang="en-US" sz="1200" b="1">
+                <a:solidFill>
+                  <a:srgbClr val="C00000"/>
+                </a:solidFill>
+              </a:rPr>
+              <a:t>本地视图不</a:t>
+            </a:r>
+            <a:r>
+              <a:rPr lang="zh-CN" altLang="en-US" sz="1200" b="1">
+                <a:solidFill>
+                  <a:srgbClr val="C00000"/>
+                </a:solidFill>
+              </a:rPr>
+              <a:t>可信</a:t>
+            </a:r>
+            <a:endParaRPr lang="zh-CN" altLang="en-US" sz="1200" b="1">
+              <a:solidFill>
+                <a:srgbClr val="C00000"/>
+              </a:solidFill>
+            </a:endParaRPr>
+          </a:p>
+        </p:txBody>
+      </p:sp>
+      <p:cxnSp>
+        <p:nvCxnSpPr>
+          <p:cNvPr id="15" name="直接箭头连接符 14"/>
+          <p:cNvCxnSpPr/>
+          <p:nvPr/>
+        </p:nvCxnSpPr>
+        <p:spPr>
+          <a:xfrm flipV="1">
+            <a:off x="4365625" y="3429000"/>
+            <a:ext cx="504000" cy="0"/>
+          </a:xfrm>
+          <a:prstGeom prst="straightConnector1">
+            <a:avLst/>
+          </a:prstGeom>
+          <a:ln w="19050">
+            <a:solidFill>
+              <a:schemeClr val="tx2">
+                <a:lumMod val="60000"/>
+                <a:lumOff val="40000"/>
+              </a:schemeClr>
+            </a:solidFill>
+            <a:tailEnd type="arrow"/>
+          </a:ln>
+        </p:spPr>
+        <p:style>
+          <a:lnRef idx="2">
+            <a:schemeClr val="accent1"/>
+          </a:lnRef>
+          <a:fillRef idx="0">
+            <a:srgbClr val="FFFFFF"/>
+          </a:fillRef>
+          <a:effectRef idx="0">
+            <a:srgbClr val="FFFFFF"/>
+          </a:effectRef>
+          <a:fontRef idx="minor">
+            <a:schemeClr val="tx1"/>
+          </a:fontRef>
+        </p:style>
+      </p:cxnSp>
+      <p:sp>
+        <p:nvSpPr>
+          <p:cNvPr id="41" name="文本框 40"/>
+          <p:cNvSpPr txBox="1"/>
+          <p:nvPr/>
+        </p:nvSpPr>
+        <p:spPr>
+          <a:xfrm>
+            <a:off x="4347210" y="3401060"/>
+            <a:ext cx="574040" cy="306705"/>
+          </a:xfrm>
+          <a:prstGeom prst="rect">
+            <a:avLst/>
+          </a:prstGeom>
+          <a:noFill/>
+        </p:spPr>
+        <p:txBody>
+          <a:bodyPr wrap="square" rtlCol="0">
+            <a:spAutoFit/>
+          </a:bodyPr>
+          <a:p>
+            <a:r>
+              <a:rPr lang="zh-CN" altLang="en-US" sz="1400"/>
+              <a:t>挑战</a:t>
+            </a:r>
+            <a:endParaRPr lang="zh-CN" altLang="en-US" sz="1400"/>
           </a:p>
         </p:txBody>
       </p:sp>
